--- a/GenAI/wk4-embedding-vectorDB-SemanticSearch/vectorDB-SematicSearch-pt1.pptx
+++ b/GenAI/wk4-embedding-vectorDB-SemanticSearch/vectorDB-SematicSearch-pt1.pptx
@@ -5,10 +5,10 @@
     <p:sldMasterId id="2147483648" r:id="rId1"/>
   </p:sldMasterIdLst>
   <p:notesMasterIdLst>
-    <p:notesMasterId r:id="rId13"/>
+    <p:notesMasterId r:id="rId15"/>
   </p:notesMasterIdLst>
   <p:handoutMasterIdLst>
-    <p:handoutMasterId r:id="rId14"/>
+    <p:handoutMasterId r:id="rId16"/>
   </p:handoutMasterIdLst>
   <p:sldIdLst>
     <p:sldId id="257" r:id="rId2"/>
@@ -20,8 +20,10 @@
     <p:sldId id="281" r:id="rId8"/>
     <p:sldId id="286" r:id="rId9"/>
     <p:sldId id="283" r:id="rId10"/>
-    <p:sldId id="285" r:id="rId11"/>
-    <p:sldId id="275" r:id="rId12"/>
+    <p:sldId id="287" r:id="rId11"/>
+    <p:sldId id="288" r:id="rId12"/>
+    <p:sldId id="285" r:id="rId13"/>
+    <p:sldId id="275" r:id="rId14"/>
   </p:sldIdLst>
   <p:sldSz cx="12192000" cy="6858000"/>
   <p:notesSz cx="6858000" cy="9144000"/>
@@ -225,7 +227,7 @@
           <a:p>
             <a:fld id="{7BAEECA8-D063-486F-AE31-5020270C1449}" type="datetimeFigureOut">
               <a:rPr lang="en-US" smtClean="0"/>
-              <a:t>3/20/2026</a:t>
+              <a:t>5/21/2026</a:t>
             </a:fld>
             <a:endParaRPr lang="en-US"/>
           </a:p>
@@ -1330,7 +1332,7 @@
           <a:p>
             <a:fld id="{CB233BD1-3BA8-448D-9D08-7846095EA517}" type="datetimeFigureOut">
               <a:rPr lang="en-US" smtClean="0"/>
-              <a:t>3/20/2026</a:t>
+              <a:t>5/21/2026</a:t>
             </a:fld>
             <a:endParaRPr lang="en-US"/>
           </a:p>
@@ -1744,7 +1746,7 @@
           <a:p>
             <a:fld id="{6383FAE1-13DE-4511-8C1B-C8AFB720664C}" type="datetimeFigureOut">
               <a:rPr lang="en-US" smtClean="0"/>
-              <a:t>3/20/2026</a:t>
+              <a:t>5/21/2026</a:t>
             </a:fld>
             <a:endParaRPr lang="en-US"/>
           </a:p>
@@ -1942,7 +1944,7 @@
           <a:p>
             <a:fld id="{6383FAE1-13DE-4511-8C1B-C8AFB720664C}" type="datetimeFigureOut">
               <a:rPr lang="en-US" smtClean="0"/>
-              <a:t>3/20/2026</a:t>
+              <a:t>5/21/2026</a:t>
             </a:fld>
             <a:endParaRPr lang="en-US"/>
           </a:p>
@@ -2150,7 +2152,7 @@
           <a:p>
             <a:fld id="{6383FAE1-13DE-4511-8C1B-C8AFB720664C}" type="datetimeFigureOut">
               <a:rPr lang="en-US" smtClean="0"/>
-              <a:t>3/20/2026</a:t>
+              <a:t>5/21/2026</a:t>
             </a:fld>
             <a:endParaRPr lang="en-US"/>
           </a:p>
@@ -2348,7 +2350,7 @@
           <a:p>
             <a:fld id="{6383FAE1-13DE-4511-8C1B-C8AFB720664C}" type="datetimeFigureOut">
               <a:rPr lang="en-US" smtClean="0"/>
-              <a:t>3/20/2026</a:t>
+              <a:t>5/21/2026</a:t>
             </a:fld>
             <a:endParaRPr lang="en-US"/>
           </a:p>
@@ -2623,7 +2625,7 @@
           <a:p>
             <a:fld id="{6383FAE1-13DE-4511-8C1B-C8AFB720664C}" type="datetimeFigureOut">
               <a:rPr lang="en-US" smtClean="0"/>
-              <a:t>3/20/2026</a:t>
+              <a:t>5/21/2026</a:t>
             </a:fld>
             <a:endParaRPr lang="en-US"/>
           </a:p>
@@ -2888,7 +2890,7 @@
           <a:p>
             <a:fld id="{6383FAE1-13DE-4511-8C1B-C8AFB720664C}" type="datetimeFigureOut">
               <a:rPr lang="en-US" smtClean="0"/>
-              <a:t>3/20/2026</a:t>
+              <a:t>5/21/2026</a:t>
             </a:fld>
             <a:endParaRPr lang="en-US"/>
           </a:p>
@@ -3300,7 +3302,7 @@
           <a:p>
             <a:fld id="{6383FAE1-13DE-4511-8C1B-C8AFB720664C}" type="datetimeFigureOut">
               <a:rPr lang="en-US" smtClean="0"/>
-              <a:t>3/20/2026</a:t>
+              <a:t>5/21/2026</a:t>
             </a:fld>
             <a:endParaRPr lang="en-US"/>
           </a:p>
@@ -3441,7 +3443,7 @@
           <a:p>
             <a:fld id="{6383FAE1-13DE-4511-8C1B-C8AFB720664C}" type="datetimeFigureOut">
               <a:rPr lang="en-US" smtClean="0"/>
-              <a:t>3/20/2026</a:t>
+              <a:t>5/21/2026</a:t>
             </a:fld>
             <a:endParaRPr lang="en-US"/>
           </a:p>
@@ -3554,7 +3556,7 @@
           <a:p>
             <a:fld id="{6383FAE1-13DE-4511-8C1B-C8AFB720664C}" type="datetimeFigureOut">
               <a:rPr lang="en-US" smtClean="0"/>
-              <a:t>3/20/2026</a:t>
+              <a:t>5/21/2026</a:t>
             </a:fld>
             <a:endParaRPr lang="en-US"/>
           </a:p>
@@ -3865,7 +3867,7 @@
           <a:p>
             <a:fld id="{6383FAE1-13DE-4511-8C1B-C8AFB720664C}" type="datetimeFigureOut">
               <a:rPr lang="en-US" smtClean="0"/>
-              <a:t>3/20/2026</a:t>
+              <a:t>5/21/2026</a:t>
             </a:fld>
             <a:endParaRPr lang="en-US"/>
           </a:p>
@@ -4156,7 +4158,7 @@
           <a:p>
             <a:fld id="{6383FAE1-13DE-4511-8C1B-C8AFB720664C}" type="datetimeFigureOut">
               <a:rPr lang="en-US" smtClean="0"/>
-              <a:t>3/20/2026</a:t>
+              <a:t>5/21/2026</a:t>
             </a:fld>
             <a:endParaRPr lang="en-US"/>
           </a:p>
@@ -4400,7 +4402,7 @@
           <a:p>
             <a:fld id="{6383FAE1-13DE-4511-8C1B-C8AFB720664C}" type="datetimeFigureOut">
               <a:rPr lang="en-US" smtClean="0"/>
-              <a:t>3/20/2026</a:t>
+              <a:t>5/21/2026</a:t>
             </a:fld>
             <a:endParaRPr lang="en-US"/>
           </a:p>
@@ -5235,6 +5237,849 @@
         <p:cNvPr id="1" name="">
           <a:extLst>
             <a:ext uri="{FF2B5EF4-FFF2-40B4-BE49-F238E27FC236}">
+              <a16:creationId xmlns:a16="http://schemas.microsoft.com/office/drawing/2014/main" id="{01F60028-CFF7-F866-E575-BB50342D45B0}"/>
+            </a:ext>
+          </a:extLst>
+        </p:cNvPr>
+        <p:cNvGrpSpPr/>
+        <p:nvPr/>
+      </p:nvGrpSpPr>
+      <p:grpSpPr>
+        <a:xfrm>
+          <a:off x="0" y="0"/>
+          <a:ext cx="0" cy="0"/>
+          <a:chOff x="0" y="0"/>
+          <a:chExt cx="0" cy="0"/>
+        </a:xfrm>
+      </p:grpSpPr>
+      <p:pic>
+        <p:nvPicPr>
+          <p:cNvPr id="4" name="Picture 3">
+            <a:extLst>
+              <a:ext uri="{FF2B5EF4-FFF2-40B4-BE49-F238E27FC236}">
+                <a16:creationId xmlns:a16="http://schemas.microsoft.com/office/drawing/2014/main" id="{F11B16F8-465F-C06B-E59C-50B9094D4FC4}"/>
+              </a:ext>
+            </a:extLst>
+          </p:cNvPr>
+          <p:cNvPicPr>
+            <a:picLocks noChangeAspect="1"/>
+          </p:cNvPicPr>
+          <p:nvPr/>
+        </p:nvPicPr>
+        <p:blipFill>
+          <a:blip r:embed="rId2"/>
+          <a:stretch>
+            <a:fillRect/>
+          </a:stretch>
+        </p:blipFill>
+        <p:spPr>
+          <a:xfrm>
+            <a:off x="3959352" y="1938036"/>
+            <a:ext cx="8250554" cy="4389081"/>
+          </a:xfrm>
+          <a:prstGeom prst="rect">
+            <a:avLst/>
+          </a:prstGeom>
+        </p:spPr>
+      </p:pic>
+      <p:sp>
+        <p:nvSpPr>
+          <p:cNvPr id="9" name="TextBox 8">
+            <a:extLst>
+              <a:ext uri="{FF2B5EF4-FFF2-40B4-BE49-F238E27FC236}">
+                <a16:creationId xmlns:a16="http://schemas.microsoft.com/office/drawing/2014/main" id="{9EB08F5D-DB0B-C230-F5C7-B4AFE250E38D}"/>
+              </a:ext>
+            </a:extLst>
+          </p:cNvPr>
+          <p:cNvSpPr txBox="1"/>
+          <p:nvPr/>
+        </p:nvSpPr>
+        <p:spPr>
+          <a:xfrm>
+            <a:off x="233680" y="213328"/>
+            <a:ext cx="11287760" cy="2308324"/>
+          </a:xfrm>
+          <a:prstGeom prst="rect">
+            <a:avLst/>
+          </a:prstGeom>
+          <a:noFill/>
+        </p:spPr>
+        <p:txBody>
+          <a:bodyPr wrap="square">
+            <a:spAutoFit/>
+          </a:bodyPr>
+          <a:lstStyle/>
+          <a:p>
+            <a:r>
+              <a:rPr lang="en-US" sz="2400" b="1" dirty="0">
+                <a:solidFill>
+                  <a:schemeClr val="accent6">
+                    <a:lumMod val="60000"/>
+                    <a:lumOff val="40000"/>
+                  </a:schemeClr>
+                </a:solidFill>
+              </a:rPr>
+              <a:t>Common Vector DB as of today:</a:t>
+            </a:r>
+          </a:p>
+          <a:p>
+            <a:endParaRPr lang="en-US" sz="2400" b="1" dirty="0">
+              <a:solidFill>
+                <a:schemeClr val="accent6">
+                  <a:lumMod val="60000"/>
+                  <a:lumOff val="40000"/>
+                </a:schemeClr>
+              </a:solidFill>
+            </a:endParaRPr>
+          </a:p>
+          <a:p>
+            <a:pPr marL="342900" indent="-342900">
+              <a:buFont typeface="Arial" panose="020B0604020202020204" pitchFamily="34" charset="0"/>
+              <a:buChar char="•"/>
+            </a:pPr>
+            <a:r>
+              <a:rPr lang="en-US" sz="2400" b="1" dirty="0">
+                <a:solidFill>
+                  <a:schemeClr val="accent6">
+                    <a:lumMod val="60000"/>
+                    <a:lumOff val="40000"/>
+                  </a:schemeClr>
+                </a:solidFill>
+              </a:rPr>
+              <a:t>Pine Vector DB: </a:t>
+            </a:r>
+          </a:p>
+          <a:p>
+            <a:pPr marL="800100" lvl="1" indent="-342900">
+              <a:buFont typeface="Arial" panose="020B0604020202020204" pitchFamily="34" charset="0"/>
+              <a:buChar char="•"/>
+            </a:pPr>
+            <a:r>
+              <a:rPr lang="en-US" sz="2400" dirty="0">
+                <a:solidFill>
+                  <a:schemeClr val="accent6">
+                    <a:lumMod val="60000"/>
+                    <a:lumOff val="40000"/>
+                  </a:schemeClr>
+                </a:solidFill>
+              </a:rPr>
+              <a:t>User need to login (free)</a:t>
+            </a:r>
+          </a:p>
+          <a:p>
+            <a:pPr marL="800100" lvl="1" indent="-342900">
+              <a:buFont typeface="Arial" panose="020B0604020202020204" pitchFamily="34" charset="0"/>
+              <a:buChar char="•"/>
+            </a:pPr>
+            <a:r>
+              <a:rPr lang="en-US" sz="2400" dirty="0">
+                <a:solidFill>
+                  <a:schemeClr val="accent6">
+                    <a:lumMod val="60000"/>
+                    <a:lumOff val="40000"/>
+                  </a:schemeClr>
+                </a:solidFill>
+              </a:rPr>
+              <a:t>Get API Key and use it (Look at docs on how to use API keys with python code)</a:t>
+            </a:r>
+          </a:p>
+          <a:p>
+            <a:pPr marL="800100" lvl="1" indent="-342900">
+              <a:buFont typeface="Arial" panose="020B0604020202020204" pitchFamily="34" charset="0"/>
+              <a:buChar char="•"/>
+            </a:pPr>
+            <a:r>
+              <a:rPr lang="en-US" sz="2400" dirty="0">
+                <a:solidFill>
+                  <a:schemeClr val="accent6">
+                    <a:lumMod val="60000"/>
+                    <a:lumOff val="40000"/>
+                  </a:schemeClr>
+                </a:solidFill>
+              </a:rPr>
+              <a:t>You can have up to 5 index for free. (See the </a:t>
+            </a:r>
+            <a:r>
+              <a:rPr lang="en-US" sz="2400" dirty="0" err="1">
+                <a:solidFill>
+                  <a:schemeClr val="accent6">
+                    <a:lumMod val="60000"/>
+                    <a:lumOff val="40000"/>
+                  </a:schemeClr>
+                </a:solidFill>
+              </a:rPr>
+              <a:t>jupyter</a:t>
+            </a:r>
+            <a:r>
+              <a:rPr lang="en-US" sz="2400" dirty="0">
+                <a:solidFill>
+                  <a:schemeClr val="accent6">
+                    <a:lumMod val="60000"/>
+                    <a:lumOff val="40000"/>
+                  </a:schemeClr>
+                </a:solidFill>
+              </a:rPr>
+              <a:t> notebook)</a:t>
+            </a:r>
+          </a:p>
+        </p:txBody>
+      </p:sp>
+    </p:spTree>
+    <p:extLst>
+      <p:ext uri="{BB962C8B-B14F-4D97-AF65-F5344CB8AC3E}">
+        <p14:creationId xmlns:p14="http://schemas.microsoft.com/office/powerpoint/2010/main" val="1420343388"/>
+      </p:ext>
+    </p:extLst>
+  </p:cSld>
+  <p:clrMapOvr>
+    <a:masterClrMapping/>
+  </p:clrMapOvr>
+</p:sld>
+</file>
+
+<file path=ppt/slides/slide11.xml><?xml version="1.0" encoding="utf-8"?>
+<p:sld xmlns:a="http://schemas.openxmlformats.org/drawingml/2006/main" xmlns:r="http://schemas.openxmlformats.org/officeDocument/2006/relationships" xmlns:p="http://schemas.openxmlformats.org/presentationml/2006/main">
+  <p:cSld>
+    <p:spTree>
+      <p:nvGrpSpPr>
+        <p:cNvPr id="1" name="">
+          <a:extLst>
+            <a:ext uri="{FF2B5EF4-FFF2-40B4-BE49-F238E27FC236}">
+              <a16:creationId xmlns:a16="http://schemas.microsoft.com/office/drawing/2014/main" id="{7E362D5D-3A06-2BA2-453D-84FA32E65468}"/>
+            </a:ext>
+          </a:extLst>
+        </p:cNvPr>
+        <p:cNvGrpSpPr/>
+        <p:nvPr/>
+      </p:nvGrpSpPr>
+      <p:grpSpPr>
+        <a:xfrm>
+          <a:off x="0" y="0"/>
+          <a:ext cx="0" cy="0"/>
+          <a:chOff x="0" y="0"/>
+          <a:chExt cx="0" cy="0"/>
+        </a:xfrm>
+      </p:grpSpPr>
+      <p:pic>
+        <p:nvPicPr>
+          <p:cNvPr id="4" name="Picture 3">
+            <a:extLst>
+              <a:ext uri="{FF2B5EF4-FFF2-40B4-BE49-F238E27FC236}">
+                <a16:creationId xmlns:a16="http://schemas.microsoft.com/office/drawing/2014/main" id="{34EE28D6-86D4-4118-DE97-97F3018B2547}"/>
+              </a:ext>
+            </a:extLst>
+          </p:cNvPr>
+          <p:cNvPicPr>
+            <a:picLocks noChangeAspect="1"/>
+          </p:cNvPicPr>
+          <p:nvPr/>
+        </p:nvPicPr>
+        <p:blipFill>
+          <a:blip r:embed="rId2"/>
+          <a:stretch>
+            <a:fillRect/>
+          </a:stretch>
+        </p:blipFill>
+        <p:spPr>
+          <a:xfrm>
+            <a:off x="3941446" y="2255313"/>
+            <a:ext cx="8250554" cy="4389081"/>
+          </a:xfrm>
+          <a:prstGeom prst="rect">
+            <a:avLst/>
+          </a:prstGeom>
+        </p:spPr>
+      </p:pic>
+      <p:graphicFrame>
+        <p:nvGraphicFramePr>
+          <p:cNvPr id="2" name="Table 1">
+            <a:extLst>
+              <a:ext uri="{FF2B5EF4-FFF2-40B4-BE49-F238E27FC236}">
+                <a16:creationId xmlns:a16="http://schemas.microsoft.com/office/drawing/2014/main" id="{82840C0D-904C-B09A-946F-F0861A12EDD9}"/>
+              </a:ext>
+            </a:extLst>
+          </p:cNvPr>
+          <p:cNvGraphicFramePr>
+            <a:graphicFrameLocks noGrp="1"/>
+          </p:cNvGraphicFramePr>
+          <p:nvPr>
+            <p:extLst>
+              <p:ext uri="{D42A27DB-BD31-4B8C-83A1-F6EECF244321}">
+                <p14:modId xmlns:p14="http://schemas.microsoft.com/office/powerpoint/2010/main" val="269439588"/>
+              </p:ext>
+            </p:extLst>
+          </p:nvPr>
+        </p:nvGraphicFramePr>
+        <p:xfrm>
+          <a:off x="580136" y="830358"/>
+          <a:ext cx="9189720" cy="1828800"/>
+        </p:xfrm>
+        <a:graphic>
+          <a:graphicData uri="http://schemas.openxmlformats.org/drawingml/2006/table">
+            <a:tbl>
+              <a:tblPr/>
+              <a:tblGrid>
+                <a:gridCol w="2128520">
+                  <a:extLst>
+                    <a:ext uri="{9D8B030D-6E8A-4147-A177-3AD203B41FA5}">
+                      <a16:colId xmlns:a16="http://schemas.microsoft.com/office/drawing/2014/main" val="3052785715"/>
+                    </a:ext>
+                  </a:extLst>
+                </a:gridCol>
+                <a:gridCol w="3373120">
+                  <a:extLst>
+                    <a:ext uri="{9D8B030D-6E8A-4147-A177-3AD203B41FA5}">
+                      <a16:colId xmlns:a16="http://schemas.microsoft.com/office/drawing/2014/main" val="2561522023"/>
+                    </a:ext>
+                  </a:extLst>
+                </a:gridCol>
+                <a:gridCol w="3688080">
+                  <a:extLst>
+                    <a:ext uri="{9D8B030D-6E8A-4147-A177-3AD203B41FA5}">
+                      <a16:colId xmlns:a16="http://schemas.microsoft.com/office/drawing/2014/main" val="3276394238"/>
+                    </a:ext>
+                  </a:extLst>
+                </a:gridCol>
+              </a:tblGrid>
+              <a:tr h="0">
+                <a:tc>
+                  <a:txBody>
+                    <a:bodyPr/>
+                    <a:lstStyle/>
+                    <a:p>
+                      <a:pPr algn="ctr">
+                        <a:buNone/>
+                      </a:pPr>
+                      <a:r>
+                        <a:rPr lang="en-US" sz="2400" b="1" u="sng" dirty="0">
+                          <a:solidFill>
+                            <a:schemeClr val="accent6">
+                              <a:lumMod val="60000"/>
+                              <a:lumOff val="40000"/>
+                            </a:schemeClr>
+                          </a:solidFill>
+                        </a:rPr>
+                        <a:t>Feature</a:t>
+                      </a:r>
+                    </a:p>
+                  </a:txBody>
+                  <a:tcPr anchor="ctr">
+                    <a:lnL>
+                      <a:noFill/>
+                    </a:lnL>
+                    <a:lnR>
+                      <a:noFill/>
+                    </a:lnR>
+                    <a:lnT>
+                      <a:noFill/>
+                    </a:lnT>
+                    <a:lnB>
+                      <a:noFill/>
+                    </a:lnB>
+                    <a:noFill/>
+                  </a:tcPr>
+                </a:tc>
+                <a:tc>
+                  <a:txBody>
+                    <a:bodyPr/>
+                    <a:lstStyle/>
+                    <a:p>
+                      <a:pPr algn="ctr">
+                        <a:buNone/>
+                      </a:pPr>
+                      <a:r>
+                        <a:rPr lang="en-US" sz="2400" b="1" u="sng" dirty="0">
+                          <a:solidFill>
+                            <a:schemeClr val="accent6">
+                              <a:lumMod val="60000"/>
+                              <a:lumOff val="40000"/>
+                            </a:schemeClr>
+                          </a:solidFill>
+                        </a:rPr>
+                        <a:t>FAISS</a:t>
+                      </a:r>
+                    </a:p>
+                  </a:txBody>
+                  <a:tcPr anchor="ctr">
+                    <a:lnL>
+                      <a:noFill/>
+                    </a:lnL>
+                    <a:lnR>
+                      <a:noFill/>
+                    </a:lnR>
+                    <a:lnT>
+                      <a:noFill/>
+                    </a:lnT>
+                    <a:lnB>
+                      <a:noFill/>
+                    </a:lnB>
+                    <a:noFill/>
+                  </a:tcPr>
+                </a:tc>
+                <a:tc>
+                  <a:txBody>
+                    <a:bodyPr/>
+                    <a:lstStyle/>
+                    <a:p>
+                      <a:pPr algn="ctr">
+                        <a:buNone/>
+                      </a:pPr>
+                      <a:r>
+                        <a:rPr lang="en-US" sz="2400" b="1" u="sng" dirty="0">
+                          <a:solidFill>
+                            <a:schemeClr val="accent6">
+                              <a:lumMod val="60000"/>
+                              <a:lumOff val="40000"/>
+                            </a:schemeClr>
+                          </a:solidFill>
+                        </a:rPr>
+                        <a:t>Pinecone</a:t>
+                      </a:r>
+                    </a:p>
+                  </a:txBody>
+                  <a:tcPr anchor="ctr">
+                    <a:lnL>
+                      <a:noFill/>
+                    </a:lnL>
+                    <a:lnR>
+                      <a:noFill/>
+                    </a:lnR>
+                    <a:lnT>
+                      <a:noFill/>
+                    </a:lnT>
+                    <a:lnB>
+                      <a:noFill/>
+                    </a:lnB>
+                    <a:noFill/>
+                  </a:tcPr>
+                </a:tc>
+                <a:extLst>
+                  <a:ext uri="{0D108BD9-81ED-4DB2-BD59-A6C34878D82A}">
+                    <a16:rowId xmlns:a16="http://schemas.microsoft.com/office/drawing/2014/main" val="2404825552"/>
+                  </a:ext>
+                </a:extLst>
+              </a:tr>
+              <a:tr h="0">
+                <a:tc>
+                  <a:txBody>
+                    <a:bodyPr/>
+                    <a:lstStyle/>
+                    <a:p>
+                      <a:pPr algn="ctr">
+                        <a:buNone/>
+                      </a:pPr>
+                      <a:r>
+                        <a:rPr lang="en-US" sz="2400" b="1" dirty="0">
+                          <a:solidFill>
+                            <a:schemeClr val="accent6">
+                              <a:lumMod val="60000"/>
+                              <a:lumOff val="40000"/>
+                            </a:schemeClr>
+                          </a:solidFill>
+                        </a:rPr>
+                        <a:t>Setup</a:t>
+                      </a:r>
+                    </a:p>
+                  </a:txBody>
+                  <a:tcPr anchor="ctr">
+                    <a:lnL>
+                      <a:noFill/>
+                    </a:lnL>
+                    <a:lnR>
+                      <a:noFill/>
+                    </a:lnR>
+                    <a:lnT>
+                      <a:noFill/>
+                    </a:lnT>
+                    <a:lnB>
+                      <a:noFill/>
+                    </a:lnB>
+                    <a:noFill/>
+                  </a:tcPr>
+                </a:tc>
+                <a:tc>
+                  <a:txBody>
+                    <a:bodyPr/>
+                    <a:lstStyle/>
+                    <a:p>
+                      <a:pPr algn="ctr">
+                        <a:buNone/>
+                      </a:pPr>
+                      <a:r>
+                        <a:rPr lang="en-US" sz="2400" dirty="0">
+                          <a:solidFill>
+                            <a:schemeClr val="accent6">
+                              <a:lumMod val="60000"/>
+                              <a:lumOff val="40000"/>
+                            </a:schemeClr>
+                          </a:solidFill>
+                        </a:rPr>
+                        <a:t>Local</a:t>
+                      </a:r>
+                    </a:p>
+                  </a:txBody>
+                  <a:tcPr anchor="ctr">
+                    <a:lnL>
+                      <a:noFill/>
+                    </a:lnL>
+                    <a:lnR>
+                      <a:noFill/>
+                    </a:lnR>
+                    <a:lnT>
+                      <a:noFill/>
+                    </a:lnT>
+                    <a:lnB>
+                      <a:noFill/>
+                    </a:lnB>
+                    <a:noFill/>
+                  </a:tcPr>
+                </a:tc>
+                <a:tc>
+                  <a:txBody>
+                    <a:bodyPr/>
+                    <a:lstStyle/>
+                    <a:p>
+                      <a:pPr algn="ctr">
+                        <a:buNone/>
+                      </a:pPr>
+                      <a:r>
+                        <a:rPr lang="en-US" sz="2400" dirty="0">
+                          <a:solidFill>
+                            <a:schemeClr val="accent6">
+                              <a:lumMod val="60000"/>
+                              <a:lumOff val="40000"/>
+                            </a:schemeClr>
+                          </a:solidFill>
+                        </a:rPr>
+                        <a:t>Cloud</a:t>
+                      </a:r>
+                    </a:p>
+                  </a:txBody>
+                  <a:tcPr anchor="ctr">
+                    <a:lnL>
+                      <a:noFill/>
+                    </a:lnL>
+                    <a:lnR>
+                      <a:noFill/>
+                    </a:lnR>
+                    <a:lnT>
+                      <a:noFill/>
+                    </a:lnT>
+                    <a:lnB>
+                      <a:noFill/>
+                    </a:lnB>
+                    <a:noFill/>
+                  </a:tcPr>
+                </a:tc>
+                <a:extLst>
+                  <a:ext uri="{0D108BD9-81ED-4DB2-BD59-A6C34878D82A}">
+                    <a16:rowId xmlns:a16="http://schemas.microsoft.com/office/drawing/2014/main" val="3270416982"/>
+                  </a:ext>
+                </a:extLst>
+              </a:tr>
+              <a:tr h="0">
+                <a:tc>
+                  <a:txBody>
+                    <a:bodyPr/>
+                    <a:lstStyle/>
+                    <a:p>
+                      <a:pPr algn="ctr">
+                        <a:buNone/>
+                      </a:pPr>
+                      <a:r>
+                        <a:rPr lang="en-US" sz="2400" b="1" dirty="0">
+                          <a:solidFill>
+                            <a:schemeClr val="accent6">
+                              <a:lumMod val="60000"/>
+                              <a:lumOff val="40000"/>
+                            </a:schemeClr>
+                          </a:solidFill>
+                        </a:rPr>
+                        <a:t>Scaling</a:t>
+                      </a:r>
+                    </a:p>
+                  </a:txBody>
+                  <a:tcPr anchor="ctr">
+                    <a:lnL>
+                      <a:noFill/>
+                    </a:lnL>
+                    <a:lnR>
+                      <a:noFill/>
+                    </a:lnR>
+                    <a:lnT>
+                      <a:noFill/>
+                    </a:lnT>
+                    <a:lnB>
+                      <a:noFill/>
+                    </a:lnB>
+                    <a:noFill/>
+                  </a:tcPr>
+                </a:tc>
+                <a:tc>
+                  <a:txBody>
+                    <a:bodyPr/>
+                    <a:lstStyle/>
+                    <a:p>
+                      <a:pPr algn="ctr">
+                        <a:buNone/>
+                      </a:pPr>
+                      <a:r>
+                        <a:rPr lang="en-US" sz="2400" dirty="0">
+                          <a:solidFill>
+                            <a:schemeClr val="accent6">
+                              <a:lumMod val="60000"/>
+                              <a:lumOff val="40000"/>
+                            </a:schemeClr>
+                          </a:solidFill>
+                        </a:rPr>
+                        <a:t>Manual</a:t>
+                      </a:r>
+                    </a:p>
+                  </a:txBody>
+                  <a:tcPr anchor="ctr">
+                    <a:lnL>
+                      <a:noFill/>
+                    </a:lnL>
+                    <a:lnR>
+                      <a:noFill/>
+                    </a:lnR>
+                    <a:lnT>
+                      <a:noFill/>
+                    </a:lnT>
+                    <a:lnB>
+                      <a:noFill/>
+                    </a:lnB>
+                    <a:noFill/>
+                  </a:tcPr>
+                </a:tc>
+                <a:tc>
+                  <a:txBody>
+                    <a:bodyPr/>
+                    <a:lstStyle/>
+                    <a:p>
+                      <a:pPr algn="ctr">
+                        <a:buNone/>
+                      </a:pPr>
+                      <a:r>
+                        <a:rPr lang="en-US" sz="2400">
+                          <a:solidFill>
+                            <a:schemeClr val="accent6">
+                              <a:lumMod val="60000"/>
+                              <a:lumOff val="40000"/>
+                            </a:schemeClr>
+                          </a:solidFill>
+                        </a:rPr>
+                        <a:t>Automatic</a:t>
+                      </a:r>
+                    </a:p>
+                  </a:txBody>
+                  <a:tcPr anchor="ctr">
+                    <a:lnL>
+                      <a:noFill/>
+                    </a:lnL>
+                    <a:lnR>
+                      <a:noFill/>
+                    </a:lnR>
+                    <a:lnT>
+                      <a:noFill/>
+                    </a:lnT>
+                    <a:lnB>
+                      <a:noFill/>
+                    </a:lnB>
+                    <a:noFill/>
+                  </a:tcPr>
+                </a:tc>
+                <a:extLst>
+                  <a:ext uri="{0D108BD9-81ED-4DB2-BD59-A6C34878D82A}">
+                    <a16:rowId xmlns:a16="http://schemas.microsoft.com/office/drawing/2014/main" val="2384854311"/>
+                  </a:ext>
+                </a:extLst>
+              </a:tr>
+              <a:tr h="0">
+                <a:tc>
+                  <a:txBody>
+                    <a:bodyPr/>
+                    <a:lstStyle/>
+                    <a:p>
+                      <a:pPr algn="ctr">
+                        <a:buNone/>
+                      </a:pPr>
+                      <a:r>
+                        <a:rPr lang="en-US" sz="2400" b="1" dirty="0">
+                          <a:solidFill>
+                            <a:schemeClr val="accent6">
+                              <a:lumMod val="60000"/>
+                              <a:lumOff val="40000"/>
+                            </a:schemeClr>
+                          </a:solidFill>
+                        </a:rPr>
+                        <a:t>Use Case</a:t>
+                      </a:r>
+                    </a:p>
+                  </a:txBody>
+                  <a:tcPr anchor="ctr">
+                    <a:lnL>
+                      <a:noFill/>
+                    </a:lnL>
+                    <a:lnR>
+                      <a:noFill/>
+                    </a:lnR>
+                    <a:lnT>
+                      <a:noFill/>
+                    </a:lnT>
+                    <a:lnB>
+                      <a:noFill/>
+                    </a:lnB>
+                    <a:noFill/>
+                  </a:tcPr>
+                </a:tc>
+                <a:tc>
+                  <a:txBody>
+                    <a:bodyPr/>
+                    <a:lstStyle/>
+                    <a:p>
+                      <a:pPr algn="ctr">
+                        <a:buNone/>
+                      </a:pPr>
+                      <a:r>
+                        <a:rPr lang="en-US" sz="2400" dirty="0">
+                          <a:solidFill>
+                            <a:schemeClr val="accent6">
+                              <a:lumMod val="60000"/>
+                              <a:lumOff val="40000"/>
+                            </a:schemeClr>
+                          </a:solidFill>
+                        </a:rPr>
+                        <a:t>Learning / small apps</a:t>
+                      </a:r>
+                    </a:p>
+                  </a:txBody>
+                  <a:tcPr anchor="ctr">
+                    <a:lnL>
+                      <a:noFill/>
+                    </a:lnL>
+                    <a:lnR>
+                      <a:noFill/>
+                    </a:lnR>
+                    <a:lnT>
+                      <a:noFill/>
+                    </a:lnT>
+                    <a:lnB>
+                      <a:noFill/>
+                    </a:lnB>
+                    <a:noFill/>
+                  </a:tcPr>
+                </a:tc>
+                <a:tc>
+                  <a:txBody>
+                    <a:bodyPr/>
+                    <a:lstStyle/>
+                    <a:p>
+                      <a:pPr algn="ctr">
+                        <a:buNone/>
+                      </a:pPr>
+                      <a:r>
+                        <a:rPr lang="en-US" sz="2400" dirty="0">
+                          <a:solidFill>
+                            <a:schemeClr val="accent6">
+                              <a:lumMod val="60000"/>
+                              <a:lumOff val="40000"/>
+                            </a:schemeClr>
+                          </a:solidFill>
+                        </a:rPr>
+                        <a:t>Production systems</a:t>
+                      </a:r>
+                    </a:p>
+                  </a:txBody>
+                  <a:tcPr anchor="ctr">
+                    <a:lnL>
+                      <a:noFill/>
+                    </a:lnL>
+                    <a:lnR>
+                      <a:noFill/>
+                    </a:lnR>
+                    <a:lnT>
+                      <a:noFill/>
+                    </a:lnT>
+                    <a:lnB>
+                      <a:noFill/>
+                    </a:lnB>
+                    <a:noFill/>
+                  </a:tcPr>
+                </a:tc>
+                <a:extLst>
+                  <a:ext uri="{0D108BD9-81ED-4DB2-BD59-A6C34878D82A}">
+                    <a16:rowId xmlns:a16="http://schemas.microsoft.com/office/drawing/2014/main" val="1470886234"/>
+                  </a:ext>
+                </a:extLst>
+              </a:tr>
+            </a:tbl>
+          </a:graphicData>
+        </a:graphic>
+      </p:graphicFrame>
+      <p:sp>
+        <p:nvSpPr>
+          <p:cNvPr id="3" name="TextBox 2">
+            <a:extLst>
+              <a:ext uri="{FF2B5EF4-FFF2-40B4-BE49-F238E27FC236}">
+                <a16:creationId xmlns:a16="http://schemas.microsoft.com/office/drawing/2014/main" id="{7C1F1835-AE60-7FF7-E696-32C4F3F63D4F}"/>
+              </a:ext>
+            </a:extLst>
+          </p:cNvPr>
+          <p:cNvSpPr txBox="1"/>
+          <p:nvPr/>
+        </p:nvSpPr>
+        <p:spPr>
+          <a:xfrm>
+            <a:off x="580136" y="213606"/>
+            <a:ext cx="6187440" cy="461665"/>
+          </a:xfrm>
+          <a:prstGeom prst="rect">
+            <a:avLst/>
+          </a:prstGeom>
+          <a:noFill/>
+        </p:spPr>
+        <p:txBody>
+          <a:bodyPr wrap="square">
+            <a:spAutoFit/>
+          </a:bodyPr>
+          <a:lstStyle/>
+          <a:p>
+            <a:r>
+              <a:rPr lang="en-US" sz="2400" b="1" dirty="0">
+                <a:solidFill>
+                  <a:schemeClr val="accent6">
+                    <a:lumMod val="60000"/>
+                    <a:lumOff val="40000"/>
+                  </a:schemeClr>
+                </a:solidFill>
+              </a:rPr>
+              <a:t>FAISS vs Pinecone:</a:t>
+            </a:r>
+          </a:p>
+        </p:txBody>
+      </p:sp>
+    </p:spTree>
+    <p:extLst>
+      <p:ext uri="{BB962C8B-B14F-4D97-AF65-F5344CB8AC3E}">
+        <p14:creationId xmlns:p14="http://schemas.microsoft.com/office/powerpoint/2010/main" val="2472058966"/>
+      </p:ext>
+    </p:extLst>
+  </p:cSld>
+  <p:clrMapOvr>
+    <a:masterClrMapping/>
+  </p:clrMapOvr>
+</p:sld>
+</file>
+
+<file path=ppt/slides/slide12.xml><?xml version="1.0" encoding="utf-8"?>
+<p:sld xmlns:a="http://schemas.openxmlformats.org/drawingml/2006/main" xmlns:r="http://schemas.openxmlformats.org/officeDocument/2006/relationships" xmlns:p="http://schemas.openxmlformats.org/presentationml/2006/main">
+  <p:cSld>
+    <p:spTree>
+      <p:nvGrpSpPr>
+        <p:cNvPr id="1" name="">
+          <a:extLst>
+            <a:ext uri="{FF2B5EF4-FFF2-40B4-BE49-F238E27FC236}">
               <a16:creationId xmlns:a16="http://schemas.microsoft.com/office/drawing/2014/main" id="{2B4C315A-9333-1F7A-934F-444117FA42DD}"/>
             </a:ext>
           </a:extLst>
@@ -5263,7 +6108,7 @@
 </p:sld>
 </file>
 
-<file path=ppt/slides/slide11.xml><?xml version="1.0" encoding="utf-8"?>
+<file path=ppt/slides/slide13.xml><?xml version="1.0" encoding="utf-8"?>
 <p:sld xmlns:a="http://schemas.openxmlformats.org/drawingml/2006/main" xmlns:r="http://schemas.openxmlformats.org/officeDocument/2006/relationships" xmlns:p="http://schemas.openxmlformats.org/presentationml/2006/main">
   <p:cSld>
     <p:spTree>
@@ -6720,29 +7565,7 @@
                   </a:schemeClr>
                 </a:solidFill>
               </a:rPr>
-              <a:t>car </a:t>
-            </a:r>
-            <a:r>
-              <a:rPr lang="en-US" sz="2400" dirty="0" err="1">
-                <a:solidFill>
-                  <a:schemeClr val="accent6">
-                    <a:lumMod val="60000"/>
-                    <a:lumOff val="40000"/>
-                  </a:schemeClr>
-                </a:solidFill>
-              </a:rPr>
-              <a:t>tyres</a:t>
-            </a:r>
-            <a:r>
-              <a:rPr lang="en-US" sz="2400" dirty="0">
-                <a:solidFill>
-                  <a:schemeClr val="accent6">
-                    <a:lumMod val="60000"/>
-                    <a:lumOff val="40000"/>
-                  </a:schemeClr>
-                </a:solidFill>
-              </a:rPr>
-              <a:t>  ✅</a:t>
+              <a:t>car tires  ✅</a:t>
             </a:r>
           </a:p>
           <a:p>
@@ -7458,7 +8281,7 @@
                   </a:schemeClr>
                 </a:solidFill>
               </a:rPr>
-              <a:t>"best computers for developers”</a:t>
+              <a:t>“good computers for developers”</a:t>
             </a:r>
           </a:p>
           <a:p>
@@ -7493,36 +8316,6 @@
           </a:p>
         </p:txBody>
       </p:sp>
-      <p:pic>
-        <p:nvPicPr>
-          <p:cNvPr id="3" name="Picture 2">
-            <a:extLst>
-              <a:ext uri="{FF2B5EF4-FFF2-40B4-BE49-F238E27FC236}">
-                <a16:creationId xmlns:a16="http://schemas.microsoft.com/office/drawing/2014/main" id="{0B7F2984-95F5-3E42-98A7-2B0062FE054A}"/>
-              </a:ext>
-            </a:extLst>
-          </p:cNvPr>
-          <p:cNvPicPr>
-            <a:picLocks noChangeAspect="1"/>
-          </p:cNvPicPr>
-          <p:nvPr/>
-        </p:nvPicPr>
-        <p:blipFill>
-          <a:blip r:embed="rId2"/>
-          <a:stretch>
-            <a:fillRect/>
-          </a:stretch>
-        </p:blipFill>
-        <p:spPr>
-          <a:xfrm>
-            <a:off x="4621868" y="3132936"/>
-            <a:ext cx="7570132" cy="2626860"/>
-          </a:xfrm>
-          <a:prstGeom prst="rect">
-            <a:avLst/>
-          </a:prstGeom>
-        </p:spPr>
-      </p:pic>
       <p:grpSp>
         <p:nvGrpSpPr>
           <p:cNvPr id="15" name="Group 14">
@@ -7543,9 +8336,9 @@
             <a:chExt cx="969840" cy="593280"/>
           </a:xfrm>
         </p:grpSpPr>
-        <mc:AlternateContent xmlns:mc="http://schemas.openxmlformats.org/markup-compatibility/2006">
-          <mc:Choice xmlns:p14="http://schemas.microsoft.com/office/powerpoint/2010/main" Requires="p14">
-            <p:contentPart p14:bwMode="auto" r:id="rId3">
+        <mc:AlternateContent xmlns:mc="http://schemas.openxmlformats.org/markup-compatibility/2006" xmlns:p14="http://schemas.microsoft.com/office/powerpoint/2010/main">
+          <mc:Choice Requires="p14">
+            <p:contentPart p14:bwMode="auto" r:id="rId2">
               <p14:nvContentPartPr>
                 <p14:cNvPr id="11" name="Ink 10">
                   <a:extLst>
@@ -7563,7 +8356,7 @@
               </p14:xfrm>
             </p:contentPart>
           </mc:Choice>
-          <mc:Fallback>
+          <mc:Fallback xmlns="">
             <p:pic>
               <p:nvPicPr>
                 <p:cNvPr id="11" name="Ink 10">
@@ -7594,8 +8387,8 @@
             </p:pic>
           </mc:Fallback>
         </mc:AlternateContent>
-        <mc:AlternateContent xmlns:mc="http://schemas.openxmlformats.org/markup-compatibility/2006">
-          <mc:Choice xmlns:p14="http://schemas.microsoft.com/office/powerpoint/2010/main" Requires="p14">
+        <mc:AlternateContent xmlns:mc="http://schemas.openxmlformats.org/markup-compatibility/2006" xmlns:p14="http://schemas.microsoft.com/office/powerpoint/2010/main">
+          <mc:Choice Requires="p14">
             <p:contentPart p14:bwMode="auto" r:id="rId5">
               <p14:nvContentPartPr>
                 <p14:cNvPr id="12" name="Ink 11">
@@ -7614,7 +8407,7 @@
               </p14:xfrm>
             </p:contentPart>
           </mc:Choice>
-          <mc:Fallback>
+          <mc:Fallback xmlns="">
             <p:pic>
               <p:nvPicPr>
                 <p:cNvPr id="12" name="Ink 11">
@@ -7666,8 +8459,8 @@
             <a:chExt cx="4566240" cy="961560"/>
           </a:xfrm>
         </p:grpSpPr>
-        <mc:AlternateContent xmlns:mc="http://schemas.openxmlformats.org/markup-compatibility/2006">
-          <mc:Choice xmlns:p14="http://schemas.microsoft.com/office/powerpoint/2010/main" Requires="p14">
+        <mc:AlternateContent xmlns:mc="http://schemas.openxmlformats.org/markup-compatibility/2006" xmlns:p14="http://schemas.microsoft.com/office/powerpoint/2010/main">
+          <mc:Choice Requires="p14">
             <p:contentPart p14:bwMode="auto" r:id="rId7">
               <p14:nvContentPartPr>
                 <p14:cNvPr id="26" name="Ink 25">
@@ -7686,7 +8479,7 @@
               </p14:xfrm>
             </p:contentPart>
           </mc:Choice>
-          <mc:Fallback>
+          <mc:Fallback xmlns="">
             <p:pic>
               <p:nvPicPr>
                 <p:cNvPr id="26" name="Ink 25">
@@ -7717,8 +8510,8 @@
             </p:pic>
           </mc:Fallback>
         </mc:AlternateContent>
-        <mc:AlternateContent xmlns:mc="http://schemas.openxmlformats.org/markup-compatibility/2006">
-          <mc:Choice xmlns:p14="http://schemas.microsoft.com/office/powerpoint/2010/main" Requires="p14">
+        <mc:AlternateContent xmlns:mc="http://schemas.openxmlformats.org/markup-compatibility/2006" xmlns:p14="http://schemas.microsoft.com/office/powerpoint/2010/main">
+          <mc:Choice Requires="p14">
             <p:contentPart p14:bwMode="auto" r:id="rId9">
               <p14:nvContentPartPr>
                 <p14:cNvPr id="27" name="Ink 26">
@@ -7737,7 +8530,7 @@
               </p14:xfrm>
             </p:contentPart>
           </mc:Choice>
-          <mc:Fallback>
+          <mc:Fallback xmlns="">
             <p:pic>
               <p:nvPicPr>
                 <p:cNvPr id="27" name="Ink 26">
@@ -7768,8 +8561,8 @@
             </p:pic>
           </mc:Fallback>
         </mc:AlternateContent>
-        <mc:AlternateContent xmlns:mc="http://schemas.openxmlformats.org/markup-compatibility/2006">
-          <mc:Choice xmlns:p14="http://schemas.microsoft.com/office/powerpoint/2010/main" Requires="p14">
+        <mc:AlternateContent xmlns:mc="http://schemas.openxmlformats.org/markup-compatibility/2006" xmlns:p14="http://schemas.microsoft.com/office/powerpoint/2010/main">
+          <mc:Choice Requires="p14">
             <p:contentPart p14:bwMode="auto" r:id="rId11">
               <p14:nvContentPartPr>
                 <p14:cNvPr id="28" name="Ink 27">
@@ -7788,7 +8581,7 @@
               </p14:xfrm>
             </p:contentPart>
           </mc:Choice>
-          <mc:Fallback>
+          <mc:Fallback xmlns="">
             <p:pic>
               <p:nvPicPr>
                 <p:cNvPr id="28" name="Ink 27">
@@ -7819,8 +8612,8 @@
             </p:pic>
           </mc:Fallback>
         </mc:AlternateContent>
-        <mc:AlternateContent xmlns:mc="http://schemas.openxmlformats.org/markup-compatibility/2006">
-          <mc:Choice xmlns:p14="http://schemas.microsoft.com/office/powerpoint/2010/main" Requires="p14">
+        <mc:AlternateContent xmlns:mc="http://schemas.openxmlformats.org/markup-compatibility/2006" xmlns:p14="http://schemas.microsoft.com/office/powerpoint/2010/main">
+          <mc:Choice Requires="p14">
             <p:contentPart p14:bwMode="auto" r:id="rId13">
               <p14:nvContentPartPr>
                 <p14:cNvPr id="29" name="Ink 28">
@@ -7839,7 +8632,7 @@
               </p14:xfrm>
             </p:contentPart>
           </mc:Choice>
-          <mc:Fallback>
+          <mc:Fallback xmlns="">
             <p:pic>
               <p:nvPicPr>
                 <p:cNvPr id="29" name="Ink 28">
@@ -7870,8 +8663,8 @@
             </p:pic>
           </mc:Fallback>
         </mc:AlternateContent>
-        <mc:AlternateContent xmlns:mc="http://schemas.openxmlformats.org/markup-compatibility/2006">
-          <mc:Choice xmlns:p14="http://schemas.microsoft.com/office/powerpoint/2010/main" Requires="p14">
+        <mc:AlternateContent xmlns:mc="http://schemas.openxmlformats.org/markup-compatibility/2006" xmlns:p14="http://schemas.microsoft.com/office/powerpoint/2010/main">
+          <mc:Choice Requires="p14">
             <p:contentPart p14:bwMode="auto" r:id="rId15">
               <p14:nvContentPartPr>
                 <p14:cNvPr id="30" name="Ink 29">
@@ -7890,7 +8683,7 @@
               </p14:xfrm>
             </p:contentPart>
           </mc:Choice>
-          <mc:Fallback>
+          <mc:Fallback xmlns="">
             <p:pic>
               <p:nvPicPr>
                 <p:cNvPr id="30" name="Ink 29">
@@ -7921,8 +8714,8 @@
             </p:pic>
           </mc:Fallback>
         </mc:AlternateContent>
-        <mc:AlternateContent xmlns:mc="http://schemas.openxmlformats.org/markup-compatibility/2006">
-          <mc:Choice xmlns:p14="http://schemas.microsoft.com/office/powerpoint/2010/main" Requires="p14">
+        <mc:AlternateContent xmlns:mc="http://schemas.openxmlformats.org/markup-compatibility/2006" xmlns:p14="http://schemas.microsoft.com/office/powerpoint/2010/main">
+          <mc:Choice Requires="p14">
             <p:contentPart p14:bwMode="auto" r:id="rId17">
               <p14:nvContentPartPr>
                 <p14:cNvPr id="31" name="Ink 30">
@@ -7941,7 +8734,7 @@
               </p14:xfrm>
             </p:contentPart>
           </mc:Choice>
-          <mc:Fallback>
+          <mc:Fallback xmlns="">
             <p:pic>
               <p:nvPicPr>
                 <p:cNvPr id="31" name="Ink 30">
@@ -7972,8 +8765,8 @@
             </p:pic>
           </mc:Fallback>
         </mc:AlternateContent>
-        <mc:AlternateContent xmlns:mc="http://schemas.openxmlformats.org/markup-compatibility/2006">
-          <mc:Choice xmlns:p14="http://schemas.microsoft.com/office/powerpoint/2010/main" Requires="p14">
+        <mc:AlternateContent xmlns:mc="http://schemas.openxmlformats.org/markup-compatibility/2006" xmlns:p14="http://schemas.microsoft.com/office/powerpoint/2010/main">
+          <mc:Choice Requires="p14">
             <p:contentPart p14:bwMode="auto" r:id="rId19">
               <p14:nvContentPartPr>
                 <p14:cNvPr id="32" name="Ink 31">
@@ -7992,7 +8785,7 @@
               </p14:xfrm>
             </p:contentPart>
           </mc:Choice>
-          <mc:Fallback>
+          <mc:Fallback xmlns="">
             <p:pic>
               <p:nvPicPr>
                 <p:cNvPr id="32" name="Ink 31">
@@ -8023,8 +8816,8 @@
             </p:pic>
           </mc:Fallback>
         </mc:AlternateContent>
-        <mc:AlternateContent xmlns:mc="http://schemas.openxmlformats.org/markup-compatibility/2006">
-          <mc:Choice xmlns:p14="http://schemas.microsoft.com/office/powerpoint/2010/main" Requires="p14">
+        <mc:AlternateContent xmlns:mc="http://schemas.openxmlformats.org/markup-compatibility/2006" xmlns:p14="http://schemas.microsoft.com/office/powerpoint/2010/main">
+          <mc:Choice Requires="p14">
             <p:contentPart p14:bwMode="auto" r:id="rId21">
               <p14:nvContentPartPr>
                 <p14:cNvPr id="33" name="Ink 32">
@@ -8043,7 +8836,7 @@
               </p14:xfrm>
             </p:contentPart>
           </mc:Choice>
-          <mc:Fallback>
+          <mc:Fallback xmlns="">
             <p:pic>
               <p:nvPicPr>
                 <p:cNvPr id="33" name="Ink 32">
@@ -8074,8 +8867,8 @@
             </p:pic>
           </mc:Fallback>
         </mc:AlternateContent>
-        <mc:AlternateContent xmlns:mc="http://schemas.openxmlformats.org/markup-compatibility/2006">
-          <mc:Choice xmlns:p14="http://schemas.microsoft.com/office/powerpoint/2010/main" Requires="p14">
+        <mc:AlternateContent xmlns:mc="http://schemas.openxmlformats.org/markup-compatibility/2006" xmlns:p14="http://schemas.microsoft.com/office/powerpoint/2010/main">
+          <mc:Choice Requires="p14">
             <p:contentPart p14:bwMode="auto" r:id="rId23">
               <p14:nvContentPartPr>
                 <p14:cNvPr id="35" name="Ink 34">
@@ -8094,7 +8887,7 @@
               </p14:xfrm>
             </p:contentPart>
           </mc:Choice>
-          <mc:Fallback>
+          <mc:Fallback xmlns="">
             <p:pic>
               <p:nvPicPr>
                 <p:cNvPr id="35" name="Ink 34">
@@ -8125,8 +8918,8 @@
             </p:pic>
           </mc:Fallback>
         </mc:AlternateContent>
-        <mc:AlternateContent xmlns:mc="http://schemas.openxmlformats.org/markup-compatibility/2006">
-          <mc:Choice xmlns:p14="http://schemas.microsoft.com/office/powerpoint/2010/main" Requires="p14">
+        <mc:AlternateContent xmlns:mc="http://schemas.openxmlformats.org/markup-compatibility/2006" xmlns:p14="http://schemas.microsoft.com/office/powerpoint/2010/main">
+          <mc:Choice Requires="p14">
             <p:contentPart p14:bwMode="auto" r:id="rId25">
               <p14:nvContentPartPr>
                 <p14:cNvPr id="36" name="Ink 35">
@@ -8145,7 +8938,7 @@
               </p14:xfrm>
             </p:contentPart>
           </mc:Choice>
-          <mc:Fallback>
+          <mc:Fallback xmlns="">
             <p:pic>
               <p:nvPicPr>
                 <p:cNvPr id="36" name="Ink 35">
@@ -8176,8 +8969,8 @@
             </p:pic>
           </mc:Fallback>
         </mc:AlternateContent>
-        <mc:AlternateContent xmlns:mc="http://schemas.openxmlformats.org/markup-compatibility/2006">
-          <mc:Choice xmlns:p14="http://schemas.microsoft.com/office/powerpoint/2010/main" Requires="p14">
+        <mc:AlternateContent xmlns:mc="http://schemas.openxmlformats.org/markup-compatibility/2006" xmlns:p14="http://schemas.microsoft.com/office/powerpoint/2010/main">
+          <mc:Choice Requires="p14">
             <p:contentPart p14:bwMode="auto" r:id="rId27">
               <p14:nvContentPartPr>
                 <p14:cNvPr id="37" name="Ink 36">
@@ -8196,7 +8989,7 @@
               </p14:xfrm>
             </p:contentPart>
           </mc:Choice>
-          <mc:Fallback>
+          <mc:Fallback xmlns="">
             <p:pic>
               <p:nvPicPr>
                 <p:cNvPr id="37" name="Ink 36">
@@ -8227,8 +9020,8 @@
             </p:pic>
           </mc:Fallback>
         </mc:AlternateContent>
-        <mc:AlternateContent xmlns:mc="http://schemas.openxmlformats.org/markup-compatibility/2006">
-          <mc:Choice xmlns:p14="http://schemas.microsoft.com/office/powerpoint/2010/main" Requires="p14">
+        <mc:AlternateContent xmlns:mc="http://schemas.openxmlformats.org/markup-compatibility/2006" xmlns:p14="http://schemas.microsoft.com/office/powerpoint/2010/main">
+          <mc:Choice Requires="p14">
             <p:contentPart p14:bwMode="auto" r:id="rId29">
               <p14:nvContentPartPr>
                 <p14:cNvPr id="38" name="Ink 37">
@@ -8247,7 +9040,7 @@
               </p14:xfrm>
             </p:contentPart>
           </mc:Choice>
-          <mc:Fallback>
+          <mc:Fallback xmlns="">
             <p:pic>
               <p:nvPicPr>
                 <p:cNvPr id="38" name="Ink 37">
@@ -8278,8 +9071,8 @@
             </p:pic>
           </mc:Fallback>
         </mc:AlternateContent>
-        <mc:AlternateContent xmlns:mc="http://schemas.openxmlformats.org/markup-compatibility/2006">
-          <mc:Choice xmlns:p14="http://schemas.microsoft.com/office/powerpoint/2010/main" Requires="p14">
+        <mc:AlternateContent xmlns:mc="http://schemas.openxmlformats.org/markup-compatibility/2006" xmlns:p14="http://schemas.microsoft.com/office/powerpoint/2010/main">
+          <mc:Choice Requires="p14">
             <p:contentPart p14:bwMode="auto" r:id="rId31">
               <p14:nvContentPartPr>
                 <p14:cNvPr id="39" name="Ink 38">
@@ -8298,7 +9091,7 @@
               </p14:xfrm>
             </p:contentPart>
           </mc:Choice>
-          <mc:Fallback>
+          <mc:Fallback xmlns="">
             <p:pic>
               <p:nvPicPr>
                 <p:cNvPr id="39" name="Ink 38">
@@ -8329,8 +9122,8 @@
             </p:pic>
           </mc:Fallback>
         </mc:AlternateContent>
-        <mc:AlternateContent xmlns:mc="http://schemas.openxmlformats.org/markup-compatibility/2006">
-          <mc:Choice xmlns:p14="http://schemas.microsoft.com/office/powerpoint/2010/main" Requires="p14">
+        <mc:AlternateContent xmlns:mc="http://schemas.openxmlformats.org/markup-compatibility/2006" xmlns:p14="http://schemas.microsoft.com/office/powerpoint/2010/main">
+          <mc:Choice Requires="p14">
             <p:contentPart p14:bwMode="auto" r:id="rId33">
               <p14:nvContentPartPr>
                 <p14:cNvPr id="40" name="Ink 39">
@@ -8349,7 +9142,7 @@
               </p14:xfrm>
             </p:contentPart>
           </mc:Choice>
-          <mc:Fallback>
+          <mc:Fallback xmlns="">
             <p:pic>
               <p:nvPicPr>
                 <p:cNvPr id="40" name="Ink 39">
@@ -8380,8 +9173,8 @@
             </p:pic>
           </mc:Fallback>
         </mc:AlternateContent>
-        <mc:AlternateContent xmlns:mc="http://schemas.openxmlformats.org/markup-compatibility/2006">
-          <mc:Choice xmlns:p14="http://schemas.microsoft.com/office/powerpoint/2010/main" Requires="p14">
+        <mc:AlternateContent xmlns:mc="http://schemas.openxmlformats.org/markup-compatibility/2006" xmlns:p14="http://schemas.microsoft.com/office/powerpoint/2010/main">
+          <mc:Choice Requires="p14">
             <p:contentPart p14:bwMode="auto" r:id="rId35">
               <p14:nvContentPartPr>
                 <p14:cNvPr id="41" name="Ink 40">
@@ -8400,7 +9193,7 @@
               </p14:xfrm>
             </p:contentPart>
           </mc:Choice>
-          <mc:Fallback>
+          <mc:Fallback xmlns="">
             <p:pic>
               <p:nvPicPr>
                 <p:cNvPr id="41" name="Ink 40">
@@ -8431,8 +9224,8 @@
             </p:pic>
           </mc:Fallback>
         </mc:AlternateContent>
-        <mc:AlternateContent xmlns:mc="http://schemas.openxmlformats.org/markup-compatibility/2006">
-          <mc:Choice xmlns:p14="http://schemas.microsoft.com/office/powerpoint/2010/main" Requires="p14">
+        <mc:AlternateContent xmlns:mc="http://schemas.openxmlformats.org/markup-compatibility/2006" xmlns:p14="http://schemas.microsoft.com/office/powerpoint/2010/main">
+          <mc:Choice Requires="p14">
             <p:contentPart p14:bwMode="auto" r:id="rId37">
               <p14:nvContentPartPr>
                 <p14:cNvPr id="42" name="Ink 41">
@@ -8451,7 +9244,7 @@
               </p14:xfrm>
             </p:contentPart>
           </mc:Choice>
-          <mc:Fallback>
+          <mc:Fallback xmlns="">
             <p:pic>
               <p:nvPicPr>
                 <p:cNvPr id="42" name="Ink 41">
@@ -8482,8 +9275,8 @@
             </p:pic>
           </mc:Fallback>
         </mc:AlternateContent>
-        <mc:AlternateContent xmlns:mc="http://schemas.openxmlformats.org/markup-compatibility/2006">
-          <mc:Choice xmlns:p14="http://schemas.microsoft.com/office/powerpoint/2010/main" Requires="p14">
+        <mc:AlternateContent xmlns:mc="http://schemas.openxmlformats.org/markup-compatibility/2006" xmlns:p14="http://schemas.microsoft.com/office/powerpoint/2010/main">
+          <mc:Choice Requires="p14">
             <p:contentPart p14:bwMode="auto" r:id="rId39">
               <p14:nvContentPartPr>
                 <p14:cNvPr id="43" name="Ink 42">
@@ -8502,7 +9295,7 @@
               </p14:xfrm>
             </p:contentPart>
           </mc:Choice>
-          <mc:Fallback>
+          <mc:Fallback xmlns="">
             <p:pic>
               <p:nvPicPr>
                 <p:cNvPr id="43" name="Ink 42">
@@ -8533,8 +9326,8 @@
             </p:pic>
           </mc:Fallback>
         </mc:AlternateContent>
-        <mc:AlternateContent xmlns:mc="http://schemas.openxmlformats.org/markup-compatibility/2006">
-          <mc:Choice xmlns:p14="http://schemas.microsoft.com/office/powerpoint/2010/main" Requires="p14">
+        <mc:AlternateContent xmlns:mc="http://schemas.openxmlformats.org/markup-compatibility/2006" xmlns:p14="http://schemas.microsoft.com/office/powerpoint/2010/main">
+          <mc:Choice Requires="p14">
             <p:contentPart p14:bwMode="auto" r:id="rId41">
               <p14:nvContentPartPr>
                 <p14:cNvPr id="44" name="Ink 43">
@@ -8553,7 +9346,7 @@
               </p14:xfrm>
             </p:contentPart>
           </mc:Choice>
-          <mc:Fallback>
+          <mc:Fallback xmlns="">
             <p:pic>
               <p:nvPicPr>
                 <p:cNvPr id="44" name="Ink 43">
@@ -8584,8 +9377,8 @@
             </p:pic>
           </mc:Fallback>
         </mc:AlternateContent>
-        <mc:AlternateContent xmlns:mc="http://schemas.openxmlformats.org/markup-compatibility/2006">
-          <mc:Choice xmlns:p14="http://schemas.microsoft.com/office/powerpoint/2010/main" Requires="p14">
+        <mc:AlternateContent xmlns:mc="http://schemas.openxmlformats.org/markup-compatibility/2006" xmlns:p14="http://schemas.microsoft.com/office/powerpoint/2010/main">
+          <mc:Choice Requires="p14">
             <p:contentPart p14:bwMode="auto" r:id="rId43">
               <p14:nvContentPartPr>
                 <p14:cNvPr id="45" name="Ink 44">
@@ -8604,7 +9397,7 @@
               </p14:xfrm>
             </p:contentPart>
           </mc:Choice>
-          <mc:Fallback>
+          <mc:Fallback xmlns="">
             <p:pic>
               <p:nvPicPr>
                 <p:cNvPr id="45" name="Ink 44">
@@ -8635,8 +9428,8 @@
             </p:pic>
           </mc:Fallback>
         </mc:AlternateContent>
-        <mc:AlternateContent xmlns:mc="http://schemas.openxmlformats.org/markup-compatibility/2006">
-          <mc:Choice xmlns:p14="http://schemas.microsoft.com/office/powerpoint/2010/main" Requires="p14">
+        <mc:AlternateContent xmlns:mc="http://schemas.openxmlformats.org/markup-compatibility/2006" xmlns:p14="http://schemas.microsoft.com/office/powerpoint/2010/main">
+          <mc:Choice Requires="p14">
             <p:contentPart p14:bwMode="auto" r:id="rId45">
               <p14:nvContentPartPr>
                 <p14:cNvPr id="46" name="Ink 45">
@@ -8655,7 +9448,7 @@
               </p14:xfrm>
             </p:contentPart>
           </mc:Choice>
-          <mc:Fallback>
+          <mc:Fallback xmlns="">
             <p:pic>
               <p:nvPicPr>
                 <p:cNvPr id="46" name="Ink 45">
@@ -8686,8 +9479,8 @@
             </p:pic>
           </mc:Fallback>
         </mc:AlternateContent>
-        <mc:AlternateContent xmlns:mc="http://schemas.openxmlformats.org/markup-compatibility/2006">
-          <mc:Choice xmlns:p14="http://schemas.microsoft.com/office/powerpoint/2010/main" Requires="p14">
+        <mc:AlternateContent xmlns:mc="http://schemas.openxmlformats.org/markup-compatibility/2006" xmlns:p14="http://schemas.microsoft.com/office/powerpoint/2010/main">
+          <mc:Choice Requires="p14">
             <p:contentPart p14:bwMode="auto" r:id="rId47">
               <p14:nvContentPartPr>
                 <p14:cNvPr id="47" name="Ink 46">
@@ -8706,7 +9499,7 @@
               </p14:xfrm>
             </p:contentPart>
           </mc:Choice>
-          <mc:Fallback>
+          <mc:Fallback xmlns="">
             <p:pic>
               <p:nvPicPr>
                 <p:cNvPr id="47" name="Ink 46">
@@ -8737,8 +9530,8 @@
             </p:pic>
           </mc:Fallback>
         </mc:AlternateContent>
-        <mc:AlternateContent xmlns:mc="http://schemas.openxmlformats.org/markup-compatibility/2006">
-          <mc:Choice xmlns:p14="http://schemas.microsoft.com/office/powerpoint/2010/main" Requires="p14">
+        <mc:AlternateContent xmlns:mc="http://schemas.openxmlformats.org/markup-compatibility/2006" xmlns:p14="http://schemas.microsoft.com/office/powerpoint/2010/main">
+          <mc:Choice Requires="p14">
             <p:contentPart p14:bwMode="auto" r:id="rId49">
               <p14:nvContentPartPr>
                 <p14:cNvPr id="48" name="Ink 47">
@@ -8757,7 +9550,7 @@
               </p14:xfrm>
             </p:contentPart>
           </mc:Choice>
-          <mc:Fallback>
+          <mc:Fallback xmlns="">
             <p:pic>
               <p:nvPicPr>
                 <p:cNvPr id="48" name="Ink 47">
@@ -8788,8 +9581,8 @@
             </p:pic>
           </mc:Fallback>
         </mc:AlternateContent>
-        <mc:AlternateContent xmlns:mc="http://schemas.openxmlformats.org/markup-compatibility/2006">
-          <mc:Choice xmlns:p14="http://schemas.microsoft.com/office/powerpoint/2010/main" Requires="p14">
+        <mc:AlternateContent xmlns:mc="http://schemas.openxmlformats.org/markup-compatibility/2006" xmlns:p14="http://schemas.microsoft.com/office/powerpoint/2010/main">
+          <mc:Choice Requires="p14">
             <p:contentPart p14:bwMode="auto" r:id="rId51">
               <p14:nvContentPartPr>
                 <p14:cNvPr id="49" name="Ink 48">
@@ -8808,7 +9601,7 @@
               </p14:xfrm>
             </p:contentPart>
           </mc:Choice>
-          <mc:Fallback>
+          <mc:Fallback xmlns="">
             <p:pic>
               <p:nvPicPr>
                 <p:cNvPr id="49" name="Ink 48">
@@ -8839,8 +9632,8 @@
             </p:pic>
           </mc:Fallback>
         </mc:AlternateContent>
-        <mc:AlternateContent xmlns:mc="http://schemas.openxmlformats.org/markup-compatibility/2006">
-          <mc:Choice xmlns:p14="http://schemas.microsoft.com/office/powerpoint/2010/main" Requires="p14">
+        <mc:AlternateContent xmlns:mc="http://schemas.openxmlformats.org/markup-compatibility/2006" xmlns:p14="http://schemas.microsoft.com/office/powerpoint/2010/main">
+          <mc:Choice Requires="p14">
             <p:contentPart p14:bwMode="auto" r:id="rId53">
               <p14:nvContentPartPr>
                 <p14:cNvPr id="50" name="Ink 49">
@@ -8859,7 +9652,7 @@
               </p14:xfrm>
             </p:contentPart>
           </mc:Choice>
-          <mc:Fallback>
+          <mc:Fallback xmlns="">
             <p:pic>
               <p:nvPicPr>
                 <p:cNvPr id="50" name="Ink 49">
@@ -8890,8 +9683,8 @@
             </p:pic>
           </mc:Fallback>
         </mc:AlternateContent>
-        <mc:AlternateContent xmlns:mc="http://schemas.openxmlformats.org/markup-compatibility/2006">
-          <mc:Choice xmlns:p14="http://schemas.microsoft.com/office/powerpoint/2010/main" Requires="p14">
+        <mc:AlternateContent xmlns:mc="http://schemas.openxmlformats.org/markup-compatibility/2006" xmlns:p14="http://schemas.microsoft.com/office/powerpoint/2010/main">
+          <mc:Choice Requires="p14">
             <p:contentPart p14:bwMode="auto" r:id="rId55">
               <p14:nvContentPartPr>
                 <p14:cNvPr id="51" name="Ink 50">
@@ -8910,7 +9703,7 @@
               </p14:xfrm>
             </p:contentPart>
           </mc:Choice>
-          <mc:Fallback>
+          <mc:Fallback xmlns="">
             <p:pic>
               <p:nvPicPr>
                 <p:cNvPr id="51" name="Ink 50">
@@ -8941,8 +9734,8 @@
             </p:pic>
           </mc:Fallback>
         </mc:AlternateContent>
-        <mc:AlternateContent xmlns:mc="http://schemas.openxmlformats.org/markup-compatibility/2006">
-          <mc:Choice xmlns:p14="http://schemas.microsoft.com/office/powerpoint/2010/main" Requires="p14">
+        <mc:AlternateContent xmlns:mc="http://schemas.openxmlformats.org/markup-compatibility/2006" xmlns:p14="http://schemas.microsoft.com/office/powerpoint/2010/main">
+          <mc:Choice Requires="p14">
             <p:contentPart p14:bwMode="auto" r:id="rId57">
               <p14:nvContentPartPr>
                 <p14:cNvPr id="52" name="Ink 51">
@@ -8961,7 +9754,7 @@
               </p14:xfrm>
             </p:contentPart>
           </mc:Choice>
-          <mc:Fallback>
+          <mc:Fallback xmlns="">
             <p:pic>
               <p:nvPicPr>
                 <p:cNvPr id="52" name="Ink 51">
@@ -8992,8 +9785,8 @@
             </p:pic>
           </mc:Fallback>
         </mc:AlternateContent>
-        <mc:AlternateContent xmlns:mc="http://schemas.openxmlformats.org/markup-compatibility/2006">
-          <mc:Choice xmlns:p14="http://schemas.microsoft.com/office/powerpoint/2010/main" Requires="p14">
+        <mc:AlternateContent xmlns:mc="http://schemas.openxmlformats.org/markup-compatibility/2006" xmlns:p14="http://schemas.microsoft.com/office/powerpoint/2010/main">
+          <mc:Choice Requires="p14">
             <p:contentPart p14:bwMode="auto" r:id="rId59">
               <p14:nvContentPartPr>
                 <p14:cNvPr id="53" name="Ink 52">
@@ -9012,7 +9805,7 @@
               </p14:xfrm>
             </p:contentPart>
           </mc:Choice>
-          <mc:Fallback>
+          <mc:Fallback xmlns="">
             <p:pic>
               <p:nvPicPr>
                 <p:cNvPr id="53" name="Ink 52">
@@ -9044,6 +9837,36 @@
           </mc:Fallback>
         </mc:AlternateContent>
       </p:grpSp>
+      <p:pic>
+        <p:nvPicPr>
+          <p:cNvPr id="5" name="Picture 4">
+            <a:extLst>
+              <a:ext uri="{FF2B5EF4-FFF2-40B4-BE49-F238E27FC236}">
+                <a16:creationId xmlns:a16="http://schemas.microsoft.com/office/drawing/2014/main" id="{18A2C981-4628-11A3-C0B7-641F8FA9B266}"/>
+              </a:ext>
+            </a:extLst>
+          </p:cNvPr>
+          <p:cNvPicPr>
+            <a:picLocks noChangeAspect="1"/>
+          </p:cNvPicPr>
+          <p:nvPr/>
+        </p:nvPicPr>
+        <p:blipFill>
+          <a:blip r:embed="rId61"/>
+          <a:stretch>
+            <a:fillRect/>
+          </a:stretch>
+        </p:blipFill>
+        <p:spPr>
+          <a:xfrm>
+            <a:off x="4709161" y="2336916"/>
+            <a:ext cx="7500744" cy="3990202"/>
+          </a:xfrm>
+          <a:prstGeom prst="rect">
+            <a:avLst/>
+          </a:prstGeom>
+        </p:spPr>
+      </p:pic>
     </p:spTree>
     <p:extLst>
       <p:ext uri="{BB962C8B-B14F-4D97-AF65-F5344CB8AC3E}">
@@ -9094,7 +9917,7 @@
         </p:nvSpPr>
         <p:spPr>
           <a:xfrm>
-            <a:off x="233680" y="688816"/>
+            <a:off x="123952" y="259048"/>
             <a:ext cx="7366000" cy="2308324"/>
           </a:xfrm>
           <a:prstGeom prst="rect">
@@ -9200,6 +10023,36 @@
           </a:p>
         </p:txBody>
       </p:sp>
+      <p:pic>
+        <p:nvPicPr>
+          <p:cNvPr id="2" name="Picture 1">
+            <a:extLst>
+              <a:ext uri="{FF2B5EF4-FFF2-40B4-BE49-F238E27FC236}">
+                <a16:creationId xmlns:a16="http://schemas.microsoft.com/office/drawing/2014/main" id="{64ACE229-9138-0F80-4A2B-1DDA16A48390}"/>
+              </a:ext>
+            </a:extLst>
+          </p:cNvPr>
+          <p:cNvPicPr>
+            <a:picLocks noChangeAspect="1"/>
+          </p:cNvPicPr>
+          <p:nvPr/>
+        </p:nvPicPr>
+        <p:blipFill>
+          <a:blip r:embed="rId2"/>
+          <a:stretch>
+            <a:fillRect/>
+          </a:stretch>
+        </p:blipFill>
+        <p:spPr>
+          <a:xfrm>
+            <a:off x="3822766" y="1865376"/>
+            <a:ext cx="8387140" cy="4461742"/>
+          </a:xfrm>
+          <a:prstGeom prst="rect">
+            <a:avLst/>
+          </a:prstGeom>
+        </p:spPr>
+      </p:pic>
     </p:spTree>
     <p:extLst>
       <p:ext uri="{BB962C8B-B14F-4D97-AF65-F5344CB8AC3E}">
@@ -9236,6 +10089,36 @@
           <a:chExt cx="0" cy="0"/>
         </a:xfrm>
       </p:grpSpPr>
+      <p:pic>
+        <p:nvPicPr>
+          <p:cNvPr id="4" name="Picture 3">
+            <a:extLst>
+              <a:ext uri="{FF2B5EF4-FFF2-40B4-BE49-F238E27FC236}">
+                <a16:creationId xmlns:a16="http://schemas.microsoft.com/office/drawing/2014/main" id="{7A0F25FC-A0CC-1840-505F-3DD437F34152}"/>
+              </a:ext>
+            </a:extLst>
+          </p:cNvPr>
+          <p:cNvPicPr>
+            <a:picLocks noChangeAspect="1"/>
+          </p:cNvPicPr>
+          <p:nvPr/>
+        </p:nvPicPr>
+        <p:blipFill>
+          <a:blip r:embed="rId2"/>
+          <a:stretch>
+            <a:fillRect/>
+          </a:stretch>
+        </p:blipFill>
+        <p:spPr>
+          <a:xfrm>
+            <a:off x="2825814" y="1335024"/>
+            <a:ext cx="9384092" cy="4992094"/>
+          </a:xfrm>
+          <a:prstGeom prst="rect">
+            <a:avLst/>
+          </a:prstGeom>
+        </p:spPr>
+      </p:pic>
       <p:sp>
         <p:nvSpPr>
           <p:cNvPr id="9" name="TextBox 8">
@@ -9251,7 +10134,7 @@
         <p:spPr>
           <a:xfrm>
             <a:off x="233680" y="213328"/>
-            <a:ext cx="11287760" cy="3416320"/>
+            <a:ext cx="11287760" cy="1569660"/>
           </a:xfrm>
           <a:prstGeom prst="rect">
             <a:avLst/>
@@ -9340,675 +10223,6 @@
                 </a:solidFill>
               </a:rPr>
               <a:t> notebook)</a:t>
-            </a:r>
-          </a:p>
-          <a:p>
-            <a:endParaRPr lang="en-US" sz="2400" dirty="0">
-              <a:solidFill>
-                <a:schemeClr val="accent6">
-                  <a:lumMod val="60000"/>
-                  <a:lumOff val="40000"/>
-                </a:schemeClr>
-              </a:solidFill>
-            </a:endParaRPr>
-          </a:p>
-          <a:p>
-            <a:pPr marL="342900" indent="-342900">
-              <a:buFont typeface="Arial" panose="020B0604020202020204" pitchFamily="34" charset="0"/>
-              <a:buChar char="•"/>
-            </a:pPr>
-            <a:r>
-              <a:rPr lang="en-US" sz="2400" b="1" dirty="0">
-                <a:solidFill>
-                  <a:schemeClr val="accent6">
-                    <a:lumMod val="60000"/>
-                    <a:lumOff val="40000"/>
-                  </a:schemeClr>
-                </a:solidFill>
-              </a:rPr>
-              <a:t>Pine Vector DB: </a:t>
-            </a:r>
-          </a:p>
-          <a:p>
-            <a:pPr marL="800100" lvl="1" indent="-342900">
-              <a:buFont typeface="Arial" panose="020B0604020202020204" pitchFamily="34" charset="0"/>
-              <a:buChar char="•"/>
-            </a:pPr>
-            <a:r>
-              <a:rPr lang="en-US" sz="2400" dirty="0">
-                <a:solidFill>
-                  <a:schemeClr val="accent6">
-                    <a:lumMod val="60000"/>
-                    <a:lumOff val="40000"/>
-                  </a:schemeClr>
-                </a:solidFill>
-              </a:rPr>
-              <a:t>User need to login (free)</a:t>
-            </a:r>
-          </a:p>
-          <a:p>
-            <a:pPr marL="800100" lvl="1" indent="-342900">
-              <a:buFont typeface="Arial" panose="020B0604020202020204" pitchFamily="34" charset="0"/>
-              <a:buChar char="•"/>
-            </a:pPr>
-            <a:r>
-              <a:rPr lang="en-US" sz="2400" dirty="0">
-                <a:solidFill>
-                  <a:schemeClr val="accent6">
-                    <a:lumMod val="60000"/>
-                    <a:lumOff val="40000"/>
-                  </a:schemeClr>
-                </a:solidFill>
-              </a:rPr>
-              <a:t>Get API Key and use it (Look at docs on how to use API keys with python code)</a:t>
-            </a:r>
-          </a:p>
-          <a:p>
-            <a:pPr marL="800100" lvl="1" indent="-342900">
-              <a:buFont typeface="Arial" panose="020B0604020202020204" pitchFamily="34" charset="0"/>
-              <a:buChar char="•"/>
-            </a:pPr>
-            <a:r>
-              <a:rPr lang="en-US" sz="2400" dirty="0">
-                <a:solidFill>
-                  <a:schemeClr val="accent6">
-                    <a:lumMod val="60000"/>
-                    <a:lumOff val="40000"/>
-                  </a:schemeClr>
-                </a:solidFill>
-              </a:rPr>
-              <a:t>You can have up to 5 index for free. (See the </a:t>
-            </a:r>
-            <a:r>
-              <a:rPr lang="en-US" sz="2400" dirty="0" err="1">
-                <a:solidFill>
-                  <a:schemeClr val="accent6">
-                    <a:lumMod val="60000"/>
-                    <a:lumOff val="40000"/>
-                  </a:schemeClr>
-                </a:solidFill>
-              </a:rPr>
-              <a:t>jupyter</a:t>
-            </a:r>
-            <a:r>
-              <a:rPr lang="en-US" sz="2400" dirty="0">
-                <a:solidFill>
-                  <a:schemeClr val="accent6">
-                    <a:lumMod val="60000"/>
-                    <a:lumOff val="40000"/>
-                  </a:schemeClr>
-                </a:solidFill>
-              </a:rPr>
-              <a:t> notebook)</a:t>
-            </a:r>
-          </a:p>
-        </p:txBody>
-      </p:sp>
-      <p:graphicFrame>
-        <p:nvGraphicFramePr>
-          <p:cNvPr id="2" name="Table 1">
-            <a:extLst>
-              <a:ext uri="{FF2B5EF4-FFF2-40B4-BE49-F238E27FC236}">
-                <a16:creationId xmlns:a16="http://schemas.microsoft.com/office/drawing/2014/main" id="{D598BC6C-EB79-D60C-8931-2A4F5349BCAA}"/>
-              </a:ext>
-            </a:extLst>
-          </p:cNvPr>
-          <p:cNvGraphicFramePr>
-            <a:graphicFrameLocks noGrp="1"/>
-          </p:cNvGraphicFramePr>
-          <p:nvPr>
-            <p:extLst>
-              <p:ext uri="{D42A27DB-BD31-4B8C-83A1-F6EECF244321}">
-                <p14:modId xmlns:p14="http://schemas.microsoft.com/office/powerpoint/2010/main" val="472138595"/>
-              </p:ext>
-            </p:extLst>
-          </p:nvPr>
-        </p:nvGraphicFramePr>
-        <p:xfrm>
-          <a:off x="193548" y="4670838"/>
-          <a:ext cx="9189720" cy="1828800"/>
-        </p:xfrm>
-        <a:graphic>
-          <a:graphicData uri="http://schemas.openxmlformats.org/drawingml/2006/table">
-            <a:tbl>
-              <a:tblPr/>
-              <a:tblGrid>
-                <a:gridCol w="2128520">
-                  <a:extLst>
-                    <a:ext uri="{9D8B030D-6E8A-4147-A177-3AD203B41FA5}">
-                      <a16:colId xmlns:a16="http://schemas.microsoft.com/office/drawing/2014/main" val="3052785715"/>
-                    </a:ext>
-                  </a:extLst>
-                </a:gridCol>
-                <a:gridCol w="3373120">
-                  <a:extLst>
-                    <a:ext uri="{9D8B030D-6E8A-4147-A177-3AD203B41FA5}">
-                      <a16:colId xmlns:a16="http://schemas.microsoft.com/office/drawing/2014/main" val="2561522023"/>
-                    </a:ext>
-                  </a:extLst>
-                </a:gridCol>
-                <a:gridCol w="3688080">
-                  <a:extLst>
-                    <a:ext uri="{9D8B030D-6E8A-4147-A177-3AD203B41FA5}">
-                      <a16:colId xmlns:a16="http://schemas.microsoft.com/office/drawing/2014/main" val="3276394238"/>
-                    </a:ext>
-                  </a:extLst>
-                </a:gridCol>
-              </a:tblGrid>
-              <a:tr h="0">
-                <a:tc>
-                  <a:txBody>
-                    <a:bodyPr/>
-                    <a:lstStyle/>
-                    <a:p>
-                      <a:pPr algn="ctr">
-                        <a:buNone/>
-                      </a:pPr>
-                      <a:r>
-                        <a:rPr lang="en-US" sz="2400" b="1" dirty="0">
-                          <a:solidFill>
-                            <a:schemeClr val="accent6">
-                              <a:lumMod val="60000"/>
-                              <a:lumOff val="40000"/>
-                            </a:schemeClr>
-                          </a:solidFill>
-                        </a:rPr>
-                        <a:t>Feature</a:t>
-                      </a:r>
-                    </a:p>
-                  </a:txBody>
-                  <a:tcPr anchor="ctr">
-                    <a:lnL>
-                      <a:noFill/>
-                    </a:lnL>
-                    <a:lnR>
-                      <a:noFill/>
-                    </a:lnR>
-                    <a:lnT>
-                      <a:noFill/>
-                    </a:lnT>
-                    <a:lnB>
-                      <a:noFill/>
-                    </a:lnB>
-                    <a:noFill/>
-                  </a:tcPr>
-                </a:tc>
-                <a:tc>
-                  <a:txBody>
-                    <a:bodyPr/>
-                    <a:lstStyle/>
-                    <a:p>
-                      <a:pPr algn="ctr">
-                        <a:buNone/>
-                      </a:pPr>
-                      <a:r>
-                        <a:rPr lang="en-US" sz="2400" b="1" dirty="0">
-                          <a:solidFill>
-                            <a:schemeClr val="accent6">
-                              <a:lumMod val="60000"/>
-                              <a:lumOff val="40000"/>
-                            </a:schemeClr>
-                          </a:solidFill>
-                        </a:rPr>
-                        <a:t>FAISS</a:t>
-                      </a:r>
-                    </a:p>
-                  </a:txBody>
-                  <a:tcPr anchor="ctr">
-                    <a:lnL>
-                      <a:noFill/>
-                    </a:lnL>
-                    <a:lnR>
-                      <a:noFill/>
-                    </a:lnR>
-                    <a:lnT>
-                      <a:noFill/>
-                    </a:lnT>
-                    <a:lnB>
-                      <a:noFill/>
-                    </a:lnB>
-                    <a:noFill/>
-                  </a:tcPr>
-                </a:tc>
-                <a:tc>
-                  <a:txBody>
-                    <a:bodyPr/>
-                    <a:lstStyle/>
-                    <a:p>
-                      <a:pPr algn="ctr">
-                        <a:buNone/>
-                      </a:pPr>
-                      <a:r>
-                        <a:rPr lang="en-US" sz="2400" b="1" dirty="0">
-                          <a:solidFill>
-                            <a:schemeClr val="accent6">
-                              <a:lumMod val="60000"/>
-                              <a:lumOff val="40000"/>
-                            </a:schemeClr>
-                          </a:solidFill>
-                        </a:rPr>
-                        <a:t>Pinecone</a:t>
-                      </a:r>
-                    </a:p>
-                  </a:txBody>
-                  <a:tcPr anchor="ctr">
-                    <a:lnL>
-                      <a:noFill/>
-                    </a:lnL>
-                    <a:lnR>
-                      <a:noFill/>
-                    </a:lnR>
-                    <a:lnT>
-                      <a:noFill/>
-                    </a:lnT>
-                    <a:lnB>
-                      <a:noFill/>
-                    </a:lnB>
-                    <a:noFill/>
-                  </a:tcPr>
-                </a:tc>
-                <a:extLst>
-                  <a:ext uri="{0D108BD9-81ED-4DB2-BD59-A6C34878D82A}">
-                    <a16:rowId xmlns:a16="http://schemas.microsoft.com/office/drawing/2014/main" val="2404825552"/>
-                  </a:ext>
-                </a:extLst>
-              </a:tr>
-              <a:tr h="0">
-                <a:tc>
-                  <a:txBody>
-                    <a:bodyPr/>
-                    <a:lstStyle/>
-                    <a:p>
-                      <a:pPr algn="ctr">
-                        <a:buNone/>
-                      </a:pPr>
-                      <a:r>
-                        <a:rPr lang="en-US" sz="2400" b="1" dirty="0">
-                          <a:solidFill>
-                            <a:schemeClr val="accent6">
-                              <a:lumMod val="60000"/>
-                              <a:lumOff val="40000"/>
-                            </a:schemeClr>
-                          </a:solidFill>
-                        </a:rPr>
-                        <a:t>Setup</a:t>
-                      </a:r>
-                    </a:p>
-                  </a:txBody>
-                  <a:tcPr anchor="ctr">
-                    <a:lnL>
-                      <a:noFill/>
-                    </a:lnL>
-                    <a:lnR>
-                      <a:noFill/>
-                    </a:lnR>
-                    <a:lnT>
-                      <a:noFill/>
-                    </a:lnT>
-                    <a:lnB>
-                      <a:noFill/>
-                    </a:lnB>
-                    <a:noFill/>
-                  </a:tcPr>
-                </a:tc>
-                <a:tc>
-                  <a:txBody>
-                    <a:bodyPr/>
-                    <a:lstStyle/>
-                    <a:p>
-                      <a:pPr algn="ctr">
-                        <a:buNone/>
-                      </a:pPr>
-                      <a:r>
-                        <a:rPr lang="en-US" sz="2400" dirty="0">
-                          <a:solidFill>
-                            <a:schemeClr val="accent6">
-                              <a:lumMod val="60000"/>
-                              <a:lumOff val="40000"/>
-                            </a:schemeClr>
-                          </a:solidFill>
-                        </a:rPr>
-                        <a:t>Local</a:t>
-                      </a:r>
-                    </a:p>
-                  </a:txBody>
-                  <a:tcPr anchor="ctr">
-                    <a:lnL>
-                      <a:noFill/>
-                    </a:lnL>
-                    <a:lnR>
-                      <a:noFill/>
-                    </a:lnR>
-                    <a:lnT>
-                      <a:noFill/>
-                    </a:lnT>
-                    <a:lnB>
-                      <a:noFill/>
-                    </a:lnB>
-                    <a:noFill/>
-                  </a:tcPr>
-                </a:tc>
-                <a:tc>
-                  <a:txBody>
-                    <a:bodyPr/>
-                    <a:lstStyle/>
-                    <a:p>
-                      <a:pPr algn="ctr">
-                        <a:buNone/>
-                      </a:pPr>
-                      <a:r>
-                        <a:rPr lang="en-US" sz="2400" dirty="0">
-                          <a:solidFill>
-                            <a:schemeClr val="accent6">
-                              <a:lumMod val="60000"/>
-                              <a:lumOff val="40000"/>
-                            </a:schemeClr>
-                          </a:solidFill>
-                        </a:rPr>
-                        <a:t>Cloud</a:t>
-                      </a:r>
-                    </a:p>
-                  </a:txBody>
-                  <a:tcPr anchor="ctr">
-                    <a:lnL>
-                      <a:noFill/>
-                    </a:lnL>
-                    <a:lnR>
-                      <a:noFill/>
-                    </a:lnR>
-                    <a:lnT>
-                      <a:noFill/>
-                    </a:lnT>
-                    <a:lnB>
-                      <a:noFill/>
-                    </a:lnB>
-                    <a:noFill/>
-                  </a:tcPr>
-                </a:tc>
-                <a:extLst>
-                  <a:ext uri="{0D108BD9-81ED-4DB2-BD59-A6C34878D82A}">
-                    <a16:rowId xmlns:a16="http://schemas.microsoft.com/office/drawing/2014/main" val="3270416982"/>
-                  </a:ext>
-                </a:extLst>
-              </a:tr>
-              <a:tr h="0">
-                <a:tc>
-                  <a:txBody>
-                    <a:bodyPr/>
-                    <a:lstStyle/>
-                    <a:p>
-                      <a:pPr algn="ctr">
-                        <a:buNone/>
-                      </a:pPr>
-                      <a:r>
-                        <a:rPr lang="en-US" sz="2400" b="1" dirty="0">
-                          <a:solidFill>
-                            <a:schemeClr val="accent6">
-                              <a:lumMod val="60000"/>
-                              <a:lumOff val="40000"/>
-                            </a:schemeClr>
-                          </a:solidFill>
-                        </a:rPr>
-                        <a:t>Scaling</a:t>
-                      </a:r>
-                    </a:p>
-                  </a:txBody>
-                  <a:tcPr anchor="ctr">
-                    <a:lnL>
-                      <a:noFill/>
-                    </a:lnL>
-                    <a:lnR>
-                      <a:noFill/>
-                    </a:lnR>
-                    <a:lnT>
-                      <a:noFill/>
-                    </a:lnT>
-                    <a:lnB>
-                      <a:noFill/>
-                    </a:lnB>
-                    <a:noFill/>
-                  </a:tcPr>
-                </a:tc>
-                <a:tc>
-                  <a:txBody>
-                    <a:bodyPr/>
-                    <a:lstStyle/>
-                    <a:p>
-                      <a:pPr algn="ctr">
-                        <a:buNone/>
-                      </a:pPr>
-                      <a:r>
-                        <a:rPr lang="en-US" sz="2400" dirty="0">
-                          <a:solidFill>
-                            <a:schemeClr val="accent6">
-                              <a:lumMod val="60000"/>
-                              <a:lumOff val="40000"/>
-                            </a:schemeClr>
-                          </a:solidFill>
-                        </a:rPr>
-                        <a:t>Manual</a:t>
-                      </a:r>
-                    </a:p>
-                  </a:txBody>
-                  <a:tcPr anchor="ctr">
-                    <a:lnL>
-                      <a:noFill/>
-                    </a:lnL>
-                    <a:lnR>
-                      <a:noFill/>
-                    </a:lnR>
-                    <a:lnT>
-                      <a:noFill/>
-                    </a:lnT>
-                    <a:lnB>
-                      <a:noFill/>
-                    </a:lnB>
-                    <a:noFill/>
-                  </a:tcPr>
-                </a:tc>
-                <a:tc>
-                  <a:txBody>
-                    <a:bodyPr/>
-                    <a:lstStyle/>
-                    <a:p>
-                      <a:pPr algn="ctr">
-                        <a:buNone/>
-                      </a:pPr>
-                      <a:r>
-                        <a:rPr lang="en-US" sz="2400">
-                          <a:solidFill>
-                            <a:schemeClr val="accent6">
-                              <a:lumMod val="60000"/>
-                              <a:lumOff val="40000"/>
-                            </a:schemeClr>
-                          </a:solidFill>
-                        </a:rPr>
-                        <a:t>Automatic</a:t>
-                      </a:r>
-                    </a:p>
-                  </a:txBody>
-                  <a:tcPr anchor="ctr">
-                    <a:lnL>
-                      <a:noFill/>
-                    </a:lnL>
-                    <a:lnR>
-                      <a:noFill/>
-                    </a:lnR>
-                    <a:lnT>
-                      <a:noFill/>
-                    </a:lnT>
-                    <a:lnB>
-                      <a:noFill/>
-                    </a:lnB>
-                    <a:noFill/>
-                  </a:tcPr>
-                </a:tc>
-                <a:extLst>
-                  <a:ext uri="{0D108BD9-81ED-4DB2-BD59-A6C34878D82A}">
-                    <a16:rowId xmlns:a16="http://schemas.microsoft.com/office/drawing/2014/main" val="2384854311"/>
-                  </a:ext>
-                </a:extLst>
-              </a:tr>
-              <a:tr h="0">
-                <a:tc>
-                  <a:txBody>
-                    <a:bodyPr/>
-                    <a:lstStyle/>
-                    <a:p>
-                      <a:pPr algn="ctr">
-                        <a:buNone/>
-                      </a:pPr>
-                      <a:r>
-                        <a:rPr lang="en-US" sz="2400" b="1" dirty="0">
-                          <a:solidFill>
-                            <a:schemeClr val="accent6">
-                              <a:lumMod val="60000"/>
-                              <a:lumOff val="40000"/>
-                            </a:schemeClr>
-                          </a:solidFill>
-                        </a:rPr>
-                        <a:t>Use Case</a:t>
-                      </a:r>
-                    </a:p>
-                  </a:txBody>
-                  <a:tcPr anchor="ctr">
-                    <a:lnL>
-                      <a:noFill/>
-                    </a:lnL>
-                    <a:lnR>
-                      <a:noFill/>
-                    </a:lnR>
-                    <a:lnT>
-                      <a:noFill/>
-                    </a:lnT>
-                    <a:lnB>
-                      <a:noFill/>
-                    </a:lnB>
-                    <a:noFill/>
-                  </a:tcPr>
-                </a:tc>
-                <a:tc>
-                  <a:txBody>
-                    <a:bodyPr/>
-                    <a:lstStyle/>
-                    <a:p>
-                      <a:pPr algn="ctr">
-                        <a:buNone/>
-                      </a:pPr>
-                      <a:r>
-                        <a:rPr lang="en-US" sz="2400" dirty="0">
-                          <a:solidFill>
-                            <a:schemeClr val="accent6">
-                              <a:lumMod val="60000"/>
-                              <a:lumOff val="40000"/>
-                            </a:schemeClr>
-                          </a:solidFill>
-                        </a:rPr>
-                        <a:t>Learning / small apps</a:t>
-                      </a:r>
-                    </a:p>
-                  </a:txBody>
-                  <a:tcPr anchor="ctr">
-                    <a:lnL>
-                      <a:noFill/>
-                    </a:lnL>
-                    <a:lnR>
-                      <a:noFill/>
-                    </a:lnR>
-                    <a:lnT>
-                      <a:noFill/>
-                    </a:lnT>
-                    <a:lnB>
-                      <a:noFill/>
-                    </a:lnB>
-                    <a:noFill/>
-                  </a:tcPr>
-                </a:tc>
-                <a:tc>
-                  <a:txBody>
-                    <a:bodyPr/>
-                    <a:lstStyle/>
-                    <a:p>
-                      <a:pPr algn="ctr">
-                        <a:buNone/>
-                      </a:pPr>
-                      <a:r>
-                        <a:rPr lang="en-US" sz="2400" dirty="0">
-                          <a:solidFill>
-                            <a:schemeClr val="accent6">
-                              <a:lumMod val="60000"/>
-                              <a:lumOff val="40000"/>
-                            </a:schemeClr>
-                          </a:solidFill>
-                        </a:rPr>
-                        <a:t>Production systems</a:t>
-                      </a:r>
-                    </a:p>
-                  </a:txBody>
-                  <a:tcPr anchor="ctr">
-                    <a:lnL>
-                      <a:noFill/>
-                    </a:lnL>
-                    <a:lnR>
-                      <a:noFill/>
-                    </a:lnR>
-                    <a:lnT>
-                      <a:noFill/>
-                    </a:lnT>
-                    <a:lnB>
-                      <a:noFill/>
-                    </a:lnB>
-                    <a:noFill/>
-                  </a:tcPr>
-                </a:tc>
-                <a:extLst>
-                  <a:ext uri="{0D108BD9-81ED-4DB2-BD59-A6C34878D82A}">
-                    <a16:rowId xmlns:a16="http://schemas.microsoft.com/office/drawing/2014/main" val="1470886234"/>
-                  </a:ext>
-                </a:extLst>
-              </a:tr>
-            </a:tbl>
-          </a:graphicData>
-        </a:graphic>
-      </p:graphicFrame>
-      <p:sp>
-        <p:nvSpPr>
-          <p:cNvPr id="3" name="TextBox 2">
-            <a:extLst>
-              <a:ext uri="{FF2B5EF4-FFF2-40B4-BE49-F238E27FC236}">
-                <a16:creationId xmlns:a16="http://schemas.microsoft.com/office/drawing/2014/main" id="{C73B4CA0-447D-7102-9096-27CCD70606C4}"/>
-              </a:ext>
-            </a:extLst>
-          </p:cNvPr>
-          <p:cNvSpPr txBox="1"/>
-          <p:nvPr/>
-        </p:nvSpPr>
-        <p:spPr>
-          <a:xfrm>
-            <a:off x="369824" y="4172958"/>
-            <a:ext cx="6187440" cy="461665"/>
-          </a:xfrm>
-          <a:prstGeom prst="rect">
-            <a:avLst/>
-          </a:prstGeom>
-          <a:noFill/>
-        </p:spPr>
-        <p:txBody>
-          <a:bodyPr wrap="square">
-            <a:spAutoFit/>
-          </a:bodyPr>
-          <a:lstStyle/>
-          <a:p>
-            <a:r>
-              <a:rPr lang="en-US" sz="2400" b="1" dirty="0">
-                <a:solidFill>
-                  <a:schemeClr val="accent6">
-                    <a:lumMod val="60000"/>
-                    <a:lumOff val="40000"/>
-                  </a:schemeClr>
-                </a:solidFill>
-              </a:rPr>
-              <a:t>FAISS vs Pinecone:</a:t>
             </a:r>
           </a:p>
         </p:txBody>

--- a/GenAI/wk4-embedding-vectorDB-SemanticSearch/vectorDB-SematicSearch-pt1.pptx
+++ b/GenAI/wk4-embedding-vectorDB-SemanticSearch/vectorDB-SematicSearch-pt1.pptx
@@ -227,7 +227,7 @@
           <a:p>
             <a:fld id="{7BAEECA8-D063-486F-AE31-5020270C1449}" type="datetimeFigureOut">
               <a:rPr lang="en-US" smtClean="0"/>
-              <a:t>5/21/2026</a:t>
+              <a:t>6/12/2026</a:t>
             </a:fld>
             <a:endParaRPr lang="en-US"/>
           </a:p>
@@ -331,6 +331,34 @@
           <inkml:channel name="X" type="integer" min="-2.14748E9" max="2.14748E9" units="cm"/>
           <inkml:channel name="Y" type="integer" min="-2.14748E9" max="2.14748E9" units="cm"/>
           <inkml:channel name="F" type="integer" max="32767" units="dev"/>
+        </inkml:traceFormat>
+        <inkml:channelProperties>
+          <inkml:channelProperty channel="X" name="resolution" value="1000" units="1/cm"/>
+          <inkml:channelProperty channel="Y" name="resolution" value="1000" units="1/cm"/>
+          <inkml:channelProperty channel="F" name="resolution" value="0" units="1/dev"/>
+        </inkml:channelProperties>
+      </inkml:inkSource>
+      <inkml:timestamp xml:id="ts0" timeString="2026-06-12T11:26:10.192"/>
+    </inkml:context>
+    <inkml:brush xml:id="br0">
+      <inkml:brushProperty name="width" value="0.1" units="cm"/>
+      <inkml:brushProperty name="height" value="0.1" units="cm"/>
+      <inkml:brushProperty name="color" value="#5B2D90"/>
+    </inkml:brush>
+  </inkml:definitions>
+  <inkml:trace contextRef="#ctx0" brushRef="#br0">1 299 24575,'0'0'0,"0"0"0,0-1 0,0 1 0,0 0 0,0 0 0,0 0 0,0 0 0,0-1 0,0 1 0,0 0 0,0 0 0,0 0 0,0 0 0,0 0 0,0-1 0,0 1 0,0 0 0,0 0 0,0 0 0,1 0 0,-1 0 0,0-1 0,0 1 0,0 0 0,0 0 0,0 0 0,0 0 0,0 0 0,1 0 0,-1 0 0,0 0 0,0 0 0,0 0 0,0-1 0,0 1 0,1 0 0,-1 0 0,0 0 0,0 0 0,0 0 0,0 0 0,0 0 0,1 0 0,-1 0 0,0 0 0,0 0 0,0 0 0,0 0 0,1 0 0,-1 1 0,0-1 0,0 0 0,0 0 0,0 0 0,1 0 0,11 9 0,10 13 0,46 66 0,-38-47 0,56 59 0,-84-98 0,0 0 0,0-1 0,0 1 0,1 0 0,-1-1 0,0 0 0,1 1 0,-1-1 0,1 0 0,-1 0 0,1 0 0,0-1 0,-1 1 0,1-1 0,0 1 0,-1-1 0,1 0 0,0 0 0,0 0 0,-1 0 0,1-1 0,0 1 0,-1-1 0,1 1 0,0-1 0,-1 0 0,1 0 0,-1 0 0,1-1 0,-1 1 0,0 0 0,0-1 0,3-2 0,9-7 0,-1 0 0,0-2 0,-1 1 0,13-19 0,-6 9 0,338-369 0,-305 325-1365</inkml:trace>
+</inkml:ink>
+</file>
+
+<file path=ppt/ink/ink10.xml><?xml version="1.0" encoding="utf-8"?>
+<inkml:ink xmlns:inkml="http://www.w3.org/2003/InkML">
+  <inkml:definitions>
+    <inkml:context xml:id="ctx0">
+      <inkml:inkSource xml:id="inkSrc0">
+        <inkml:traceFormat>
+          <inkml:channel name="X" type="integer" min="-2.14748E9" max="2.14748E9" units="cm"/>
+          <inkml:channel name="Y" type="integer" min="-2.14748E9" max="2.14748E9" units="cm"/>
+          <inkml:channel name="F" type="integer" max="32767" units="dev"/>
           <inkml:channel name="OA" type="integer" max="360" units="deg"/>
           <inkml:channel name="OE" type="integer" max="90" units="deg"/>
         </inkml:traceFormat>
@@ -342,7 +370,7 @@
           <inkml:channelProperty channel="OE" name="resolution" value="1000" units="1/deg"/>
         </inkml:channelProperties>
       </inkml:inkSource>
-      <inkml:timestamp xml:id="ts0" timeString="2026-03-20T17:27:50.590"/>
+      <inkml:timestamp xml:id="ts0" timeString="2026-03-20T17:28:47.379"/>
     </inkml:context>
     <inkml:brush xml:id="br0">
       <inkml:brushProperty name="width" value="0.2" units="cm"/>
@@ -350,11 +378,107 @@
       <inkml:brushProperty name="color" value="#FFC114"/>
     </inkml:brush>
   </inkml:definitions>
-  <inkml:trace contextRef="#ctx0" brushRef="#br0">375 0 524 0 0,'-20'0'3749'0'0,"11"3"-3722"0"0,7-1 39 0 0,8-1 338 0 0,254 11-412 0 0,-64 0 25 0 0,-191-11-14 0 0,-1 0 4 0 0,1 1-1 0 0,-1-1 1 0 0,1 0-1 0 0,-1-1 1 0 0,1 1-1 0 0,-1-1 1 0 0,1 0-1 0 0,-1 0 1 0 0,1 0-1 0 0,7-2 1 0 0,16 2 156 0 0,-26 0-108 0 0,0 0-73 0 0,0 1 8 0 0,-1 0-1 0 0,1 0 0 0 0,0-1 0 0 0,-1 1 1 0 0,1 0-1 0 0,-1 0 0 0 0,0 0 0 0 0,1 1 1 0 0,-1-1-1 0 0,0 0 0 0 0,0 0 0 0 0,1 1 1 0 0,-1-1-1 0 0,0 1 0 0 0,0-1 1 0 0,-1 1-1 0 0,1-1 0 0 0,0 1 0 0 0,0-1 1 0 0,-1 1-1 0 0,1 0 0 0 0,-1 0 0 0 0,1-1 1 0 0,-1 1-1 0 0,0 0 0 0 0,0 0 0 0 0,0-1 1 0 0,0 1-1 0 0,0 2 0 0 0,2 72-54 0 0,-2-59 66 0 0,19 261-89 0 0,-9-185 32 0 0,-3-43 52 0 0,28 186 44 0 0,-32-198-65 0 0,-3 41-1 0 0,0-37 52 0 0,-7 74-2 0 0,4-90 2 0 0,2 1-1 0 0,0-1 1 0 0,4 32 0 0 0,3 5-57 0 0,-6-60 28 0 0,3 28 39 0 0,-2-23-21 0 0,0 0 0 0 0,0 0 0 0 0,1 0 0 0 0,1-1-1 0 0,5 14 1 0 0,-5-13 4 0 0,0 0-1 0 0,0 0 0 0 0,-1 0 0 0 0,0 1 0 0 0,2 15 0 0 0,15 29-2 0 0,-8-5-78 0 0,-11-46 77 0 0,5 46 38 0 0,-5-47-37 0 0,-4 17 277 0 0,0-9 374 0 0,-18-6-458 0 0,-68-1 77 0 0,87-2-257 0 0,-26-2 33 0 0,-24 0 14 0 0,-54-10 0 0 0,44 4-53 0 0,-70 0 1 0 0,10 5-7 0 0,-80 2-34 0 0,121 3 21 0 0,0-2 3 0 0,79 0-2 0 0,0 0 1 0 0,-10 0-2 0 0,10 0 2 0 0,0 0-8 0 0,-8 2 6 0 0,8-2 22 0 0,-27 2 80 0 0,28-1-66 0 0,1-3-419 0 0,1 0 129 0 0,0-1-1 0 0,0 1 0 0 0,0 0 0 0 0,0 0 0 0 0,0 0 1 0 0,0 0-1 0 0,0 0 0 0 0,1 0 0 0 0,-1 0 0 0 0,1 0 0 0 0,0 0 1 0 0,-1 0-1 0 0,3-3 0 0 0,5-11-854 0 0</inkml:trace>
+  <inkml:trace contextRef="#ctx0" brushRef="#br0">19 114 3436 0 0,'-11'-88'2358'0'0,"11"87"-2157"0"0,-2-11 315 0 0,-2-1-576 0 0,2 83-27 0 0,4 0-1 0 0,3 0 0 0 0,21 110 1 0 0,-7-61 67 0 0,-13-73 61 0 0,2-2 0 0 0,14 45-1 0 0,-18-77-34 0 0,0 0-1 0 0,0-1 1 0 0,1 1-1 0 0,1-1 0 0 0,-1 0 1 0 0,2-1-1 0 0,0 0 1 0 0,0 0-1 0 0,1 0 1 0 0,0-1-1 0 0,0 0 0 0 0,17 13 1 0 0,-15-14-53 0 0,1-1-1 0 0,0-1 1 0 0,0 0-1 0 0,1 0 1 0 0,0-1 0 0 0,0-1-1 0 0,0 0 1 0 0,0 0-1 0 0,26 3 1 0 0,-31-7 12 0 0,0 1-1 0 0,-1-2 0 0 0,1 1 1 0 0,0-1-1 0 0,0 0 1 0 0,0 0-1 0 0,-1-1 1 0 0,1 0-1 0 0,-1 0 0 0 0,1 0 1 0 0,-1-1-1 0 0,0 0 1 0 0,0-1-1 0 0,0 1 1 0 0,0-1-1 0 0,-1 0 0 0 0,1 0 1 0 0,-1-1-1 0 0,0 0 1 0 0,5-6-1 0 0,3-5 358 0 0,-1-2 1 0 0,-1 0-1 0 0,-1 0 0 0 0,0-1 0 0 0,-1 0 0 0 0,10-34 0 0 0,-15 42-28 0 0,-3 10-209 0 0,0 0-61 0 0,2-6-11 0 0,-2 5-22 0 0,0 23-318 0 0,-1-18 320 0 0,1 1-1 0 0,-1-1 1 0 0,0 0-1 0 0,1 0 1 0 0,0 1-1 0 0,0-1 1 0 0,0 0-1 0 0,0 0 1 0 0,0 0 0 0 0,0 0-1 0 0,1 0 1 0 0,0 0-1 0 0,-1 0 1 0 0,1-1-1 0 0,0 1 1 0 0,0 0-1 0 0,1-1 1 0 0,-1 0 0 0 0,0 1-1 0 0,1-1 1 0 0,0 0-1 0 0,4 2 1 0 0,5 4-18 0 0,1-1-1 0 0,0-1 1 0 0,22 9 0 0 0,-27-12-4 0 0,10 4-63 0 0,1-1 0 0 0,0-1 1 0 0,0 0-1 0 0,0-1 0 0 0,0-1 1 0 0,1-1-1 0 0,-1-1 0 0 0,37-2 1 0 0,-48 0 62 0 0,0 0-1 0 0,1-1 1 0 0,-1 0 0 0 0,0 0 0 0 0,0-1 0 0 0,0 1 0 0 0,-1-2 0 0 0,1 1-1 0 0,-1-1 1 0 0,0 0 0 0 0,0-1 0 0 0,0 0 0 0 0,0 0 0 0 0,-1 0-1 0 0,0-1 1 0 0,0 0 0 0 0,0 0 0 0 0,-1 0 0 0 0,0-1 0 0 0,0 0-1 0 0,-1 0 1 0 0,7-15 0 0 0,-3 2 224 0 0,-2-1 0 0 0,8-35 0 0 0,-3 7 256 0 0,-11 48-443 0 0,1-6 30 0 0,-2 5-94 0 0,0 6-316 0 0,-7 33 337 0 0,2-1 0 0 0,1 1-1 0 0,2 1 1 0 0,2-1 0 0 0,1 0 0 0 0,6 46 0 0 0,51 225 43 0 0,-50-277 2 0 0,-2-14-12 0 0,-2 1-1 0 0,0-1 0 0 0,-1 1 1 0 0,0-1-1 0 0,-2 1 0 0 0,0 0 1 0 0,-1-1-1 0 0,-6 34 0 0 0</inkml:trace>
 </inkml:ink>
 </file>
 
-<file path=ppt/ink/ink10.xml><?xml version="1.0" encoding="utf-8"?>
+<file path=ppt/ink/ink11.xml><?xml version="1.0" encoding="utf-8"?>
+<inkml:ink xmlns:inkml="http://www.w3.org/2003/InkML">
+  <inkml:definitions>
+    <inkml:context xml:id="ctx0">
+      <inkml:inkSource xml:id="inkSrc0">
+        <inkml:traceFormat>
+          <inkml:channel name="X" type="integer" min="-2.14748E9" max="2.14748E9" units="cm"/>
+          <inkml:channel name="Y" type="integer" min="-2.14748E9" max="2.14748E9" units="cm"/>
+          <inkml:channel name="F" type="integer" max="32767" units="dev"/>
+          <inkml:channel name="OA" type="integer" max="360" units="deg"/>
+          <inkml:channel name="OE" type="integer" max="90" units="deg"/>
+        </inkml:traceFormat>
+        <inkml:channelProperties>
+          <inkml:channelProperty channel="X" name="resolution" value="1000" units="1/cm"/>
+          <inkml:channelProperty channel="Y" name="resolution" value="1000" units="1/cm"/>
+          <inkml:channelProperty channel="F" name="resolution" value="0" units="1/dev"/>
+          <inkml:channelProperty channel="OA" name="resolution" value="1000" units="1/deg"/>
+          <inkml:channelProperty channel="OE" name="resolution" value="1000" units="1/deg"/>
+        </inkml:channelProperties>
+      </inkml:inkSource>
+      <inkml:timestamp xml:id="ts0" timeString="2026-03-20T17:28:49.313"/>
+    </inkml:context>
+    <inkml:brush xml:id="br0">
+      <inkml:brushProperty name="width" value="0.2" units="cm"/>
+      <inkml:brushProperty name="height" value="0.2" units="cm"/>
+      <inkml:brushProperty name="color" value="#FFC114"/>
+    </inkml:brush>
+  </inkml:definitions>
+  <inkml:trace contextRef="#ctx0" brushRef="#br0">205 90 3784 0 0,'0'0'-72'0'0,"-7"-21"-26"0"0,4 18 98 0 0,-6-4-9 0 0,-22 6 18 0 0,23 3-17 0 0,0-1 0 0 0,1 1 0 0 0,-1 0 0 0 0,1 1-1 0 0,0 0 1 0 0,0 0 0 0 0,0 0 0 0 0,0 1 0 0 0,0 0-1 0 0,0 1 1 0 0,1-1 0 0 0,0 1 0 0 0,0 0 0 0 0,1 1-1 0 0,-1 0 1 0 0,1-1 0 0 0,0 2 0 0 0,1-1 0 0 0,-1 0-1 0 0,1 1 1 0 0,-6 13 0 0 0,8-14 11 0 0,0 0-1 0 0,0 0 1 0 0,0 0 0 0 0,0 0 0 0 0,1 0-1 0 0,0 1 1 0 0,1-1 0 0 0,-1 0-1 0 0,1 1 1 0 0,0-1 0 0 0,1 1-1 0 0,-1-1 1 0 0,2 0 0 0 0,-1 1 0 0 0,0-1-1 0 0,1 0 1 0 0,0 0 0 0 0,1 0-1 0 0,-1 0 1 0 0,1-1 0 0 0,0 1-1 0 0,1-1 1 0 0,-1 1 0 0 0,1-1 0 0 0,0 0-1 0 0,0 0 1 0 0,9 7 0 0 0,-1-2 21 0 0,1 0 1 0 0,0-1 0 0 0,0 0-1 0 0,1-1 1 0 0,0-1 0 0 0,1 0-1 0 0,-1-1 1 0 0,2 0 0 0 0,-1-1 0 0 0,0-1-1 0 0,1-1 1 0 0,0 0 0 0 0,0-1-1 0 0,29 1 1 0 0,-36-3 1 0 0,1-1 1 0 0,-1 0-1 0 0,1 0 1 0 0,-1-1-1 0 0,0 0 1 0 0,1 0-1 0 0,-1-1 1 0 0,0-1 0 0 0,0 1-1 0 0,-1-2 1 0 0,1 1-1 0 0,-1-1 1 0 0,0 0-1 0 0,0-1 1 0 0,-1 0-1 0 0,1 0 1 0 0,-1 0-1 0 0,-1-1 1 0 0,1 0-1 0 0,-1-1 1 0 0,0 1-1 0 0,-1-1 1 0 0,0 0-1 0 0,0-1 1 0 0,7-16-1 0 0,-11 21-1 0 0,1 0 1 0 0,-1 0-1 0 0,0 0 0 0 0,0 0 1 0 0,0 0-1 0 0,0 0 0 0 0,-1 0 1 0 0,0 0-1 0 0,0 0 0 0 0,0 0 1 0 0,0 0-1 0 0,-1 0 0 0 0,1 0 0 0 0,-1 0 1 0 0,0 0-1 0 0,0 0 0 0 0,-1 0 1 0 0,1 0-1 0 0,-1 0 0 0 0,0 1 1 0 0,0-1-1 0 0,0 1 0 0 0,0-1 1 0 0,-1 1-1 0 0,1 0 0 0 0,-1 0 1 0 0,0 0-1 0 0,0 0 0 0 0,0 1 0 0 0,0-1 1 0 0,-1 1-1 0 0,1-1 0 0 0,-6-2 1 0 0,-14-7 0 0 0,0 2 0 0 0,0 0 1 0 0,-1 1-1 0 0,-35-8 0 0 0,15 3 35 0 0,-9 0-4 0 0,51 13-52 0 0,-17-6 26 0 0,9 2-93 0 0,9 2-264 0 0,195 2 186 0 0,9 0-27 0 0,-50-1 1422 0 0,-149 2-1089 0 0,23 2-117 0 0,-24-2-87 0 0,0 48-349 0 0,-6-19 368 0 0,2 0 1 0 0,1 0 0 0 0,1-1-1 0 0,2 1 1 0 0,1 0 0 0 0,1-1 0 0 0,1 0-1 0 0,1 0 1 0 0,14 32 0 0 0,-13-24 3263 0 0,-15-52-2706 0 0,-2-10-486 0 0,2 0 0 0 0,0-1 0 0 0,2 0 0 0 0,-4-52-1 0 0,8 62-152 0 0,1 1 0 0 0,0 0 0 0 0,1 0 0 0 0,1 0 0 0 0,1 1-1 0 0,0-1 1 0 0,1 0 0 0 0,1 1 0 0 0,10-23 0 0 0,-12 32 40 0 0,1 0 0 0 0,0 0 0 0 0,0 1 1 0 0,1-1-1 0 0,0 1 0 0 0,0 0 0 0 0,0 1 0 0 0,0-1 1 0 0,1 1-1 0 0,-1 0 0 0 0,1 1 0 0 0,0-1 0 0 0,0 1 1 0 0,1 0-1 0 0,-1 1 0 0 0,1-1 0 0 0,-1 1 0 0 0,1 0 1 0 0,0 1-1 0 0,0 0 0 0 0,0 0 0 0 0,0 1 0 0 0,11 0 0 0 0,-7 0 0 0 0,1 0-1 0 0,0 1 0 0 0,0 1 0 0 0,0 0 1 0 0,-1 1-1 0 0,1 0 0 0 0,-1 1 0 0 0,0 0 0 0 0,0 1 1 0 0,0 0-1 0 0,-1 1 0 0 0,1 0 0 0 0,9 8 1 0 0,-5-1 19 0 0,-1 1 1 0 0,-1 0 0 0 0,0 1 0 0 0,-1 1-1 0 0,-1 0 1 0 0,0 0 0 0 0,-1 1-1 0 0,-1 1 1 0 0,0-1 0 0 0,-2 1 0 0 0,0 1-1 0 0,-1 0 1 0 0,0-1 0 0 0,3 33 0 0 0,-2-27-67 0 0</inkml:trace>
+</inkml:ink>
+</file>
+
+<file path=ppt/ink/ink12.xml><?xml version="1.0" encoding="utf-8"?>
+<inkml:ink xmlns:inkml="http://www.w3.org/2003/InkML">
+  <inkml:definitions>
+    <inkml:context xml:id="ctx0">
+      <inkml:inkSource xml:id="inkSrc0">
+        <inkml:traceFormat>
+          <inkml:channel name="X" type="integer" min="-2.14748E9" max="2.14748E9" units="cm"/>
+          <inkml:channel name="Y" type="integer" min="-2.14748E9" max="2.14748E9" units="cm"/>
+          <inkml:channel name="F" type="integer" max="32767" units="dev"/>
+          <inkml:channel name="OA" type="integer" max="360" units="deg"/>
+          <inkml:channel name="OE" type="integer" max="90" units="deg"/>
+        </inkml:traceFormat>
+        <inkml:channelProperties>
+          <inkml:channelProperty channel="X" name="resolution" value="1000" units="1/cm"/>
+          <inkml:channelProperty channel="Y" name="resolution" value="1000" units="1/cm"/>
+          <inkml:channelProperty channel="F" name="resolution" value="0" units="1/dev"/>
+          <inkml:channelProperty channel="OA" name="resolution" value="1000" units="1/deg"/>
+          <inkml:channelProperty channel="OE" name="resolution" value="1000" units="1/deg"/>
+        </inkml:channelProperties>
+      </inkml:inkSource>
+      <inkml:timestamp xml:id="ts0" timeString="2026-03-20T17:28:50.217"/>
+    </inkml:context>
+    <inkml:brush xml:id="br0">
+      <inkml:brushProperty name="width" value="0.2" units="cm"/>
+      <inkml:brushProperty name="height" value="0.2" units="cm"/>
+      <inkml:brushProperty name="color" value="#FFC114"/>
+    </inkml:brush>
+  </inkml:definitions>
+  <inkml:trace contextRef="#ctx0" brushRef="#br0">175 82 4080 0 0,'1'0'1'0'0,"1"-1"-1"0"0,-1 0 0 0 0,0 0 0 0 0,0 0 0 0 0,0 0 0 0 0,0 0 0 0 0,0 0 1 0 0,0 0-1 0 0,-1 0 0 0 0,1 0 0 0 0,0 0 0 0 0,0 0 0 0 0,-1 0 1 0 0,1-1-1 0 0,-1 1 0 0 0,1 0 0 0 0,-1-1 0 0 0,0 1 0 0 0,1 0 0 0 0,-1-1 1 0 0,0 1-1 0 0,0 0 0 0 0,0-1 0 0 0,0 1 0 0 0,0-2 0 0 0,-2 0 24 0 0,0 1-1 0 0,0 0 1 0 0,0 0-1 0 0,0 0 0 0 0,0 0 1 0 0,-1 0-1 0 0,1 0 1 0 0,-1 1-1 0 0,1-1 1 0 0,-1 1-1 0 0,0 0 0 0 0,1 0 1 0 0,-1 0-1 0 0,0 0 1 0 0,0 0-1 0 0,-4 0 0 0 0,4 0-40 0 0,-24 8-34 0 0,18-2 47 0 0,0 2-1 0 0,1-1 0 0 0,0 1 0 0 0,0 1 0 0 0,1-1 1 0 0,-1 1-1 0 0,2 0 0 0 0,-1 1 0 0 0,1 0 0 0 0,1 0 0 0 0,-1 0 1 0 0,1 1-1 0 0,1-1 0 0 0,0 1 0 0 0,1 0 0 0 0,-4 15 1 0 0,5-18 10 0 0,1 0 1 0 0,0 0 0 0 0,1 0 0 0 0,0 0-1 0 0,0 0 1 0 0,0 0 0 0 0,1-1 0 0 0,0 1 0 0 0,0 0-1 0 0,0 0 1 0 0,1-1 0 0 0,0 1 0 0 0,1 0 0 0 0,0-1-1 0 0,-1 0 1 0 0,2 0 0 0 0,-1 0 0 0 0,1 0-1 0 0,0 0 1 0 0,0-1 0 0 0,1 0 0 0 0,-1 0 0 0 0,1 0-1 0 0,1 0 1 0 0,-1-1 0 0 0,11 8 0 0 0,2-2 17 0 0,1-1 0 0 0,0 0 0 0 0,0-2 0 0 0,0 0 0 0 0,1-1 0 0 0,0-1 0 0 0,0 0 0 0 0,1-2 0 0 0,-1 0 1 0 0,23-1-1 0 0,-9-2 9 0 0,0-1 0 0 0,0-2 0 0 0,-1-1 0 0 0,1-1 0 0 0,44-14 0 0 0,-56 12-6 0 0,0-1 0 0 0,-1-1 0 0 0,0 0 0 0 0,0-2 0 0 0,-1-1 0 0 0,-1 0 0 0 0,0-1 0 0 0,0-1 0 0 0,-2-1 0 0 0,0-1 0 0 0,0 0 0 0 0,-2-1-1 0 0,0-1 1 0 0,-1 0 0 0 0,-1-1 0 0 0,0 0 0 0 0,-2-1 0 0 0,13-28 0 0 0,-23 45-9 0 0,0 0-1 0 0,0 1 1 0 0,-1-1-1 0 0,1 0 1 0 0,-1 1 0 0 0,1-1-1 0 0,-1 0 1 0 0,0 0-1 0 0,0 0 1 0 0,0 1 0 0 0,0-1-1 0 0,-1 0 1 0 0,1 0-1 0 0,-1 1 1 0 0,1-1-1 0 0,-1 0 1 0 0,0 1 0 0 0,0-1-1 0 0,0 0 1 0 0,-1 1-1 0 0,1 0 1 0 0,-1-1-1 0 0,-2-3 1 0 0,1 3-15 0 0,0 1 0 0 0,0 0-1 0 0,0 0 1 0 0,0 0 0 0 0,0 0 0 0 0,0 0-1 0 0,-1 0 1 0 0,1 1 0 0 0,-1 0-1 0 0,1 0 1 0 0,-1 0 0 0 0,1 0 0 0 0,-1 0-1 0 0,0 1 1 0 0,1-1 0 0 0,-1 1 0 0 0,0 0-1 0 0,1 0 1 0 0,-7 1 0 0 0,-2 2-22 0 0,0 0 1 0 0,1 1 0 0 0,-1 1-1 0 0,1-1 1 0 0,-1 2-1 0 0,2 0 1 0 0,-1 0-1 0 0,1 1 1 0 0,-1 0 0 0 0,2 1-1 0 0,-1 0 1 0 0,1 0-1 0 0,1 1 1 0 0,-1 0-1 0 0,1 1 1 0 0,1 0-1 0 0,-7 11 1 0 0,10-14 10 0 0,-1 0 0 0 0,1 1 0 0 0,1 0 0 0 0,0 0 0 0 0,0-1 0 0 0,0 2 0 0 0,1-1 1 0 0,0 0-1 0 0,1 0 0 0 0,0 1 0 0 0,0 14 0 0 0,1-17 9 0 0,1 0 0 0 0,0 0 1 0 0,0-1-1 0 0,1 1 1 0 0,-1 0-1 0 0,1-1 0 0 0,1 0 1 0 0,-1 1-1 0 0,1-1 0 0 0,0 0 1 0 0,0 0-1 0 0,0 0 0 0 0,1-1 1 0 0,-1 1-1 0 0,1-1 0 0 0,0 0 1 0 0,1 0-1 0 0,6 5 1 0 0,9 5 14 0 0,0-1 0 0 0,1-1 1 0 0,1-1-1 0 0,0-1 0 0 0,0-1 1 0 0,45 12-1 0 0,-31-12 45 0 0,0-2 0 0 0,1-2 0 0 0,68 2 0 0 0,-85-7 56 0 0,1-1-1 0 0,33-6 1 0 0,-50 7-319 0 0,1-1-1 0 0,0 0 1 0 0,0-1 0 0 0,-1 1 0 0 0,1-1-1 0 0,-1 0 1 0 0,1 0 0 0 0,-1 0-1 0 0,0 0 1 0 0,0-1 0 0 0,0 0-1 0 0,0 0 1 0 0,0 0 0 0 0,-1 0-1 0 0,1-1 1 0 0,-1 1 0 0 0,3-5 0 0 0,-3 0-576 0 0</inkml:trace>
+</inkml:ink>
+</file>
+
+<file path=ppt/ink/ink13.xml><?xml version="1.0" encoding="utf-8"?>
+<inkml:ink xmlns:inkml="http://www.w3.org/2003/InkML">
+  <inkml:definitions>
+    <inkml:context xml:id="ctx0">
+      <inkml:inkSource xml:id="inkSrc0">
+        <inkml:traceFormat>
+          <inkml:channel name="X" type="integer" min="-2.14748E9" max="2.14748E9" units="cm"/>
+          <inkml:channel name="Y" type="integer" min="-2.14748E9" max="2.14748E9" units="cm"/>
+          <inkml:channel name="F" type="integer" max="32767" units="dev"/>
+          <inkml:channel name="OA" type="integer" max="360" units="deg"/>
+          <inkml:channel name="OE" type="integer" max="90" units="deg"/>
+        </inkml:traceFormat>
+        <inkml:channelProperties>
+          <inkml:channelProperty channel="X" name="resolution" value="1000" units="1/cm"/>
+          <inkml:channelProperty channel="Y" name="resolution" value="1000" units="1/cm"/>
+          <inkml:channelProperty channel="F" name="resolution" value="0" units="1/dev"/>
+          <inkml:channelProperty channel="OA" name="resolution" value="1000" units="1/deg"/>
+          <inkml:channelProperty channel="OE" name="resolution" value="1000" units="1/deg"/>
+        </inkml:channelProperties>
+      </inkml:inkSource>
+      <inkml:timestamp xml:id="ts0" timeString="2026-03-20T17:28:50.481"/>
+    </inkml:context>
+    <inkml:brush xml:id="br0">
+      <inkml:brushProperty name="width" value="0.2" units="cm"/>
+      <inkml:brushProperty name="height" value="0.2" units="cm"/>
+      <inkml:brushProperty name="color" value="#FFC114"/>
+    </inkml:brush>
+  </inkml:definitions>
+  <inkml:trace contextRef="#ctx0" brushRef="#br0">1 5 4552 0 0,'0'0'4193'0'0,"13"-5"-2953"0"0</inkml:trace>
+</inkml:ink>
+</file>
+
+<file path=ppt/ink/ink14.xml><?xml version="1.0" encoding="utf-8"?>
 <inkml:ink xmlns:inkml="http://www.w3.org/2003/InkML">
   <inkml:definitions>
     <inkml:context xml:id="ctx0">
@@ -386,7 +510,7 @@
 </inkml:ink>
 </file>
 
-<file path=ppt/ink/ink11.xml><?xml version="1.0" encoding="utf-8"?>
+<file path=ppt/ink/ink15.xml><?xml version="1.0" encoding="utf-8"?>
 <inkml:ink xmlns:inkml="http://www.w3.org/2003/InkML">
   <inkml:definitions>
     <inkml:context xml:id="ctx0">
@@ -418,7 +542,7 @@
 </inkml:ink>
 </file>
 
-<file path=ppt/ink/ink12.xml><?xml version="1.0" encoding="utf-8"?>
+<file path=ppt/ink/ink16.xml><?xml version="1.0" encoding="utf-8"?>
 <inkml:ink xmlns:inkml="http://www.w3.org/2003/InkML">
   <inkml:definitions>
     <inkml:context xml:id="ctx0">
@@ -450,7 +574,7 @@
 </inkml:ink>
 </file>
 
-<file path=ppt/ink/ink13.xml><?xml version="1.0" encoding="utf-8"?>
+<file path=ppt/ink/ink17.xml><?xml version="1.0" encoding="utf-8"?>
 <inkml:ink xmlns:inkml="http://www.w3.org/2003/InkML">
   <inkml:definitions>
     <inkml:context xml:id="ctx0">
@@ -482,7 +606,7 @@
 </inkml:ink>
 </file>
 
-<file path=ppt/ink/ink14.xml><?xml version="1.0" encoding="utf-8"?>
+<file path=ppt/ink/ink18.xml><?xml version="1.0" encoding="utf-8"?>
 <inkml:ink xmlns:inkml="http://www.w3.org/2003/InkML">
   <inkml:definitions>
     <inkml:context xml:id="ctx0">
@@ -514,7 +638,7 @@
 </inkml:ink>
 </file>
 
-<file path=ppt/ink/ink15.xml><?xml version="1.0" encoding="utf-8"?>
+<file path=ppt/ink/ink19.xml><?xml version="1.0" encoding="utf-8"?>
 <inkml:ink xmlns:inkml="http://www.w3.org/2003/InkML">
   <inkml:definitions>
     <inkml:context xml:id="ctx0">
@@ -546,7 +670,35 @@
 </inkml:ink>
 </file>
 
-<file path=ppt/ink/ink16.xml><?xml version="1.0" encoding="utf-8"?>
+<file path=ppt/ink/ink2.xml><?xml version="1.0" encoding="utf-8"?>
+<inkml:ink xmlns:inkml="http://www.w3.org/2003/InkML">
+  <inkml:definitions>
+    <inkml:context xml:id="ctx0">
+      <inkml:inkSource xml:id="inkSrc0">
+        <inkml:traceFormat>
+          <inkml:channel name="X" type="integer" min="-2.14748E9" max="2.14748E9" units="cm"/>
+          <inkml:channel name="Y" type="integer" min="-2.14748E9" max="2.14748E9" units="cm"/>
+          <inkml:channel name="F" type="integer" max="32767" units="dev"/>
+        </inkml:traceFormat>
+        <inkml:channelProperties>
+          <inkml:channelProperty channel="X" name="resolution" value="1000" units="1/cm"/>
+          <inkml:channelProperty channel="Y" name="resolution" value="1000" units="1/cm"/>
+          <inkml:channelProperty channel="F" name="resolution" value="0" units="1/dev"/>
+        </inkml:channelProperties>
+      </inkml:inkSource>
+      <inkml:timestamp xml:id="ts0" timeString="2026-06-12T11:26:12.083"/>
+    </inkml:context>
+    <inkml:brush xml:id="br0">
+      <inkml:brushProperty name="width" value="0.1" units="cm"/>
+      <inkml:brushProperty name="height" value="0.1" units="cm"/>
+      <inkml:brushProperty name="color" value="#5B2D90"/>
+    </inkml:brush>
+  </inkml:definitions>
+  <inkml:trace contextRef="#ctx0" brushRef="#br0">1 104 24575,'26'-1'0,"1"-2"0,0-1 0,29-8 0,34-6 0,69-3 0,-11 0 0,203-2 0,346 25-1365,-664-2-5461</inkml:trace>
+</inkml:ink>
+</file>
+
+<file path=ppt/ink/ink20.xml><?xml version="1.0" encoding="utf-8"?>
 <inkml:ink xmlns:inkml="http://www.w3.org/2003/InkML">
   <inkml:definitions>
     <inkml:context xml:id="ctx0">
@@ -578,7 +730,7 @@
 </inkml:ink>
 </file>
 
-<file path=ppt/ink/ink17.xml><?xml version="1.0" encoding="utf-8"?>
+<file path=ppt/ink/ink21.xml><?xml version="1.0" encoding="utf-8"?>
 <inkml:ink xmlns:inkml="http://www.w3.org/2003/InkML">
   <inkml:definitions>
     <inkml:context xml:id="ctx0">
@@ -610,7 +762,7 @@
 </inkml:ink>
 </file>
 
-<file path=ppt/ink/ink18.xml><?xml version="1.0" encoding="utf-8"?>
+<file path=ppt/ink/ink22.xml><?xml version="1.0" encoding="utf-8"?>
 <inkml:ink xmlns:inkml="http://www.w3.org/2003/InkML">
   <inkml:definitions>
     <inkml:context xml:id="ctx0">
@@ -642,7 +794,7 @@
 </inkml:ink>
 </file>
 
-<file path=ppt/ink/ink19.xml><?xml version="1.0" encoding="utf-8"?>
+<file path=ppt/ink/ink23.xml><?xml version="1.0" encoding="utf-8"?>
 <inkml:ink xmlns:inkml="http://www.w3.org/2003/InkML">
   <inkml:definitions>
     <inkml:context xml:id="ctx0">
@@ -674,7 +826,415 @@
 </inkml:ink>
 </file>
 
-<file path=ppt/ink/ink2.xml><?xml version="1.0" encoding="utf-8"?>
+<file path=ppt/ink/ink24.xml><?xml version="1.0" encoding="utf-8"?>
+<inkml:ink xmlns:inkml="http://www.w3.org/2003/InkML">
+  <inkml:definitions>
+    <inkml:context xml:id="ctx0">
+      <inkml:inkSource xml:id="inkSrc0">
+        <inkml:traceFormat>
+          <inkml:channel name="X" type="integer" min="-2.14748E9" max="2.14748E9" units="cm"/>
+          <inkml:channel name="Y" type="integer" min="-2.14748E9" max="2.14748E9" units="cm"/>
+          <inkml:channel name="F" type="integer" max="32767" units="dev"/>
+          <inkml:channel name="OA" type="integer" max="360" units="deg"/>
+          <inkml:channel name="OE" type="integer" max="90" units="deg"/>
+        </inkml:traceFormat>
+        <inkml:channelProperties>
+          <inkml:channelProperty channel="X" name="resolution" value="1000" units="1/cm"/>
+          <inkml:channelProperty channel="Y" name="resolution" value="1000" units="1/cm"/>
+          <inkml:channelProperty channel="F" name="resolution" value="0" units="1/dev"/>
+          <inkml:channelProperty channel="OA" name="resolution" value="1000" units="1/deg"/>
+          <inkml:channelProperty channel="OE" name="resolution" value="1000" units="1/deg"/>
+        </inkml:channelProperties>
+      </inkml:inkSource>
+      <inkml:timestamp xml:id="ts0" timeString="2026-03-20T17:28:57.354"/>
+    </inkml:context>
+    <inkml:brush xml:id="br0">
+      <inkml:brushProperty name="width" value="0.2" units="cm"/>
+      <inkml:brushProperty name="height" value="0.2" units="cm"/>
+      <inkml:brushProperty name="color" value="#FFC114"/>
+    </inkml:brush>
+  </inkml:definitions>
+  <inkml:trace contextRef="#ctx0" brushRef="#br0">151 218 3692 0 0,'0'0'-192'0'0,"-2"3"-283"0"0,2-3 470 0 0,0 0 1 0 0,0 0 0 0 0,0 0 0 0 0,0 1-1 0 0,0-1 1 0 0,0 0 0 0 0,0 0 0 0 0,0 1-1 0 0,0-1 1 0 0,0 0 0 0 0,0 0-1 0 0,0 1 1 0 0,0-1 0 0 0,0 0 0 0 0,0 0-1 0 0,0 0 1 0 0,0 1 0 0 0,0-1 0 0 0,1 0-1 0 0,-1 0 1 0 0,0 0 0 0 0,0 1 0 0 0,0-1-1 0 0,0 0 1 0 0,0 0 0 0 0,1 0 0 0 0,-1 0-1 0 0,0 0 1 0 0,0 1 0 0 0,0-1 0 0 0,1 0-1 0 0,-1 0 1 0 0,0 0 0 0 0,0 0 0 0 0,0 0-1 0 0,1 0 1 0 0,-1 0 0 0 0,0 0 0 0 0,0 0-1 0 0,0 0 1 0 0,1 0 0 0 0,-1 1 0 0 0,0-1-1 0 0,0-1 1 0 0,1 1 0 0 0,-1 0 0 0 0,0 0-1 0 0,0 0 1 0 0,0 0 0 0 0,1 0 0 0 0,-1 0-1 0 0,0 0 1 0 0,0 0 0 0 0,1 0 0 0 0,-1 0-1 0 0,15-4-12 0 0,-1-1 1 0 0,0 0-1 0 0,0-1 0 0 0,0 0 0 0 0,-1-1 0 0 0,15-10 0 0 0,-22 13 52 0 0,-1 1 0 0 0,0-1-1 0 0,0-1 1 0 0,0 1-1 0 0,-1-1 1 0 0,0 0-1 0 0,0 0 1 0 0,0 0-1 0 0,0-1 1 0 0,-1 1 0 0 0,0-1-1 0 0,0 0 1 0 0,0 0-1 0 0,-1 0 1 0 0,0 0-1 0 0,0 0 1 0 0,-1 0-1 0 0,2-7 1 0 0,-3 10-17 0 0,0 1-1 0 0,0-1 1 0 0,1 1 0 0 0,-2-1 0 0 0,1 1-1 0 0,0 0 1 0 0,0-1 0 0 0,-1 1-1 0 0,1-1 1 0 0,-1 1 0 0 0,0 0 0 0 0,0 0-1 0 0,0-1 1 0 0,0 1 0 0 0,0 0 0 0 0,0 0-1 0 0,-1 0 1 0 0,1 0 0 0 0,-1 0-1 0 0,1 0 1 0 0,-1 0 0 0 0,0 1 0 0 0,1-1-1 0 0,-1 1 1 0 0,0-1 0 0 0,0 1-1 0 0,0 0 1 0 0,-5-3 0 0 0,1 2-13 0 0,0 1 0 0 0,0-1 0 0 0,0 1 0 0 0,0 0 1 0 0,0 0-1 0 0,0 1 0 0 0,-1-1 0 0 0,1 2 0 0 0,0-1 0 0 0,0 1 0 0 0,0-1 1 0 0,-8 4-1 0 0,-1-1-21 0 0,1 2 1 0 0,1 0 0 0 0,-1 0-1 0 0,1 2 1 0 0,0-1-1 0 0,0 2 1 0 0,1 0 0 0 0,-16 12-1 0 0,21-14 9 0 0,0 0 0 0 0,0 1 0 0 0,0-1 1 0 0,0 2-1 0 0,1-1 0 0 0,1 1 0 0 0,-1 0 0 0 0,1 0 0 0 0,0 0 0 0 0,1 1 0 0 0,0-1 0 0 0,1 1 0 0 0,-4 13 0 0 0,6-18 12 0 0,1-1-1 0 0,0 0 0 0 0,1 1 1 0 0,-1-1-1 0 0,1 1 1 0 0,-1-1-1 0 0,1 0 0 0 0,0 1 1 0 0,0-1-1 0 0,0 0 0 0 0,1 0 1 0 0,-1 0-1 0 0,1 0 0 0 0,0 0 1 0 0,0 0-1 0 0,0 0 1 0 0,0-1-1 0 0,0 1 0 0 0,1-1 1 0 0,-1 1-1 0 0,1-1 0 0 0,-1 0 1 0 0,1 0-1 0 0,0 0 0 0 0,0 0 1 0 0,5 2-1 0 0,9 5 35 0 0,1 0-1 0 0,0-1 0 0 0,22 7 1 0 0,-35-13-35 0 0,19 6-167 0 0,1 0 0 0 0,1-2 0 0 0,-1 0 0 0 0,1-2-1 0 0,0-1 1 0 0,0-1 0 0 0,0-1 0 0 0,1-1-1 0 0,25-4 1 0 0,-4-3-295 0 0</inkml:trace>
+</inkml:ink>
+</file>
+
+<file path=ppt/ink/ink25.xml><?xml version="1.0" encoding="utf-8"?>
+<inkml:ink xmlns:inkml="http://www.w3.org/2003/InkML">
+  <inkml:definitions>
+    <inkml:context xml:id="ctx0">
+      <inkml:inkSource xml:id="inkSrc0">
+        <inkml:traceFormat>
+          <inkml:channel name="X" type="integer" min="-2.14748E9" max="2.14748E9" units="cm"/>
+          <inkml:channel name="Y" type="integer" min="-2.14748E9" max="2.14748E9" units="cm"/>
+          <inkml:channel name="F" type="integer" max="32767" units="dev"/>
+          <inkml:channel name="OA" type="integer" max="360" units="deg"/>
+          <inkml:channel name="OE" type="integer" max="90" units="deg"/>
+        </inkml:traceFormat>
+        <inkml:channelProperties>
+          <inkml:channelProperty channel="X" name="resolution" value="1000" units="1/cm"/>
+          <inkml:channelProperty channel="Y" name="resolution" value="1000" units="1/cm"/>
+          <inkml:channelProperty channel="F" name="resolution" value="0" units="1/dev"/>
+          <inkml:channelProperty channel="OA" name="resolution" value="1000" units="1/deg"/>
+          <inkml:channelProperty channel="OE" name="resolution" value="1000" units="1/deg"/>
+        </inkml:channelProperties>
+      </inkml:inkSource>
+      <inkml:timestamp xml:id="ts0" timeString="2026-03-20T17:28:58.219"/>
+    </inkml:context>
+    <inkml:brush xml:id="br0">
+      <inkml:brushProperty name="width" value="0.2" units="cm"/>
+      <inkml:brushProperty name="height" value="0.2" units="cm"/>
+      <inkml:brushProperty name="color" value="#FFC114"/>
+    </inkml:brush>
+  </inkml:definitions>
+  <inkml:trace contextRef="#ctx0" brushRef="#br0">363 34 3116 0 0,'-30'-13'162'0'0,"18"8"-146"0"0,-1 1 0 0 0,0 1 0 0 0,0 0 0 0 0,-1 0 0 0 0,1 2 0 0 0,0 0 1 0 0,-1 0-1 0 0,1 1 0 0 0,0 1 0 0 0,-1 0 0 0 0,1 1 0 0 0,0 0 0 0 0,0 1 0 0 0,0 0 0 0 0,0 1 0 0 0,1 1 0 0 0,-1 0 0 0 0,1 1 0 0 0,0 0 0 0 0,1 1 0 0 0,-21 15 0 0 0,30-21-14 0 0,0 1 1 0 0,0-1-1 0 0,-1 1 0 0 0,1 0 0 0 0,0 0 1 0 0,1 0-1 0 0,-1 0 0 0 0,0 0 1 0 0,0 0-1 0 0,1 0 0 0 0,-1 1 0 0 0,1-1 1 0 0,0 1-1 0 0,0-1 0 0 0,0 1 0 0 0,0-1 1 0 0,0 1-1 0 0,1 0 0 0 0,-1 3 1 0 0,1-4 4 0 0,1 0 0 0 0,0 1 0 0 0,-1-1 0 0 0,1 0 0 0 0,1 1 0 0 0,-1-1 0 0 0,0 0 0 0 0,0 0 0 0 0,1 0 0 0 0,-1 0 0 0 0,1 0 0 0 0,-1-1 0 0 0,1 1 0 0 0,0 0 0 0 0,0-1 0 0 0,0 1 0 0 0,0-1 0 0 0,0 1 0 0 0,0-1 0 0 0,0 0 0 0 0,5 2 0 0 0,6 3 14 0 0,0 0-1 0 0,0-1 1 0 0,1-1-1 0 0,0 0 1 0 0,0 0-1 0 0,0-2 1 0 0,0 0-1 0 0,0 0 1 0 0,0-1-1 0 0,19-2 1 0 0,-27 1-10 0 0,0 0 0 0 0,0-1 0 0 0,0 0 0 0 0,0 0 0 0 0,0 0 0 0 0,-1-1 0 0 0,1 0 0 0 0,0 0 1 0 0,-1-1-1 0 0,1 1 0 0 0,-1-1 0 0 0,0 0 0 0 0,0-1 0 0 0,0 1 0 0 0,0-1 0 0 0,0 0 0 0 0,-1 0 0 0 0,0-1 0 0 0,0 1 0 0 0,0-1 0 0 0,0 0 0 0 0,-1 0 0 0 0,0 0 1 0 0,0 0-1 0 0,0-1 0 0 0,2-7 0 0 0,24-74 1190 0 0,-28 85-1196 0 0,-2 7-151 0 0,-2 15 137 0 0,1 0-1 0 0,1 0 1 0 0,1 0-1 0 0,1 0 1 0 0,1 0-1 0 0,0 0 1 0 0,1 0-1 0 0,2-1 1 0 0,8 27-1 0 0,11 18 49 0 0,45 86-1 0 0,-39-88-21 0 0,-25-53-8 0 0,-1 1-1 0 0,0-1 1 0 0,-1 1-1 0 0,0 0 1 0 0,-1 0-1 0 0,0 0 0 0 0,0 0 1 0 0,-1 1-1 0 0,0-1 1 0 0,-1 0-1 0 0,0 1 1 0 0,-2 11-1 0 0,1-15 2 0 0,-1-1 0 0 0,0 1-1 0 0,0-1 1 0 0,-1 1-1 0 0,0-1 1 0 0,0 0 0 0 0,0 0-1 0 0,-1-1 1 0 0,0 1-1 0 0,0-1 1 0 0,0 0-1 0 0,-1 0 1 0 0,1 0 0 0 0,-1 0-1 0 0,-1-1 1 0 0,1 0-1 0 0,0 0 1 0 0,-1 0 0 0 0,-8 3-1 0 0,-3 2 13 0 0,-1-1 0 0 0,1-1 0 0 0,-2-1-1 0 0,1-1 1 0 0,0 0 0 0 0,-1-1 0 0 0,-19 1-1 0 0,27-4 56 0 0,1 0-1 0 0,-1-1 0 0 0,1 0 0 0 0,0 0 0 0 0,-1-1 0 0 0,1-1 0 0 0,0 0 0 0 0,0 0 1 0 0,0-1-1 0 0,0 0 0 0 0,0-1 0 0 0,1 0 0 0 0,-1-1 0 0 0,-12-8 0 0 0,19 11-47 0 0,1 0-1 0 0,-1 0 0 0 0,1 0 1 0 0,0 0-1 0 0,0 0 1 0 0,0-1-1 0 0,0 1 0 0 0,0-1 1 0 0,1 0-1 0 0,-1 1 1 0 0,1-1-1 0 0,-1 0 0 0 0,1 0 1 0 0,0 0-1 0 0,0 0 1 0 0,1 0-1 0 0,-1 0 0 0 0,0 0 1 0 0,1-4-1 0 0,0 1-3 0 0,0 1 1 0 0,1-1-1 0 0,0 0 1 0 0,0 1-1 0 0,0-1 0 0 0,1 1 1 0 0,0 0-1 0 0,0-1 0 0 0,5-8 1 0 0,4-4-24 0 0,0 2 0 0 0,1-1 0 0 0,1 2 1 0 0,27-27-1 0 0,-25 29-110 0 0,2 1-1 0 0,0 0 1 0 0,1 1-1 0 0,-1 1 1 0 0,2 1-1 0 0,24-9 1 0 0,28-15-2705 0 0</inkml:trace>
+</inkml:ink>
+</file>
+
+<file path=ppt/ink/ink26.xml><?xml version="1.0" encoding="utf-8"?>
+<inkml:ink xmlns:inkml="http://www.w3.org/2003/InkML">
+  <inkml:definitions>
+    <inkml:context xml:id="ctx0">
+      <inkml:inkSource xml:id="inkSrc0">
+        <inkml:traceFormat>
+          <inkml:channel name="X" type="integer" min="-2.14748E9" max="2.14748E9" units="cm"/>
+          <inkml:channel name="Y" type="integer" min="-2.14748E9" max="2.14748E9" units="cm"/>
+          <inkml:channel name="F" type="integer" max="32767" units="dev"/>
+          <inkml:channel name="OA" type="integer" max="360" units="deg"/>
+          <inkml:channel name="OE" type="integer" max="90" units="deg"/>
+        </inkml:traceFormat>
+        <inkml:channelProperties>
+          <inkml:channelProperty channel="X" name="resolution" value="1000" units="1/cm"/>
+          <inkml:channelProperty channel="Y" name="resolution" value="1000" units="1/cm"/>
+          <inkml:channelProperty channel="F" name="resolution" value="0" units="1/dev"/>
+          <inkml:channelProperty channel="OA" name="resolution" value="1000" units="1/deg"/>
+          <inkml:channelProperty channel="OE" name="resolution" value="1000" units="1/deg"/>
+        </inkml:channelProperties>
+      </inkml:inkSource>
+      <inkml:timestamp xml:id="ts0" timeString="2026-03-20T17:28:58.591"/>
+    </inkml:context>
+    <inkml:brush xml:id="br0">
+      <inkml:brushProperty name="width" value="0.2" units="cm"/>
+      <inkml:brushProperty name="height" value="0.2" units="cm"/>
+      <inkml:brushProperty name="color" value="#FFC114"/>
+    </inkml:brush>
+  </inkml:definitions>
+  <inkml:trace contextRef="#ctx0" brushRef="#br0">23 26 4056 0 0,'-4'-16'654'0'0,"-2"7"1181"0"0,3 17-1823 0 0,0-1 0 0 0,1 1 1 0 0,1 0-1 0 0,-1 0 0 0 0,1 1 0 0 0,1-1 0 0 0,-1 0 0 0 0,1 0 0 0 0,1 0 0 0 0,0 0 0 0 0,0 0 0 0 0,0 0 0 0 0,1 0 0 0 0,0 0 0 0 0,1 0 1 0 0,3 7-1 0 0,-4-10-84 0 0,1 0 1 0 0,0 0-1 0 0,0 0 0 0 0,0-1 1 0 0,1 1-1 0 0,0-1 1 0 0,0 0-1 0 0,0 0 1 0 0,0-1-1 0 0,1 1 1 0 0,-1-1-1 0 0,1 0 1 0 0,0 0-1 0 0,0 0 0 0 0,0-1 1 0 0,0 0-1 0 0,0 0 1 0 0,1 0-1 0 0,-1 0 1 0 0,1-1-1 0 0,-1 0 1 0 0,1 0-1 0 0,0-1 1 0 0,-1 1-1 0 0,7-2 0 0 0,10 0-1456 0 0,5-2 22 0 0</inkml:trace>
+</inkml:ink>
+</file>
+
+<file path=ppt/ink/ink27.xml><?xml version="1.0" encoding="utf-8"?>
+<inkml:ink xmlns:inkml="http://www.w3.org/2003/InkML">
+  <inkml:definitions>
+    <inkml:context xml:id="ctx0">
+      <inkml:inkSource xml:id="inkSrc0">
+        <inkml:traceFormat>
+          <inkml:channel name="X" type="integer" min="-2.14748E9" max="2.14748E9" units="cm"/>
+          <inkml:channel name="Y" type="integer" min="-2.14748E9" max="2.14748E9" units="cm"/>
+          <inkml:channel name="F" type="integer" max="32767" units="dev"/>
+          <inkml:channel name="OA" type="integer" max="360" units="deg"/>
+          <inkml:channel name="OE" type="integer" max="90" units="deg"/>
+        </inkml:traceFormat>
+        <inkml:channelProperties>
+          <inkml:channelProperty channel="X" name="resolution" value="1000" units="1/cm"/>
+          <inkml:channelProperty channel="Y" name="resolution" value="1000" units="1/cm"/>
+          <inkml:channelProperty channel="F" name="resolution" value="0" units="1/dev"/>
+          <inkml:channelProperty channel="OA" name="resolution" value="1000" units="1/deg"/>
+          <inkml:channelProperty channel="OE" name="resolution" value="1000" units="1/deg"/>
+        </inkml:channelProperties>
+      </inkml:inkSource>
+      <inkml:timestamp xml:id="ts0" timeString="2026-03-20T17:28:58.778"/>
+    </inkml:context>
+    <inkml:brush xml:id="br0">
+      <inkml:brushProperty name="width" value="0.2" units="cm"/>
+      <inkml:brushProperty name="height" value="0.2" units="cm"/>
+      <inkml:brushProperty name="color" value="#FFC114"/>
+    </inkml:brush>
+  </inkml:definitions>
+  <inkml:trace contextRef="#ctx0" brushRef="#br0">45 23 4756 0 0,'-43'-22'1230'0'0,"42"22"-1509"0"0</inkml:trace>
+</inkml:ink>
+</file>
+
+<file path=ppt/ink/ink28.xml><?xml version="1.0" encoding="utf-8"?>
+<inkml:ink xmlns:inkml="http://www.w3.org/2003/InkML">
+  <inkml:definitions>
+    <inkml:context xml:id="ctx0">
+      <inkml:inkSource xml:id="inkSrc0">
+        <inkml:traceFormat>
+          <inkml:channel name="X" type="integer" min="-2.14748E9" max="2.14748E9" units="cm"/>
+          <inkml:channel name="Y" type="integer" min="-2.14748E9" max="2.14748E9" units="cm"/>
+          <inkml:channel name="F" type="integer" max="32767" units="dev"/>
+          <inkml:channel name="OA" type="integer" max="360" units="deg"/>
+          <inkml:channel name="OE" type="integer" max="90" units="deg"/>
+        </inkml:traceFormat>
+        <inkml:channelProperties>
+          <inkml:channelProperty channel="X" name="resolution" value="1000" units="1/cm"/>
+          <inkml:channelProperty channel="Y" name="resolution" value="1000" units="1/cm"/>
+          <inkml:channelProperty channel="F" name="resolution" value="0" units="1/dev"/>
+          <inkml:channelProperty channel="OA" name="resolution" value="1000" units="1/deg"/>
+          <inkml:channelProperty channel="OE" name="resolution" value="1000" units="1/deg"/>
+        </inkml:channelProperties>
+      </inkml:inkSource>
+      <inkml:timestamp xml:id="ts0" timeString="2026-03-20T17:28:59.479"/>
+    </inkml:context>
+    <inkml:brush xml:id="br0">
+      <inkml:brushProperty name="width" value="0.2" units="cm"/>
+      <inkml:brushProperty name="height" value="0.2" units="cm"/>
+      <inkml:brushProperty name="color" value="#FFC114"/>
+    </inkml:brush>
+  </inkml:definitions>
+  <inkml:trace contextRef="#ctx0" brushRef="#br0">27 1 3884 0 0,'-24'35'448'0'0,"24"-33"-466"0"0,-3 38-88 0 0,7-18 101 0 0,0 0 0 0 0,2-1 0 0 0,1 0 0 0 0,0 0 0 0 0,14 26 0 0 0,-6-11 40 0 0,-5-9 2005 0 0,-20-43-663 0 0,-16-48-568 0 0,24 53-789 0 0,1 0 0 0 0,0-1 0 0 0,1 1 0 0 0,0-1 0 0 0,1 1 0 0 0,0-1 0 0 0,4-14 0 0 0,-4 21-50 0 0,0 0 0 0 0,1 0 0 0 0,-1 1 0 0 0,1-1 0 0 0,0 1 0 0 0,1-1 0 0 0,-1 1 0 0 0,1 0 0 0 0,0 0 0 0 0,0 0-1 0 0,0 0 1 0 0,0 0 0 0 0,1 1 0 0 0,-1-1 0 0 0,1 1 0 0 0,0 0 0 0 0,0 0 0 0 0,0 1 0 0 0,5-3 0 0 0,-4 3 0 0 0,0 1-1 0 0,0 0 1 0 0,0 0-1 0 0,0 1 1 0 0,-1-1-1 0 0,1 1 1 0 0,0 0 0 0 0,0 1-1 0 0,0-1 1 0 0,0 1-1 0 0,0 0 1 0 0,0 0-1 0 0,0 0 1 0 0,0 1-1 0 0,-1 0 1 0 0,1 0 0 0 0,-1 0-1 0 0,1 0 1 0 0,-1 1-1 0 0,8 5 1 0 0,9 8-55 0 0,-1 0 1 0 0,30 31-1 0 0,-41-38 41 0 0,36 31-43 0 0,-27-25-14 0 0,0 1 0 0 0,-1 1 0 0 0,18 24 0 0 0,-28-35-217 0 0</inkml:trace>
+</inkml:ink>
+</file>
+
+<file path=ppt/ink/ink29.xml><?xml version="1.0" encoding="utf-8"?>
+<inkml:ink xmlns:inkml="http://www.w3.org/2003/InkML">
+  <inkml:definitions>
+    <inkml:context xml:id="ctx0">
+      <inkml:inkSource xml:id="inkSrc0">
+        <inkml:traceFormat>
+          <inkml:channel name="X" type="integer" min="-2.14748E9" max="2.14748E9" units="cm"/>
+          <inkml:channel name="Y" type="integer" min="-2.14748E9" max="2.14748E9" units="cm"/>
+          <inkml:channel name="F" type="integer" max="32767" units="dev"/>
+          <inkml:channel name="OA" type="integer" max="360" units="deg"/>
+          <inkml:channel name="OE" type="integer" max="90" units="deg"/>
+        </inkml:traceFormat>
+        <inkml:channelProperties>
+          <inkml:channelProperty channel="X" name="resolution" value="1000" units="1/cm"/>
+          <inkml:channelProperty channel="Y" name="resolution" value="1000" units="1/cm"/>
+          <inkml:channelProperty channel="F" name="resolution" value="0" units="1/dev"/>
+          <inkml:channelProperty channel="OA" name="resolution" value="1000" units="1/deg"/>
+          <inkml:channelProperty channel="OE" name="resolution" value="1000" units="1/deg"/>
+        </inkml:channelProperties>
+      </inkml:inkSource>
+      <inkml:timestamp xml:id="ts0" timeString="2026-03-20T17:29:00.118"/>
+    </inkml:context>
+    <inkml:brush xml:id="br0">
+      <inkml:brushProperty name="width" value="0.2" units="cm"/>
+      <inkml:brushProperty name="height" value="0.2" units="cm"/>
+      <inkml:brushProperty name="color" value="#FFC114"/>
+    </inkml:brush>
+  </inkml:definitions>
+  <inkml:trace contextRef="#ctx0" brushRef="#br0">29 56 3872 0 0,'0'-1'6'0'0,"-1"1"0"0"0,1-1-1 0 0,0 1 1 0 0,-1-1 0 0 0,1 1-1 0 0,-1-1 1 0 0,1 1 0 0 0,-1-1-1 0 0,1 1 1 0 0,-1-1 0 0 0,1 1-1 0 0,-1 0 1 0 0,1-1 0 0 0,-1 1-1 0 0,1 0 1 0 0,-1 0 0 0 0,1-1-1 0 0,-1 1 1 0 0,0 0 0 0 0,1 0-1 0 0,-1 0 1 0 0,0 0-1 0 0,1 0 1 0 0,-1 0 0 0 0,1 0-1 0 0,-1 0 1 0 0,0 0 0 0 0,1 0-1 0 0,-1 0 1 0 0,0 0 0 0 0,1 0-1 0 0,-1 0 1 0 0,1 1 0 0 0,-1-1-1 0 0,0 0 1 0 0,1 0 0 0 0,-1 1-1 0 0,0 0 1 0 0,0 1-11 0 0,0 0 1 0 0,0-1-1 0 0,1 1 0 0 0,-1 1 1 0 0,0-1-1 0 0,1 0 0 0 0,-1 0 1 0 0,1 0-1 0 0,0 0 0 0 0,0 0 1 0 0,0 4-1 0 0,9 62-137 0 0,18 29 3953 0 0,-33-109-3659 0 0,0 0 0 0 0,1 0 0 0 0,-5-22-1 0 0,7 21-126 0 0,2 0-1 0 0,-1 0 0 0 0,2 0 0 0 0,-1 0 1 0 0,3-17-1 0 0,-1 26-55 0 0,0 1-1 0 0,0-1 1 0 0,0 0 0 0 0,0 0-1 0 0,0 1 1 0 0,1-1 0 0 0,-1 1-1 0 0,1-1 1 0 0,0 1 0 0 0,0 0-1 0 0,1 0 1 0 0,-1 0 0 0 0,1 0-1 0 0,-1 0 1 0 0,1 0-1 0 0,0 1 1 0 0,0-1 0 0 0,0 1-1 0 0,0 0 1 0 0,1 0 0 0 0,6-3-1 0 0,-4 3 0 0 0,-1 0-1 0 0,1 1 1 0 0,-1 0-1 0 0,1 0 1 0 0,0 0-1 0 0,0 1 0 0 0,-1 0 1 0 0,1 0-1 0 0,0 0 1 0 0,0 1-1 0 0,-1 0 1 0 0,1 0-1 0 0,0 1 1 0 0,-1-1-1 0 0,1 1 0 0 0,-1 0 1 0 0,6 3-1 0 0,9 5-56 0 0,-2 0-1 0 0,1 2 0 0 0,20 15 1 0 0,-23-14 2 0 0,-2 1 0 0 0,21 22 1 0 0,-23-21-6 0 0,2-1 1 0 0,21 17-1 0 0,-33-30 1 0 0,0 1 0 0 0,0-1 1 0 0,-1 0-1 0 0,1 0 0 0 0,-1 1 0 0 0,1-1 1 0 0,-1 1-1 0 0,0-1 0 0 0,1 1 0 0 0,-1-1 0 0 0,0 1 1 0 0,0 0-1 0 0,0 0 0 0 0,0 0 0 0 0,0 0 1 0 0,-1-1-1 0 0,1 1 0 0 0,0 0 0 0 0,-1 0 1 0 0,0 0-1 0 0,1 3 0 0 0</inkml:trace>
+</inkml:ink>
+</file>
+
+<file path=ppt/ink/ink3.xml><?xml version="1.0" encoding="utf-8"?>
+<inkml:ink xmlns:inkml="http://www.w3.org/2003/InkML">
+  <inkml:definitions>
+    <inkml:context xml:id="ctx0">
+      <inkml:inkSource xml:id="inkSrc0">
+        <inkml:traceFormat>
+          <inkml:channel name="X" type="integer" min="-2.14748E9" max="2.14748E9" units="cm"/>
+          <inkml:channel name="Y" type="integer" min="-2.14748E9" max="2.14748E9" units="cm"/>
+          <inkml:channel name="F" type="integer" max="32767" units="dev"/>
+        </inkml:traceFormat>
+        <inkml:channelProperties>
+          <inkml:channelProperty channel="X" name="resolution" value="1000" units="1/cm"/>
+          <inkml:channelProperty channel="Y" name="resolution" value="1000" units="1/cm"/>
+          <inkml:channelProperty channel="F" name="resolution" value="0" units="1/dev"/>
+        </inkml:channelProperties>
+      </inkml:inkSource>
+      <inkml:timestamp xml:id="ts0" timeString="2026-06-12T11:26:14.320"/>
+    </inkml:context>
+    <inkml:brush xml:id="br0">
+      <inkml:brushProperty name="width" value="0.1" units="cm"/>
+      <inkml:brushProperty name="height" value="0.1" units="cm"/>
+      <inkml:brushProperty name="color" value="#5B2D90"/>
+    </inkml:brush>
+  </inkml:definitions>
+  <inkml:trace contextRef="#ctx0" brushRef="#br0">1 1 24575,'1070'0'-1365,"-1048"0"-5461</inkml:trace>
+</inkml:ink>
+</file>
+
+<file path=ppt/ink/ink30.xml><?xml version="1.0" encoding="utf-8"?>
+<inkml:ink xmlns:inkml="http://www.w3.org/2003/InkML">
+  <inkml:definitions>
+    <inkml:context xml:id="ctx0">
+      <inkml:inkSource xml:id="inkSrc0">
+        <inkml:traceFormat>
+          <inkml:channel name="X" type="integer" min="-2.14748E9" max="2.14748E9" units="cm"/>
+          <inkml:channel name="Y" type="integer" min="-2.14748E9" max="2.14748E9" units="cm"/>
+          <inkml:channel name="F" type="integer" max="32767" units="dev"/>
+          <inkml:channel name="OA" type="integer" max="360" units="deg"/>
+          <inkml:channel name="OE" type="integer" max="90" units="deg"/>
+        </inkml:traceFormat>
+        <inkml:channelProperties>
+          <inkml:channelProperty channel="X" name="resolution" value="1000" units="1/cm"/>
+          <inkml:channelProperty channel="Y" name="resolution" value="1000" units="1/cm"/>
+          <inkml:channelProperty channel="F" name="resolution" value="0" units="1/dev"/>
+          <inkml:channelProperty channel="OA" name="resolution" value="1000" units="1/deg"/>
+          <inkml:channelProperty channel="OE" name="resolution" value="1000" units="1/deg"/>
+        </inkml:channelProperties>
+      </inkml:inkSource>
+      <inkml:timestamp xml:id="ts0" timeString="2026-03-20T17:29:00.353"/>
+    </inkml:context>
+    <inkml:brush xml:id="br0">
+      <inkml:brushProperty name="width" value="0.2" units="cm"/>
+      <inkml:brushProperty name="height" value="0.2" units="cm"/>
+      <inkml:brushProperty name="color" value="#FFC114"/>
+    </inkml:brush>
+  </inkml:definitions>
+  <inkml:trace contextRef="#ctx0" brushRef="#br0">1 5 4344 0 0,'0'0'36'0'0,"0"0"-43"0"0,0 0-1 0 0,0-1 0 0 0,0 1 1 0 0,0 0-1 0 0,0 0 0 0 0,0 0 1 0 0,0-1-1 0 0,0 1 0 0 0,0 0 1 0 0,1 0-1 0 0,-1-1 0 0 0,0 1 1 0 0,0 0-1 0 0,0 0 0 0 0,0 0 1 0 0,1 0-1 0 0,-1-1 0 0 0,0 1 1 0 0,0 0-1 0 0,0 0 0 0 0,1 0 1 0 0,-1 0-1 0 0,0 0 0 0 0,0 0 1 0 0,0-1-1 0 0,1 1 0 0 0,-1 0 1 0 0,0 0-1 0 0,0 0 0 0 0,1 0 1 0 0,-1 0-1 0 0,0 0 0 0 0,0 0 0 0 0,1 0 1 0 0,-1 0-1 0 0,0 0 0 0 0,0 0 1 0 0,1 0-1 0 0,-1 0 0 0 0,0 0 1 0 0,0 1-1 0 0,0-1 0 0 0,1 0 1 0 0,-1 0-1 0 0,0 0 0 0 0,0 0 1 0 0,1 0-1 0 0,-1 0 0 0 0,0 1 1 0 0,0-1-1 0 0,51 199-1277 0 0,-43-190-231 0 0</inkml:trace>
+</inkml:ink>
+</file>
+
+<file path=ppt/ink/ink31.xml><?xml version="1.0" encoding="utf-8"?>
+<inkml:ink xmlns:inkml="http://www.w3.org/2003/InkML">
+  <inkml:definitions>
+    <inkml:context xml:id="ctx0">
+      <inkml:inkSource xml:id="inkSrc0">
+        <inkml:traceFormat>
+          <inkml:channel name="X" type="integer" min="-2.14748E9" max="2.14748E9" units="cm"/>
+          <inkml:channel name="Y" type="integer" min="-2.14748E9" max="2.14748E9" units="cm"/>
+          <inkml:channel name="F" type="integer" max="32767" units="dev"/>
+          <inkml:channel name="OA" type="integer" max="360" units="deg"/>
+          <inkml:channel name="OE" type="integer" max="90" units="deg"/>
+        </inkml:traceFormat>
+        <inkml:channelProperties>
+          <inkml:channelProperty channel="X" name="resolution" value="1000" units="1/cm"/>
+          <inkml:channelProperty channel="Y" name="resolution" value="1000" units="1/cm"/>
+          <inkml:channelProperty channel="F" name="resolution" value="0" units="1/dev"/>
+          <inkml:channelProperty channel="OA" name="resolution" value="1000" units="1/deg"/>
+          <inkml:channelProperty channel="OE" name="resolution" value="1000" units="1/deg"/>
+        </inkml:channelProperties>
+      </inkml:inkSource>
+      <inkml:timestamp xml:id="ts0" timeString="2026-03-20T17:29:00.526"/>
+    </inkml:context>
+    <inkml:brush xml:id="br0">
+      <inkml:brushProperty name="width" value="0.2" units="cm"/>
+      <inkml:brushProperty name="height" value="0.2" units="cm"/>
+      <inkml:brushProperty name="color" value="#FFC114"/>
+    </inkml:brush>
+  </inkml:definitions>
+  <inkml:trace contextRef="#ctx0" brushRef="#br0">25 35 3148 0 0,'-8'-10'764'0'0,"5"3"336"0"0,-5-1-31 0 0,2-2-1305 0 0</inkml:trace>
+</inkml:ink>
+</file>
+
+<file path=ppt/ink/ink32.xml><?xml version="1.0" encoding="utf-8"?>
+<inkml:ink xmlns:inkml="http://www.w3.org/2003/InkML">
+  <inkml:definitions>
+    <inkml:context xml:id="ctx0">
+      <inkml:inkSource xml:id="inkSrc0">
+        <inkml:traceFormat>
+          <inkml:channel name="X" type="integer" min="-2.14748E9" max="2.14748E9" units="cm"/>
+          <inkml:channel name="Y" type="integer" min="-2.14748E9" max="2.14748E9" units="cm"/>
+          <inkml:channel name="F" type="integer" max="32767" units="dev"/>
+          <inkml:channel name="OA" type="integer" max="360" units="deg"/>
+          <inkml:channel name="OE" type="integer" max="90" units="deg"/>
+        </inkml:traceFormat>
+        <inkml:channelProperties>
+          <inkml:channelProperty channel="X" name="resolution" value="1000" units="1/cm"/>
+          <inkml:channelProperty channel="Y" name="resolution" value="1000" units="1/cm"/>
+          <inkml:channelProperty channel="F" name="resolution" value="0" units="1/dev"/>
+          <inkml:channelProperty channel="OA" name="resolution" value="1000" units="1/deg"/>
+          <inkml:channelProperty channel="OE" name="resolution" value="1000" units="1/deg"/>
+        </inkml:channelProperties>
+      </inkml:inkSource>
+      <inkml:timestamp xml:id="ts0" timeString="2026-03-20T17:29:01.201"/>
+    </inkml:context>
+    <inkml:brush xml:id="br0">
+      <inkml:brushProperty name="width" value="0.2" units="cm"/>
+      <inkml:brushProperty name="height" value="0.2" units="cm"/>
+      <inkml:brushProperty name="color" value="#FFC114"/>
+    </inkml:brush>
+  </inkml:definitions>
+  <inkml:trace contextRef="#ctx0" brushRef="#br0">42 1 3992 0 0,'-3'5'-193'0'0,"0"0"1"0"0,0 0-1 0 0,1 1 0 0 0,0-1 0 0 0,0 1 0 0 0,0-1 0 0 0,1 1 0 0 0,0 0 0 0 0,-1 11 0 0 0,0 59 277 0 0,3-48-215 0 0,1 48 5364 0 0,-12-92-4835 0 0,7 10-322 0 0,1-1 0 0 0,0 0 1 0 0,1 1-1 0 0,-1-1 0 0 0,1 0 1 0 0,1 0-1 0 0,-1 0 0 0 0,1 0 0 0 0,1 0 1 0 0,-1 0-1 0 0,1 0 0 0 0,0 0 1 0 0,0 1-1 0 0,1-1 0 0 0,0 0 1 0 0,1 1-1 0 0,-1-1 0 0 0,1 1 1 0 0,0 0-1 0 0,1 0 0 0 0,4-8 1 0 0,-4 11-95 0 0,-1-1 0 0 0,1 1 1 0 0,0-1-1 0 0,0 1 0 0 0,0 0 1 0 0,1 0-1 0 0,-1 1 1 0 0,1 0-1 0 0,-1-1 0 0 0,1 1 1 0 0,0 1-1 0 0,0-1 1 0 0,0 1-1 0 0,0 0 0 0 0,0 0 1 0 0,0 0-1 0 0,7 0 0 0 0,-5 2-14 0 0,0 0 0 0 0,0 0-1 0 0,0 1 1 0 0,0-1 0 0 0,0 2-1 0 0,-1-1 1 0 0,1 1 0 0 0,-1 0 0 0 0,1 0-1 0 0,-1 0 1 0 0,7 6 0 0 0,4 5-47 0 0,0 0 1 0 0,-1 1 0 0 0,0 1 0 0 0,-1 1 0 0 0,-1 0 0 0 0,23 36-1 0 0,-25-35 4 0 0,-9-15 15 0 0,0 0 0 0 0,-1 0-1 0 0,0 0 1 0 0,1 0 0 0 0,-1 1 0 0 0,-1-1 0 0 0,1 0 0 0 0,0 1 0 0 0,-1 0 0 0 0,1-1 0 0 0,-1 1-1 0 0,0 0 1 0 0,-1-1 0 0 0,1 1 0 0 0,0 7 0 0 0,-2-9-279 0 0</inkml:trace>
+</inkml:ink>
+</file>
+
+<file path=ppt/ink/ink33.xml><?xml version="1.0" encoding="utf-8"?>
+<inkml:ink xmlns:inkml="http://www.w3.org/2003/InkML">
+  <inkml:definitions>
+    <inkml:context xml:id="ctx0">
+      <inkml:inkSource xml:id="inkSrc0">
+        <inkml:traceFormat>
+          <inkml:channel name="X" type="integer" min="-2.14748E9" max="2.14748E9" units="cm"/>
+          <inkml:channel name="Y" type="integer" min="-2.14748E9" max="2.14748E9" units="cm"/>
+          <inkml:channel name="F" type="integer" max="32767" units="dev"/>
+          <inkml:channel name="OA" type="integer" max="360" units="deg"/>
+          <inkml:channel name="OE" type="integer" max="90" units="deg"/>
+        </inkml:traceFormat>
+        <inkml:channelProperties>
+          <inkml:channelProperty channel="X" name="resolution" value="1000" units="1/cm"/>
+          <inkml:channelProperty channel="Y" name="resolution" value="1000" units="1/cm"/>
+          <inkml:channelProperty channel="F" name="resolution" value="0" units="1/dev"/>
+          <inkml:channelProperty channel="OA" name="resolution" value="1000" units="1/deg"/>
+          <inkml:channelProperty channel="OE" name="resolution" value="1000" units="1/deg"/>
+        </inkml:channelProperties>
+      </inkml:inkSource>
+      <inkml:timestamp xml:id="ts0" timeString="2026-03-20T17:29:02.082"/>
+    </inkml:context>
+    <inkml:brush xml:id="br0">
+      <inkml:brushProperty name="width" value="0.2" units="cm"/>
+      <inkml:brushProperty name="height" value="0.2" units="cm"/>
+      <inkml:brushProperty name="color" value="#FFC114"/>
+    </inkml:brush>
+  </inkml:definitions>
+  <inkml:trace contextRef="#ctx0" brushRef="#br0">222 37 4668 0 0,'1'0'-3'0'0,"-1"0"-1"0"0,1-1 1 0 0,-1 1-1 0 0,1-1 0 0 0,-1 1 1 0 0,0-1-1 0 0,1 1 1 0 0,-1-1-1 0 0,0 1 0 0 0,1-1 1 0 0,-1 1-1 0 0,0-1 1 0 0,1 1-1 0 0,-1-1 0 0 0,0 0 1 0 0,0 1-1 0 0,0-1 1 0 0,0 0-1 0 0,0 1 0 0 0,0-1 1 0 0,0 1-1 0 0,0-1 0 0 0,0 0 1 0 0,0 1-1 0 0,0-1 1 0 0,0 0-1 0 0,0 1 0 0 0,0-1 1 0 0,0 1-1 0 0,-1-1 1 0 0,1 0-1 0 0,0 1 0 0 0,0-1 1 0 0,-1 1-1 0 0,1-1 1 0 0,0 1-1 0 0,-1-1 0 0 0,1 1 1 0 0,-1-1-1 0 0,0 0 1 0 0,-1-1 6 0 0,0 1 1 0 0,1 0 0 0 0,-1-1-1 0 0,0 1 1 0 0,0 0 0 0 0,0 0-1 0 0,0 0 1 0 0,0 0 0 0 0,-1 0-1 0 0,-3 0 1 0 0,4 0-26 0 0,-2 2-3 0 0,-1-1 16 0 0,1 0 1 0 0,0 0 0 0 0,0 0 0 0 0,0 1 0 0 0,0-1-1 0 0,-1 1 1 0 0,1 0 0 0 0,0 1 0 0 0,0-1-1 0 0,1 1 1 0 0,-1 0 0 0 0,0 0 0 0 0,0 0-1 0 0,1 0 1 0 0,0 0 0 0 0,-1 1 0 0 0,1 0-1 0 0,0-1 1 0 0,0 1 0 0 0,0 0 0 0 0,0 1-1 0 0,1-1 1 0 0,0 0 0 0 0,-1 1 0 0 0,1 0-1 0 0,-2 3 1 0 0,4-5 15 0 0,0 0 0 0 0,0 0 1 0 0,0 0-1 0 0,0-1 0 0 0,0 1 0 0 0,1 0 0 0 0,-1 0 0 0 0,0-1 1 0 0,1 1-1 0 0,-1 0 0 0 0,1 0 0 0 0,0-1 0 0 0,0 1 0 0 0,-1-1 1 0 0,1 1-1 0 0,0 0 0 0 0,0-1 0 0 0,1 0 0 0 0,-1 1 0 0 0,0-1 1 0 0,0 0-1 0 0,3 3 0 0 0,31 22 55 0 0,-31-24-64 0 0,0 1-1 0 0,0-1 1 0 0,0 0-1 0 0,1 0 1 0 0,-1-1-1 0 0,1 1 1 0 0,-1-1-1 0 0,1 0 1 0 0,-1 0-1 0 0,1-1 1 0 0,0 1-1 0 0,-1-1 1 0 0,1 0-1 0 0,0-1 0 0 0,-1 1 1 0 0,1-1-1 0 0,0 1 1 0 0,-1-1-1 0 0,1-1 1 0 0,-1 1-1 0 0,1-1 1 0 0,-1 0-1 0 0,0 0 1 0 0,0 0-1 0 0,0 0 1 0 0,0-1-1 0 0,0 1 1 0 0,0-1-1 0 0,-1 0 1 0 0,1 0-1 0 0,-1-1 0 0 0,0 1 1 0 0,0-1-1 0 0,0 1 1 0 0,0-1-1 0 0,-1 0 1 0 0,1 0-1 0 0,2-7 1 0 0,0 1 469 0 0,17-26 1222 0 0,-21 36-1684 0 0,-1 0-1 0 0,0 0 0 0 0,0 0 0 0 0,0 0 0 0 0,0 0 0 0 0,0 0 0 0 0,0 0 0 0 0,0 0 0 0 0,1 0 0 0 0,-1 0 1 0 0,0 0-1 0 0,0 0 0 0 0,0 0 0 0 0,0 0 0 0 0,0 0 0 0 0,0 0 0 0 0,0 0 0 0 0,1 0 0 0 0,-1 0 1 0 0,0 0-1 0 0,0 0 0 0 0,0 0 0 0 0,0 0 0 0 0,0 0 0 0 0,0 0 0 0 0,1 0 0 0 0,-1 0 0 0 0,0 0 1 0 0,0 0-1 0 0,0 1 0 0 0,0-1 0 0 0,0 0 0 0 0,0 0 0 0 0,0 0 0 0 0,0 0 0 0 0,0 0 0 0 0,0 0 1 0 0,1 0-1 0 0,-1 0 0 0 0,0 0 0 0 0,0 1 0 0 0,0-1 0 0 0,0 0 0 0 0,0 0 0 0 0,0 0 0 0 0,0 0 0 0 0,0 0 1 0 0,0 0-1 0 0,0 1 0 0 0,0-1 0 0 0,0 0 0 0 0,0 0 0 0 0,0 0 0 0 0,0 0 0 0 0,0 0 0 0 0,0 0 1 0 0,0 1-1 0 0,0-1 0 0 0,0 0 0 0 0,0 0 0 0 0,0 0 0 0 0,0 0 0 0 0,-1 0 0 0 0,1 0 0 0 0,0 0 1 0 0,0 1-1 0 0,-3 26-163 0 0,-2 2 146 0 0,2-1 0 0 0,1 1 0 0 0,2 0 0 0 0,5 52 0 0 0,29 108 30 0 0,-18-118-42 0 0,6 82 0 0 0,-21-140 16 0 0,0 1 0 0 0,-1-1 0 0 0,-1 1 1 0 0,0 0-1 0 0,-1-1 0 0 0,-1 0 0 0 0,0 1 1 0 0,0-1-1 0 0,-2 0 0 0 0,1 0 0 0 0,-8 12 0 0 0,7-16 12 0 0,0 0 0 0 0,-1-1-1 0 0,0 0 1 0 0,0 0 0 0 0,-1 0-1 0 0,0-1 1 0 0,-1 0-1 0 0,1-1 1 0 0,-1 1 0 0 0,-1-1-1 0 0,1-1 1 0 0,-1 0-1 0 0,0 0 1 0 0,0-1 0 0 0,-13 5-1 0 0,4-3 21 0 0,0-1 0 0 0,0 0-1 0 0,-1-1 1 0 0,-27 1 0 0 0,40-4 2 0 0,1-1 1 0 0,0 1-1 0 0,0-1 0 0 0,0-1 0 0 0,0 1 1 0 0,-1-1-1 0 0,1 0 0 0 0,0 0 1 0 0,0 0-1 0 0,0-1 0 0 0,1 0 1 0 0,-1 0-1 0 0,0 0 0 0 0,0 0 1 0 0,1-1-1 0 0,0 0 0 0 0,-1 0 1 0 0,1 0-1 0 0,0 0 0 0 0,1-1 1 0 0,-5-4-1 0 0,6 5-12 0 0,1-1 0 0 0,-1 0 1 0 0,1 0-1 0 0,-1 1 0 0 0,1-1 0 0 0,0 0 0 0 0,1 0 1 0 0,-1 0-1 0 0,1 0 0 0 0,0 0 0 0 0,-1 0 0 0 0,2 0 1 0 0,-1 0-1 0 0,0 0 0 0 0,1 0 0 0 0,0 0 0 0 0,0 0 1 0 0,0 0-1 0 0,1 0 0 0 0,-1 0 0 0 0,1 1 0 0 0,0-1 1 0 0,0 0-1 0 0,0 1 0 0 0,4-6 0 0 0,3-3-14 0 0,0-1-1 0 0,1 1 1 0 0,1 1 0 0 0,0 0-1 0 0,17-14 1 0 0,-12 12-133 0 0,1 1 0 0 0,1 0 0 0 0,0 1 0 0 0,1 1 1 0 0,0 1-1 0 0,0 1 0 0 0,1 0 0 0 0,0 2 0 0 0,1 0 1 0 0,-1 1-1 0 0,1 1 0 0 0,24-1 0 0 0,-42 5-357 0 0,13 2-1688 0 0</inkml:trace>
+</inkml:ink>
+</file>
+
+<file path=ppt/ink/ink4.xml><?xml version="1.0" encoding="utf-8"?>
+<inkml:ink xmlns:inkml="http://www.w3.org/2003/InkML">
+  <inkml:definitions>
+    <inkml:context xml:id="ctx0">
+      <inkml:inkSource xml:id="inkSrc0">
+        <inkml:traceFormat>
+          <inkml:channel name="X" type="integer" min="-2.14748E9" max="2.14748E9" units="cm"/>
+          <inkml:channel name="Y" type="integer" min="-2.14748E9" max="2.14748E9" units="cm"/>
+          <inkml:channel name="F" type="integer" max="32767" units="dev"/>
+        </inkml:traceFormat>
+        <inkml:channelProperties>
+          <inkml:channelProperty channel="X" name="resolution" value="1000" units="1/cm"/>
+          <inkml:channelProperty channel="Y" name="resolution" value="1000" units="1/cm"/>
+          <inkml:channelProperty channel="F" name="resolution" value="0" units="1/dev"/>
+        </inkml:channelProperties>
+      </inkml:inkSource>
+      <inkml:timestamp xml:id="ts0" timeString="2026-06-12T11:26:17.121"/>
+    </inkml:context>
+    <inkml:brush xml:id="br0">
+      <inkml:brushProperty name="width" value="0.1" units="cm"/>
+      <inkml:brushProperty name="height" value="0.1" units="cm"/>
+      <inkml:brushProperty name="color" value="#5B2D90"/>
+    </inkml:brush>
+  </inkml:definitions>
+  <inkml:trace contextRef="#ctx0" brushRef="#br0">0 0 24575,'3545'0'-1365,"-3515"0"-5461</inkml:trace>
+</inkml:ink>
+</file>
+
+<file path=ppt/ink/ink5.xml><?xml version="1.0" encoding="utf-8"?>
+<inkml:ink xmlns:inkml="http://www.w3.org/2003/InkML">
+  <inkml:definitions>
+    <inkml:context xml:id="ctx0">
+      <inkml:inkSource xml:id="inkSrc0">
+        <inkml:traceFormat>
+          <inkml:channel name="X" type="integer" min="-2.14748E9" max="2.14748E9" units="cm"/>
+          <inkml:channel name="Y" type="integer" min="-2.14748E9" max="2.14748E9" units="cm"/>
+          <inkml:channel name="F" type="integer" max="32767" units="dev"/>
+          <inkml:channel name="OA" type="integer" max="360" units="deg"/>
+          <inkml:channel name="OE" type="integer" max="90" units="deg"/>
+        </inkml:traceFormat>
+        <inkml:channelProperties>
+          <inkml:channelProperty channel="X" name="resolution" value="1000" units="1/cm"/>
+          <inkml:channelProperty channel="Y" name="resolution" value="1000" units="1/cm"/>
+          <inkml:channelProperty channel="F" name="resolution" value="0" units="1/dev"/>
+          <inkml:channelProperty channel="OA" name="resolution" value="1000" units="1/deg"/>
+          <inkml:channelProperty channel="OE" name="resolution" value="1000" units="1/deg"/>
+        </inkml:channelProperties>
+      </inkml:inkSource>
+      <inkml:timestamp xml:id="ts0" timeString="2026-03-20T17:27:50.590"/>
+    </inkml:context>
+    <inkml:brush xml:id="br0">
+      <inkml:brushProperty name="width" value="0.2" units="cm"/>
+      <inkml:brushProperty name="height" value="0.2" units="cm"/>
+      <inkml:brushProperty name="color" value="#FFC114"/>
+    </inkml:brush>
+  </inkml:definitions>
+  <inkml:trace contextRef="#ctx0" brushRef="#br0">375 0 524 0 0,'-20'0'3749'0'0,"11"3"-3722"0"0,7-1 39 0 0,8-1 338 0 0,254 11-412 0 0,-64 0 25 0 0,-191-11-14 0 0,-1 0 4 0 0,1 1-1 0 0,-1-1 1 0 0,1 0-1 0 0,-1-1 1 0 0,1 1-1 0 0,-1-1 1 0 0,1 0-1 0 0,-1 0 1 0 0,1 0-1 0 0,7-2 1 0 0,16 2 156 0 0,-26 0-108 0 0,0 0-73 0 0,0 1 8 0 0,-1 0-1 0 0,1 0 0 0 0,0-1 0 0 0,-1 1 1 0 0,1 0-1 0 0,-1 0 0 0 0,0 0 0 0 0,1 1 1 0 0,-1-1-1 0 0,0 0 0 0 0,0 0 0 0 0,1 1 1 0 0,-1-1-1 0 0,0 1 0 0 0,0-1 1 0 0,-1 1-1 0 0,1-1 0 0 0,0 1 0 0 0,0-1 1 0 0,-1 1-1 0 0,1 0 0 0 0,-1 0 0 0 0,1-1 1 0 0,-1 1-1 0 0,0 0 0 0 0,0 0 0 0 0,0-1 1 0 0,0 1-1 0 0,0 2 0 0 0,2 72-54 0 0,-2-59 66 0 0,19 261-89 0 0,-9-185 32 0 0,-3-43 52 0 0,28 186 44 0 0,-32-198-65 0 0,-3 41-1 0 0,0-37 52 0 0,-7 74-2 0 0,4-90 2 0 0,2 1-1 0 0,0-1 1 0 0,4 32 0 0 0,3 5-57 0 0,-6-60 28 0 0,3 28 39 0 0,-2-23-21 0 0,0 0 0 0 0,0 0 0 0 0,1 0 0 0 0,1-1-1 0 0,5 14 1 0 0,-5-13 4 0 0,0 0-1 0 0,0 0 0 0 0,-1 0 0 0 0,0 1 0 0 0,2 15 0 0 0,15 29-2 0 0,-8-5-78 0 0,-11-46 77 0 0,5 46 38 0 0,-5-47-37 0 0,-4 17 277 0 0,0-9 374 0 0,-18-6-458 0 0,-68-1 77 0 0,87-2-257 0 0,-26-2 33 0 0,-24 0 14 0 0,-54-10 0 0 0,44 4-53 0 0,-70 0 1 0 0,10 5-7 0 0,-80 2-34 0 0,121 3 21 0 0,0-2 3 0 0,79 0-2 0 0,0 0 1 0 0,-10 0-2 0 0,10 0 2 0 0,0 0-8 0 0,-8 2 6 0 0,8-2 22 0 0,-27 2 80 0 0,28-1-66 0 0,1-3-419 0 0,1 0 129 0 0,0-1-1 0 0,0 1 0 0 0,0 0 0 0 0,0 0 0 0 0,0 0 1 0 0,0 0-1 0 0,0 0 0 0 0,1 0 0 0 0,-1 0 0 0 0,1 0 0 0 0,0 0 1 0 0,-1 0-1 0 0,3-3 0 0 0,5-11-854 0 0</inkml:trace>
+</inkml:ink>
+</file>
+
+<file path=ppt/ink/ink6.xml><?xml version="1.0" encoding="utf-8"?>
 <inkml:ink xmlns:inkml="http://www.w3.org/2003/InkML">
   <inkml:definitions>
     <inkml:context xml:id="ctx0">
@@ -706,327 +1266,7 @@
 </inkml:ink>
 </file>
 
-<file path=ppt/ink/ink20.xml><?xml version="1.0" encoding="utf-8"?>
-<inkml:ink xmlns:inkml="http://www.w3.org/2003/InkML">
-  <inkml:definitions>
-    <inkml:context xml:id="ctx0">
-      <inkml:inkSource xml:id="inkSrc0">
-        <inkml:traceFormat>
-          <inkml:channel name="X" type="integer" min="-2.14748E9" max="2.14748E9" units="cm"/>
-          <inkml:channel name="Y" type="integer" min="-2.14748E9" max="2.14748E9" units="cm"/>
-          <inkml:channel name="F" type="integer" max="32767" units="dev"/>
-          <inkml:channel name="OA" type="integer" max="360" units="deg"/>
-          <inkml:channel name="OE" type="integer" max="90" units="deg"/>
-        </inkml:traceFormat>
-        <inkml:channelProperties>
-          <inkml:channelProperty channel="X" name="resolution" value="1000" units="1/cm"/>
-          <inkml:channelProperty channel="Y" name="resolution" value="1000" units="1/cm"/>
-          <inkml:channelProperty channel="F" name="resolution" value="0" units="1/dev"/>
-          <inkml:channelProperty channel="OA" name="resolution" value="1000" units="1/deg"/>
-          <inkml:channelProperty channel="OE" name="resolution" value="1000" units="1/deg"/>
-        </inkml:channelProperties>
-      </inkml:inkSource>
-      <inkml:timestamp xml:id="ts0" timeString="2026-03-20T17:28:57.354"/>
-    </inkml:context>
-    <inkml:brush xml:id="br0">
-      <inkml:brushProperty name="width" value="0.2" units="cm"/>
-      <inkml:brushProperty name="height" value="0.2" units="cm"/>
-      <inkml:brushProperty name="color" value="#FFC114"/>
-    </inkml:brush>
-  </inkml:definitions>
-  <inkml:trace contextRef="#ctx0" brushRef="#br0">151 218 3692 0 0,'0'0'-192'0'0,"-2"3"-283"0"0,2-3 470 0 0,0 0 1 0 0,0 0 0 0 0,0 0 0 0 0,0 1-1 0 0,0-1 1 0 0,0 0 0 0 0,0 0 0 0 0,0 1-1 0 0,0-1 1 0 0,0 0 0 0 0,0 0-1 0 0,0 1 1 0 0,0-1 0 0 0,0 0 0 0 0,0 0-1 0 0,0 0 1 0 0,0 1 0 0 0,0-1 0 0 0,1 0-1 0 0,-1 0 1 0 0,0 0 0 0 0,0 1 0 0 0,0-1-1 0 0,0 0 1 0 0,0 0 0 0 0,1 0 0 0 0,-1 0-1 0 0,0 0 1 0 0,0 1 0 0 0,0-1 0 0 0,1 0-1 0 0,-1 0 1 0 0,0 0 0 0 0,0 0 0 0 0,0 0-1 0 0,1 0 1 0 0,-1 0 0 0 0,0 0 0 0 0,0 0-1 0 0,0 0 1 0 0,1 0 0 0 0,-1 1 0 0 0,0-1-1 0 0,0-1 1 0 0,1 1 0 0 0,-1 0 0 0 0,0 0-1 0 0,0 0 1 0 0,0 0 0 0 0,1 0 0 0 0,-1 0-1 0 0,0 0 1 0 0,0 0 0 0 0,1 0 0 0 0,-1 0-1 0 0,15-4-12 0 0,-1-1 1 0 0,0 0-1 0 0,0-1 0 0 0,0 0 0 0 0,-1-1 0 0 0,15-10 0 0 0,-22 13 52 0 0,-1 1 0 0 0,0-1-1 0 0,0-1 1 0 0,0 1-1 0 0,-1-1 1 0 0,0 0-1 0 0,0 0 1 0 0,0 0-1 0 0,0-1 1 0 0,-1 1 0 0 0,0-1-1 0 0,0 0 1 0 0,0 0-1 0 0,-1 0 1 0 0,0 0-1 0 0,0 0 1 0 0,-1 0-1 0 0,2-7 1 0 0,-3 10-17 0 0,0 1-1 0 0,0-1 1 0 0,1 1 0 0 0,-2-1 0 0 0,1 1-1 0 0,0 0 1 0 0,0-1 0 0 0,-1 1-1 0 0,1-1 1 0 0,-1 1 0 0 0,0 0 0 0 0,0 0-1 0 0,0-1 1 0 0,0 1 0 0 0,0 0 0 0 0,0 0-1 0 0,-1 0 1 0 0,1 0 0 0 0,-1 0-1 0 0,1 0 1 0 0,-1 0 0 0 0,0 1 0 0 0,1-1-1 0 0,-1 1 1 0 0,0-1 0 0 0,0 1-1 0 0,0 0 1 0 0,-5-3 0 0 0,1 2-13 0 0,0 1 0 0 0,0-1 0 0 0,0 1 0 0 0,0 0 1 0 0,0 0-1 0 0,0 1 0 0 0,-1-1 0 0 0,1 2 0 0 0,0-1 0 0 0,0 1 0 0 0,0-1 1 0 0,-8 4-1 0 0,-1-1-21 0 0,1 2 1 0 0,1 0 0 0 0,-1 0-1 0 0,1 2 1 0 0,0-1-1 0 0,0 2 1 0 0,1 0 0 0 0,-16 12-1 0 0,21-14 9 0 0,0 0 0 0 0,0 1 0 0 0,0-1 1 0 0,0 2-1 0 0,1-1 0 0 0,1 1 0 0 0,-1 0 0 0 0,1 0 0 0 0,0 0 0 0 0,1 1 0 0 0,0-1 0 0 0,1 1 0 0 0,-4 13 0 0 0,6-18 12 0 0,1-1-1 0 0,0 0 0 0 0,1 1 1 0 0,-1-1-1 0 0,1 1 1 0 0,-1-1-1 0 0,1 0 0 0 0,0 1 1 0 0,0-1-1 0 0,0 0 0 0 0,1 0 1 0 0,-1 0-1 0 0,1 0 0 0 0,0 0 1 0 0,0 0-1 0 0,0 0 1 0 0,0-1-1 0 0,0 1 0 0 0,1-1 1 0 0,-1 1-1 0 0,1-1 0 0 0,-1 0 1 0 0,1 0-1 0 0,0 0 0 0 0,0 0 1 0 0,5 2-1 0 0,9 5 35 0 0,1 0-1 0 0,0-1 0 0 0,22 7 1 0 0,-35-13-35 0 0,19 6-167 0 0,1 0 0 0 0,1-2 0 0 0,-1 0 0 0 0,1-2-1 0 0,0-1 1 0 0,0-1 0 0 0,0-1 0 0 0,1-1-1 0 0,25-4 1 0 0,-4-3-295 0 0</inkml:trace>
-</inkml:ink>
-</file>
-
-<file path=ppt/ink/ink21.xml><?xml version="1.0" encoding="utf-8"?>
-<inkml:ink xmlns:inkml="http://www.w3.org/2003/InkML">
-  <inkml:definitions>
-    <inkml:context xml:id="ctx0">
-      <inkml:inkSource xml:id="inkSrc0">
-        <inkml:traceFormat>
-          <inkml:channel name="X" type="integer" min="-2.14748E9" max="2.14748E9" units="cm"/>
-          <inkml:channel name="Y" type="integer" min="-2.14748E9" max="2.14748E9" units="cm"/>
-          <inkml:channel name="F" type="integer" max="32767" units="dev"/>
-          <inkml:channel name="OA" type="integer" max="360" units="deg"/>
-          <inkml:channel name="OE" type="integer" max="90" units="deg"/>
-        </inkml:traceFormat>
-        <inkml:channelProperties>
-          <inkml:channelProperty channel="X" name="resolution" value="1000" units="1/cm"/>
-          <inkml:channelProperty channel="Y" name="resolution" value="1000" units="1/cm"/>
-          <inkml:channelProperty channel="F" name="resolution" value="0" units="1/dev"/>
-          <inkml:channelProperty channel="OA" name="resolution" value="1000" units="1/deg"/>
-          <inkml:channelProperty channel="OE" name="resolution" value="1000" units="1/deg"/>
-        </inkml:channelProperties>
-      </inkml:inkSource>
-      <inkml:timestamp xml:id="ts0" timeString="2026-03-20T17:28:58.219"/>
-    </inkml:context>
-    <inkml:brush xml:id="br0">
-      <inkml:brushProperty name="width" value="0.2" units="cm"/>
-      <inkml:brushProperty name="height" value="0.2" units="cm"/>
-      <inkml:brushProperty name="color" value="#FFC114"/>
-    </inkml:brush>
-  </inkml:definitions>
-  <inkml:trace contextRef="#ctx0" brushRef="#br0">363 34 3116 0 0,'-30'-13'162'0'0,"18"8"-146"0"0,-1 1 0 0 0,0 1 0 0 0,0 0 0 0 0,-1 0 0 0 0,1 2 0 0 0,0 0 1 0 0,-1 0-1 0 0,1 1 0 0 0,0 1 0 0 0,-1 0 0 0 0,1 1 0 0 0,0 0 0 0 0,0 1 0 0 0,0 0 0 0 0,0 1 0 0 0,1 1 0 0 0,-1 0 0 0 0,1 1 0 0 0,0 0 0 0 0,1 1 0 0 0,-21 15 0 0 0,30-21-14 0 0,0 1 1 0 0,0-1-1 0 0,-1 1 0 0 0,1 0 0 0 0,0 0 1 0 0,1 0-1 0 0,-1 0 0 0 0,0 0 1 0 0,0 0-1 0 0,1 0 0 0 0,-1 1 0 0 0,1-1 1 0 0,0 1-1 0 0,0-1 0 0 0,0 1 0 0 0,0-1 1 0 0,0 1-1 0 0,1 0 0 0 0,-1 3 1 0 0,1-4 4 0 0,1 0 0 0 0,0 1 0 0 0,-1-1 0 0 0,1 0 0 0 0,1 1 0 0 0,-1-1 0 0 0,0 0 0 0 0,0 0 0 0 0,1 0 0 0 0,-1 0 0 0 0,1 0 0 0 0,-1-1 0 0 0,1 1 0 0 0,0 0 0 0 0,0-1 0 0 0,0 1 0 0 0,0-1 0 0 0,0 1 0 0 0,0-1 0 0 0,0 0 0 0 0,5 2 0 0 0,6 3 14 0 0,0 0-1 0 0,0-1 1 0 0,1-1-1 0 0,0 0 1 0 0,0 0-1 0 0,0-2 1 0 0,0 0-1 0 0,0 0 1 0 0,0-1-1 0 0,19-2 1 0 0,-27 1-10 0 0,0 0 0 0 0,0-1 0 0 0,0 0 0 0 0,0 0 0 0 0,0 0 0 0 0,-1-1 0 0 0,1 0 0 0 0,0 0 1 0 0,-1-1-1 0 0,1 1 0 0 0,-1-1 0 0 0,0 0 0 0 0,0-1 0 0 0,0 1 0 0 0,0-1 0 0 0,0 0 0 0 0,-1 0 0 0 0,0-1 0 0 0,0 1 0 0 0,0-1 0 0 0,0 0 0 0 0,-1 0 0 0 0,0 0 1 0 0,0 0-1 0 0,0-1 0 0 0,2-7 0 0 0,24-74 1190 0 0,-28 85-1196 0 0,-2 7-151 0 0,-2 15 137 0 0,1 0-1 0 0,1 0 1 0 0,1 0-1 0 0,1 0 1 0 0,1 0-1 0 0,0 0 1 0 0,1 0-1 0 0,2-1 1 0 0,8 27-1 0 0,11 18 49 0 0,45 86-1 0 0,-39-88-21 0 0,-25-53-8 0 0,-1 1-1 0 0,0-1 1 0 0,-1 1-1 0 0,0 0 1 0 0,-1 0-1 0 0,0 0 0 0 0,0 0 1 0 0,-1 1-1 0 0,0-1 1 0 0,-1 0-1 0 0,0 1 1 0 0,-2 11-1 0 0,1-15 2 0 0,-1-1 0 0 0,0 1-1 0 0,0-1 1 0 0,-1 1-1 0 0,0-1 1 0 0,0 0 0 0 0,0 0-1 0 0,-1-1 1 0 0,0 1-1 0 0,0-1 1 0 0,0 0-1 0 0,-1 0 1 0 0,1 0 0 0 0,-1 0-1 0 0,-1-1 1 0 0,1 0-1 0 0,0 0 1 0 0,-1 0 0 0 0,-8 3-1 0 0,-3 2 13 0 0,-1-1 0 0 0,1-1 0 0 0,-2-1-1 0 0,1-1 1 0 0,0 0 0 0 0,-1-1 0 0 0,-19 1-1 0 0,27-4 56 0 0,1 0-1 0 0,-1-1 0 0 0,1 0 0 0 0,0 0 0 0 0,-1-1 0 0 0,1-1 0 0 0,0 0 0 0 0,0 0 1 0 0,0-1-1 0 0,0 0 0 0 0,0-1 0 0 0,1 0 0 0 0,-1-1 0 0 0,-12-8 0 0 0,19 11-47 0 0,1 0-1 0 0,-1 0 0 0 0,1 0 1 0 0,0 0-1 0 0,0 0 1 0 0,0-1-1 0 0,0 1 0 0 0,0-1 1 0 0,1 0-1 0 0,-1 1 1 0 0,1-1-1 0 0,-1 0 0 0 0,1 0 1 0 0,0 0-1 0 0,0 0 1 0 0,1 0-1 0 0,-1 0 0 0 0,0 0 1 0 0,1-4-1 0 0,0 1-3 0 0,0 1 1 0 0,1-1-1 0 0,0 0 1 0 0,0 1-1 0 0,0-1 0 0 0,1 1 1 0 0,0 0-1 0 0,0-1 0 0 0,5-8 1 0 0,4-4-24 0 0,0 2 0 0 0,1-1 0 0 0,1 2 1 0 0,27-27-1 0 0,-25 29-110 0 0,2 1-1 0 0,0 0 1 0 0,1 1-1 0 0,-1 1 1 0 0,2 1-1 0 0,24-9 1 0 0,28-15-2705 0 0</inkml:trace>
-</inkml:ink>
-</file>
-
-<file path=ppt/ink/ink22.xml><?xml version="1.0" encoding="utf-8"?>
-<inkml:ink xmlns:inkml="http://www.w3.org/2003/InkML">
-  <inkml:definitions>
-    <inkml:context xml:id="ctx0">
-      <inkml:inkSource xml:id="inkSrc0">
-        <inkml:traceFormat>
-          <inkml:channel name="X" type="integer" min="-2.14748E9" max="2.14748E9" units="cm"/>
-          <inkml:channel name="Y" type="integer" min="-2.14748E9" max="2.14748E9" units="cm"/>
-          <inkml:channel name="F" type="integer" max="32767" units="dev"/>
-          <inkml:channel name="OA" type="integer" max="360" units="deg"/>
-          <inkml:channel name="OE" type="integer" max="90" units="deg"/>
-        </inkml:traceFormat>
-        <inkml:channelProperties>
-          <inkml:channelProperty channel="X" name="resolution" value="1000" units="1/cm"/>
-          <inkml:channelProperty channel="Y" name="resolution" value="1000" units="1/cm"/>
-          <inkml:channelProperty channel="F" name="resolution" value="0" units="1/dev"/>
-          <inkml:channelProperty channel="OA" name="resolution" value="1000" units="1/deg"/>
-          <inkml:channelProperty channel="OE" name="resolution" value="1000" units="1/deg"/>
-        </inkml:channelProperties>
-      </inkml:inkSource>
-      <inkml:timestamp xml:id="ts0" timeString="2026-03-20T17:28:58.591"/>
-    </inkml:context>
-    <inkml:brush xml:id="br0">
-      <inkml:brushProperty name="width" value="0.2" units="cm"/>
-      <inkml:brushProperty name="height" value="0.2" units="cm"/>
-      <inkml:brushProperty name="color" value="#FFC114"/>
-    </inkml:brush>
-  </inkml:definitions>
-  <inkml:trace contextRef="#ctx0" brushRef="#br0">23 26 4056 0 0,'-4'-16'654'0'0,"-2"7"1181"0"0,3 17-1823 0 0,0-1 0 0 0,1 1 1 0 0,1 0-1 0 0,-1 0 0 0 0,1 1 0 0 0,1-1 0 0 0,-1 0 0 0 0,1 0 0 0 0,1 0 0 0 0,0 0 0 0 0,0 0 0 0 0,0 0 0 0 0,1 0 0 0 0,0 0 0 0 0,1 0 1 0 0,3 7-1 0 0,-4-10-84 0 0,1 0 1 0 0,0 0-1 0 0,0 0 0 0 0,0-1 1 0 0,1 1-1 0 0,0-1 1 0 0,0 0-1 0 0,0 0 1 0 0,0-1-1 0 0,1 1 1 0 0,-1-1-1 0 0,1 0 1 0 0,0 0-1 0 0,0 0 0 0 0,0-1 1 0 0,0 0-1 0 0,0 0 1 0 0,1 0-1 0 0,-1 0 1 0 0,1-1-1 0 0,-1 0 1 0 0,1 0-1 0 0,0-1 1 0 0,-1 1-1 0 0,7-2 0 0 0,10 0-1456 0 0,5-2 22 0 0</inkml:trace>
-</inkml:ink>
-</file>
-
-<file path=ppt/ink/ink23.xml><?xml version="1.0" encoding="utf-8"?>
-<inkml:ink xmlns:inkml="http://www.w3.org/2003/InkML">
-  <inkml:definitions>
-    <inkml:context xml:id="ctx0">
-      <inkml:inkSource xml:id="inkSrc0">
-        <inkml:traceFormat>
-          <inkml:channel name="X" type="integer" min="-2.14748E9" max="2.14748E9" units="cm"/>
-          <inkml:channel name="Y" type="integer" min="-2.14748E9" max="2.14748E9" units="cm"/>
-          <inkml:channel name="F" type="integer" max="32767" units="dev"/>
-          <inkml:channel name="OA" type="integer" max="360" units="deg"/>
-          <inkml:channel name="OE" type="integer" max="90" units="deg"/>
-        </inkml:traceFormat>
-        <inkml:channelProperties>
-          <inkml:channelProperty channel="X" name="resolution" value="1000" units="1/cm"/>
-          <inkml:channelProperty channel="Y" name="resolution" value="1000" units="1/cm"/>
-          <inkml:channelProperty channel="F" name="resolution" value="0" units="1/dev"/>
-          <inkml:channelProperty channel="OA" name="resolution" value="1000" units="1/deg"/>
-          <inkml:channelProperty channel="OE" name="resolution" value="1000" units="1/deg"/>
-        </inkml:channelProperties>
-      </inkml:inkSource>
-      <inkml:timestamp xml:id="ts0" timeString="2026-03-20T17:28:58.778"/>
-    </inkml:context>
-    <inkml:brush xml:id="br0">
-      <inkml:brushProperty name="width" value="0.2" units="cm"/>
-      <inkml:brushProperty name="height" value="0.2" units="cm"/>
-      <inkml:brushProperty name="color" value="#FFC114"/>
-    </inkml:brush>
-  </inkml:definitions>
-  <inkml:trace contextRef="#ctx0" brushRef="#br0">45 23 4756 0 0,'-43'-22'1230'0'0,"42"22"-1509"0"0</inkml:trace>
-</inkml:ink>
-</file>
-
-<file path=ppt/ink/ink24.xml><?xml version="1.0" encoding="utf-8"?>
-<inkml:ink xmlns:inkml="http://www.w3.org/2003/InkML">
-  <inkml:definitions>
-    <inkml:context xml:id="ctx0">
-      <inkml:inkSource xml:id="inkSrc0">
-        <inkml:traceFormat>
-          <inkml:channel name="X" type="integer" min="-2.14748E9" max="2.14748E9" units="cm"/>
-          <inkml:channel name="Y" type="integer" min="-2.14748E9" max="2.14748E9" units="cm"/>
-          <inkml:channel name="F" type="integer" max="32767" units="dev"/>
-          <inkml:channel name="OA" type="integer" max="360" units="deg"/>
-          <inkml:channel name="OE" type="integer" max="90" units="deg"/>
-        </inkml:traceFormat>
-        <inkml:channelProperties>
-          <inkml:channelProperty channel="X" name="resolution" value="1000" units="1/cm"/>
-          <inkml:channelProperty channel="Y" name="resolution" value="1000" units="1/cm"/>
-          <inkml:channelProperty channel="F" name="resolution" value="0" units="1/dev"/>
-          <inkml:channelProperty channel="OA" name="resolution" value="1000" units="1/deg"/>
-          <inkml:channelProperty channel="OE" name="resolution" value="1000" units="1/deg"/>
-        </inkml:channelProperties>
-      </inkml:inkSource>
-      <inkml:timestamp xml:id="ts0" timeString="2026-03-20T17:28:59.479"/>
-    </inkml:context>
-    <inkml:brush xml:id="br0">
-      <inkml:brushProperty name="width" value="0.2" units="cm"/>
-      <inkml:brushProperty name="height" value="0.2" units="cm"/>
-      <inkml:brushProperty name="color" value="#FFC114"/>
-    </inkml:brush>
-  </inkml:definitions>
-  <inkml:trace contextRef="#ctx0" brushRef="#br0">27 1 3884 0 0,'-24'35'448'0'0,"24"-33"-466"0"0,-3 38-88 0 0,7-18 101 0 0,0 0 0 0 0,2-1 0 0 0,1 0 0 0 0,0 0 0 0 0,14 26 0 0 0,-6-11 40 0 0,-5-9 2005 0 0,-20-43-663 0 0,-16-48-568 0 0,24 53-789 0 0,1 0 0 0 0,0-1 0 0 0,1 1 0 0 0,0-1 0 0 0,1 1 0 0 0,0-1 0 0 0,4-14 0 0 0,-4 21-50 0 0,0 0 0 0 0,1 0 0 0 0,-1 1 0 0 0,1-1 0 0 0,0 1 0 0 0,1-1 0 0 0,-1 1 0 0 0,1 0 0 0 0,0 0 0 0 0,0 0-1 0 0,0 0 1 0 0,0 0 0 0 0,1 1 0 0 0,-1-1 0 0 0,1 1 0 0 0,0 0 0 0 0,0 0 0 0 0,0 1 0 0 0,5-3 0 0 0,-4 3 0 0 0,0 1-1 0 0,0 0 1 0 0,0 0-1 0 0,0 1 1 0 0,-1-1-1 0 0,1 1 1 0 0,0 0 0 0 0,0 1-1 0 0,0-1 1 0 0,0 1-1 0 0,0 0 1 0 0,0 0-1 0 0,0 0 1 0 0,0 1-1 0 0,-1 0 1 0 0,1 0 0 0 0,-1 0-1 0 0,1 0 1 0 0,-1 1-1 0 0,8 5 1 0 0,9 8-55 0 0,-1 0 1 0 0,30 31-1 0 0,-41-38 41 0 0,36 31-43 0 0,-27-25-14 0 0,0 1 0 0 0,-1 1 0 0 0,18 24 0 0 0,-28-35-217 0 0</inkml:trace>
-</inkml:ink>
-</file>
-
-<file path=ppt/ink/ink25.xml><?xml version="1.0" encoding="utf-8"?>
-<inkml:ink xmlns:inkml="http://www.w3.org/2003/InkML">
-  <inkml:definitions>
-    <inkml:context xml:id="ctx0">
-      <inkml:inkSource xml:id="inkSrc0">
-        <inkml:traceFormat>
-          <inkml:channel name="X" type="integer" min="-2.14748E9" max="2.14748E9" units="cm"/>
-          <inkml:channel name="Y" type="integer" min="-2.14748E9" max="2.14748E9" units="cm"/>
-          <inkml:channel name="F" type="integer" max="32767" units="dev"/>
-          <inkml:channel name="OA" type="integer" max="360" units="deg"/>
-          <inkml:channel name="OE" type="integer" max="90" units="deg"/>
-        </inkml:traceFormat>
-        <inkml:channelProperties>
-          <inkml:channelProperty channel="X" name="resolution" value="1000" units="1/cm"/>
-          <inkml:channelProperty channel="Y" name="resolution" value="1000" units="1/cm"/>
-          <inkml:channelProperty channel="F" name="resolution" value="0" units="1/dev"/>
-          <inkml:channelProperty channel="OA" name="resolution" value="1000" units="1/deg"/>
-          <inkml:channelProperty channel="OE" name="resolution" value="1000" units="1/deg"/>
-        </inkml:channelProperties>
-      </inkml:inkSource>
-      <inkml:timestamp xml:id="ts0" timeString="2026-03-20T17:29:00.118"/>
-    </inkml:context>
-    <inkml:brush xml:id="br0">
-      <inkml:brushProperty name="width" value="0.2" units="cm"/>
-      <inkml:brushProperty name="height" value="0.2" units="cm"/>
-      <inkml:brushProperty name="color" value="#FFC114"/>
-    </inkml:brush>
-  </inkml:definitions>
-  <inkml:trace contextRef="#ctx0" brushRef="#br0">29 56 3872 0 0,'0'-1'6'0'0,"-1"1"0"0"0,1-1-1 0 0,0 1 1 0 0,-1-1 0 0 0,1 1-1 0 0,-1-1 1 0 0,1 1 0 0 0,-1-1-1 0 0,1 1 1 0 0,-1-1 0 0 0,1 1-1 0 0,-1 0 1 0 0,1-1 0 0 0,-1 1-1 0 0,1 0 1 0 0,-1 0 0 0 0,1-1-1 0 0,-1 1 1 0 0,0 0 0 0 0,1 0-1 0 0,-1 0 1 0 0,0 0-1 0 0,1 0 1 0 0,-1 0 0 0 0,1 0-1 0 0,-1 0 1 0 0,0 0 0 0 0,1 0-1 0 0,-1 0 1 0 0,0 0 0 0 0,1 0-1 0 0,-1 0 1 0 0,1 1 0 0 0,-1-1-1 0 0,0 0 1 0 0,1 0 0 0 0,-1 1-1 0 0,0 0 1 0 0,0 1-11 0 0,0 0 1 0 0,0-1-1 0 0,1 1 0 0 0,-1 1 1 0 0,0-1-1 0 0,1 0 0 0 0,-1 0 1 0 0,1 0-1 0 0,0 0 0 0 0,0 0 1 0 0,0 4-1 0 0,9 62-137 0 0,18 29 3953 0 0,-33-109-3659 0 0,0 0 0 0 0,1 0 0 0 0,-5-22-1 0 0,7 21-126 0 0,2 0-1 0 0,-1 0 0 0 0,2 0 0 0 0,-1 0 1 0 0,3-17-1 0 0,-1 26-55 0 0,0 1-1 0 0,0-1 1 0 0,0 0 0 0 0,0 0-1 0 0,0 1 1 0 0,1-1 0 0 0,-1 1-1 0 0,1-1 1 0 0,0 1 0 0 0,0 0-1 0 0,1 0 1 0 0,-1 0 0 0 0,1 0-1 0 0,-1 0 1 0 0,1 0-1 0 0,0 1 1 0 0,0-1 0 0 0,0 1-1 0 0,0 0 1 0 0,1 0 0 0 0,6-3-1 0 0,-4 3 0 0 0,-1 0-1 0 0,1 1 1 0 0,-1 0-1 0 0,1 0 1 0 0,0 0-1 0 0,0 1 0 0 0,-1 0 1 0 0,1 0-1 0 0,0 0 1 0 0,0 1-1 0 0,-1 0 1 0 0,1 0-1 0 0,0 1 1 0 0,-1-1-1 0 0,1 1 0 0 0,-1 0 1 0 0,6 3-1 0 0,9 5-56 0 0,-2 0-1 0 0,1 2 0 0 0,20 15 1 0 0,-23-14 2 0 0,-2 1 0 0 0,21 22 1 0 0,-23-21-6 0 0,2-1 1 0 0,21 17-1 0 0,-33-30 1 0 0,0 1 0 0 0,0-1 1 0 0,-1 0-1 0 0,1 0 0 0 0,-1 1 0 0 0,1-1 1 0 0,-1 1-1 0 0,0-1 0 0 0,1 1 0 0 0,-1-1 0 0 0,0 1 1 0 0,0 0-1 0 0,0 0 0 0 0,0 0 0 0 0,0 0 1 0 0,-1-1-1 0 0,1 1 0 0 0,0 0 0 0 0,-1 0 1 0 0,0 0-1 0 0,1 3 0 0 0</inkml:trace>
-</inkml:ink>
-</file>
-
-<file path=ppt/ink/ink26.xml><?xml version="1.0" encoding="utf-8"?>
-<inkml:ink xmlns:inkml="http://www.w3.org/2003/InkML">
-  <inkml:definitions>
-    <inkml:context xml:id="ctx0">
-      <inkml:inkSource xml:id="inkSrc0">
-        <inkml:traceFormat>
-          <inkml:channel name="X" type="integer" min="-2.14748E9" max="2.14748E9" units="cm"/>
-          <inkml:channel name="Y" type="integer" min="-2.14748E9" max="2.14748E9" units="cm"/>
-          <inkml:channel name="F" type="integer" max="32767" units="dev"/>
-          <inkml:channel name="OA" type="integer" max="360" units="deg"/>
-          <inkml:channel name="OE" type="integer" max="90" units="deg"/>
-        </inkml:traceFormat>
-        <inkml:channelProperties>
-          <inkml:channelProperty channel="X" name="resolution" value="1000" units="1/cm"/>
-          <inkml:channelProperty channel="Y" name="resolution" value="1000" units="1/cm"/>
-          <inkml:channelProperty channel="F" name="resolution" value="0" units="1/dev"/>
-          <inkml:channelProperty channel="OA" name="resolution" value="1000" units="1/deg"/>
-          <inkml:channelProperty channel="OE" name="resolution" value="1000" units="1/deg"/>
-        </inkml:channelProperties>
-      </inkml:inkSource>
-      <inkml:timestamp xml:id="ts0" timeString="2026-03-20T17:29:00.353"/>
-    </inkml:context>
-    <inkml:brush xml:id="br0">
-      <inkml:brushProperty name="width" value="0.2" units="cm"/>
-      <inkml:brushProperty name="height" value="0.2" units="cm"/>
-      <inkml:brushProperty name="color" value="#FFC114"/>
-    </inkml:brush>
-  </inkml:definitions>
-  <inkml:trace contextRef="#ctx0" brushRef="#br0">1 5 4344 0 0,'0'0'36'0'0,"0"0"-43"0"0,0 0-1 0 0,0-1 0 0 0,0 1 1 0 0,0 0-1 0 0,0 0 0 0 0,0 0 1 0 0,0-1-1 0 0,0 1 0 0 0,0 0 1 0 0,1 0-1 0 0,-1-1 0 0 0,0 1 1 0 0,0 0-1 0 0,0 0 0 0 0,0 0 1 0 0,1 0-1 0 0,-1-1 0 0 0,0 1 1 0 0,0 0-1 0 0,0 0 0 0 0,1 0 1 0 0,-1 0-1 0 0,0 0 0 0 0,0 0 1 0 0,0-1-1 0 0,1 1 0 0 0,-1 0 1 0 0,0 0-1 0 0,0 0 0 0 0,1 0 1 0 0,-1 0-1 0 0,0 0 0 0 0,0 0 0 0 0,1 0 1 0 0,-1 0-1 0 0,0 0 0 0 0,0 0 1 0 0,1 0-1 0 0,-1 0 0 0 0,0 0 1 0 0,0 1-1 0 0,0-1 0 0 0,1 0 1 0 0,-1 0-1 0 0,0 0 0 0 0,0 0 1 0 0,1 0-1 0 0,-1 0 0 0 0,0 1 1 0 0,0-1-1 0 0,51 199-1277 0 0,-43-190-231 0 0</inkml:trace>
-</inkml:ink>
-</file>
-
-<file path=ppt/ink/ink27.xml><?xml version="1.0" encoding="utf-8"?>
-<inkml:ink xmlns:inkml="http://www.w3.org/2003/InkML">
-  <inkml:definitions>
-    <inkml:context xml:id="ctx0">
-      <inkml:inkSource xml:id="inkSrc0">
-        <inkml:traceFormat>
-          <inkml:channel name="X" type="integer" min="-2.14748E9" max="2.14748E9" units="cm"/>
-          <inkml:channel name="Y" type="integer" min="-2.14748E9" max="2.14748E9" units="cm"/>
-          <inkml:channel name="F" type="integer" max="32767" units="dev"/>
-          <inkml:channel name="OA" type="integer" max="360" units="deg"/>
-          <inkml:channel name="OE" type="integer" max="90" units="deg"/>
-        </inkml:traceFormat>
-        <inkml:channelProperties>
-          <inkml:channelProperty channel="X" name="resolution" value="1000" units="1/cm"/>
-          <inkml:channelProperty channel="Y" name="resolution" value="1000" units="1/cm"/>
-          <inkml:channelProperty channel="F" name="resolution" value="0" units="1/dev"/>
-          <inkml:channelProperty channel="OA" name="resolution" value="1000" units="1/deg"/>
-          <inkml:channelProperty channel="OE" name="resolution" value="1000" units="1/deg"/>
-        </inkml:channelProperties>
-      </inkml:inkSource>
-      <inkml:timestamp xml:id="ts0" timeString="2026-03-20T17:29:00.526"/>
-    </inkml:context>
-    <inkml:brush xml:id="br0">
-      <inkml:brushProperty name="width" value="0.2" units="cm"/>
-      <inkml:brushProperty name="height" value="0.2" units="cm"/>
-      <inkml:brushProperty name="color" value="#FFC114"/>
-    </inkml:brush>
-  </inkml:definitions>
-  <inkml:trace contextRef="#ctx0" brushRef="#br0">25 35 3148 0 0,'-8'-10'764'0'0,"5"3"336"0"0,-5-1-31 0 0,2-2-1305 0 0</inkml:trace>
-</inkml:ink>
-</file>
-
-<file path=ppt/ink/ink28.xml><?xml version="1.0" encoding="utf-8"?>
-<inkml:ink xmlns:inkml="http://www.w3.org/2003/InkML">
-  <inkml:definitions>
-    <inkml:context xml:id="ctx0">
-      <inkml:inkSource xml:id="inkSrc0">
-        <inkml:traceFormat>
-          <inkml:channel name="X" type="integer" min="-2.14748E9" max="2.14748E9" units="cm"/>
-          <inkml:channel name="Y" type="integer" min="-2.14748E9" max="2.14748E9" units="cm"/>
-          <inkml:channel name="F" type="integer" max="32767" units="dev"/>
-          <inkml:channel name="OA" type="integer" max="360" units="deg"/>
-          <inkml:channel name="OE" type="integer" max="90" units="deg"/>
-        </inkml:traceFormat>
-        <inkml:channelProperties>
-          <inkml:channelProperty channel="X" name="resolution" value="1000" units="1/cm"/>
-          <inkml:channelProperty channel="Y" name="resolution" value="1000" units="1/cm"/>
-          <inkml:channelProperty channel="F" name="resolution" value="0" units="1/dev"/>
-          <inkml:channelProperty channel="OA" name="resolution" value="1000" units="1/deg"/>
-          <inkml:channelProperty channel="OE" name="resolution" value="1000" units="1/deg"/>
-        </inkml:channelProperties>
-      </inkml:inkSource>
-      <inkml:timestamp xml:id="ts0" timeString="2026-03-20T17:29:01.201"/>
-    </inkml:context>
-    <inkml:brush xml:id="br0">
-      <inkml:brushProperty name="width" value="0.2" units="cm"/>
-      <inkml:brushProperty name="height" value="0.2" units="cm"/>
-      <inkml:brushProperty name="color" value="#FFC114"/>
-    </inkml:brush>
-  </inkml:definitions>
-  <inkml:trace contextRef="#ctx0" brushRef="#br0">42 1 3992 0 0,'-3'5'-193'0'0,"0"0"1"0"0,0 0-1 0 0,1 1 0 0 0,0-1 0 0 0,0 1 0 0 0,0-1 0 0 0,1 1 0 0 0,0 0 0 0 0,-1 11 0 0 0,0 59 277 0 0,3-48-215 0 0,1 48 5364 0 0,-12-92-4835 0 0,7 10-322 0 0,1-1 0 0 0,0 0 1 0 0,1 1-1 0 0,-1-1 0 0 0,1 0 1 0 0,1 0-1 0 0,-1 0 0 0 0,1 0 0 0 0,1 0 1 0 0,-1 0-1 0 0,1 0 0 0 0,0 0 1 0 0,0 1-1 0 0,1-1 0 0 0,0 0 1 0 0,1 1-1 0 0,-1-1 0 0 0,1 1 1 0 0,0 0-1 0 0,1 0 0 0 0,4-8 1 0 0,-4 11-95 0 0,-1-1 0 0 0,1 1 1 0 0,0-1-1 0 0,0 1 0 0 0,0 0 1 0 0,1 0-1 0 0,-1 1 1 0 0,1 0-1 0 0,-1-1 0 0 0,1 1 1 0 0,0 1-1 0 0,0-1 1 0 0,0 1-1 0 0,0 0 0 0 0,0 0 1 0 0,0 0-1 0 0,7 0 0 0 0,-5 2-14 0 0,0 0 0 0 0,0 0-1 0 0,0 1 1 0 0,0-1 0 0 0,0 2-1 0 0,-1-1 1 0 0,1 1 0 0 0,-1 0 0 0 0,1 0-1 0 0,-1 0 1 0 0,7 6 0 0 0,4 5-47 0 0,0 0 1 0 0,-1 1 0 0 0,0 1 0 0 0,-1 1 0 0 0,-1 0 0 0 0,23 36-1 0 0,-25-35 4 0 0,-9-15 15 0 0,0 0 0 0 0,-1 0-1 0 0,0 0 1 0 0,1 0 0 0 0,-1 1 0 0 0,-1-1 0 0 0,1 0 0 0 0,0 1 0 0 0,-1 0 0 0 0,1-1 0 0 0,-1 1-1 0 0,0 0 1 0 0,-1-1 0 0 0,1 1 0 0 0,0 7 0 0 0,-2-9-279 0 0</inkml:trace>
-</inkml:ink>
-</file>
-
-<file path=ppt/ink/ink29.xml><?xml version="1.0" encoding="utf-8"?>
-<inkml:ink xmlns:inkml="http://www.w3.org/2003/InkML">
-  <inkml:definitions>
-    <inkml:context xml:id="ctx0">
-      <inkml:inkSource xml:id="inkSrc0">
-        <inkml:traceFormat>
-          <inkml:channel name="X" type="integer" min="-2.14748E9" max="2.14748E9" units="cm"/>
-          <inkml:channel name="Y" type="integer" min="-2.14748E9" max="2.14748E9" units="cm"/>
-          <inkml:channel name="F" type="integer" max="32767" units="dev"/>
-          <inkml:channel name="OA" type="integer" max="360" units="deg"/>
-          <inkml:channel name="OE" type="integer" max="90" units="deg"/>
-        </inkml:traceFormat>
-        <inkml:channelProperties>
-          <inkml:channelProperty channel="X" name="resolution" value="1000" units="1/cm"/>
-          <inkml:channelProperty channel="Y" name="resolution" value="1000" units="1/cm"/>
-          <inkml:channelProperty channel="F" name="resolution" value="0" units="1/dev"/>
-          <inkml:channelProperty channel="OA" name="resolution" value="1000" units="1/deg"/>
-          <inkml:channelProperty channel="OE" name="resolution" value="1000" units="1/deg"/>
-        </inkml:channelProperties>
-      </inkml:inkSource>
-      <inkml:timestamp xml:id="ts0" timeString="2026-03-20T17:29:02.082"/>
-    </inkml:context>
-    <inkml:brush xml:id="br0">
-      <inkml:brushProperty name="width" value="0.2" units="cm"/>
-      <inkml:brushProperty name="height" value="0.2" units="cm"/>
-      <inkml:brushProperty name="color" value="#FFC114"/>
-    </inkml:brush>
-  </inkml:definitions>
-  <inkml:trace contextRef="#ctx0" brushRef="#br0">222 37 4668 0 0,'1'0'-3'0'0,"-1"0"-1"0"0,1-1 1 0 0,-1 1-1 0 0,1-1 0 0 0,-1 1 1 0 0,0-1-1 0 0,1 1 1 0 0,-1-1-1 0 0,0 1 0 0 0,1-1 1 0 0,-1 1-1 0 0,0-1 1 0 0,1 1-1 0 0,-1-1 0 0 0,0 0 1 0 0,0 1-1 0 0,0-1 1 0 0,0 0-1 0 0,0 1 0 0 0,0-1 1 0 0,0 1-1 0 0,0-1 0 0 0,0 0 1 0 0,0 1-1 0 0,0-1 1 0 0,0 0-1 0 0,0 1 0 0 0,0-1 1 0 0,0 1-1 0 0,-1-1 1 0 0,1 0-1 0 0,0 1 0 0 0,0-1 1 0 0,-1 1-1 0 0,1-1 1 0 0,0 1-1 0 0,-1-1 0 0 0,1 1 1 0 0,-1-1-1 0 0,0 0 1 0 0,-1-1 6 0 0,0 1 1 0 0,1 0 0 0 0,-1-1-1 0 0,0 1 1 0 0,0 0 0 0 0,0 0-1 0 0,0 0 1 0 0,0 0 0 0 0,-1 0-1 0 0,-3 0 1 0 0,4 0-26 0 0,-2 2-3 0 0,-1-1 16 0 0,1 0 1 0 0,0 0 0 0 0,0 0 0 0 0,0 1 0 0 0,0-1-1 0 0,-1 1 1 0 0,1 0 0 0 0,0 1 0 0 0,0-1-1 0 0,1 1 1 0 0,-1 0 0 0 0,0 0 0 0 0,0 0-1 0 0,1 0 1 0 0,0 0 0 0 0,-1 1 0 0 0,1 0-1 0 0,0-1 1 0 0,0 1 0 0 0,0 0 0 0 0,0 1-1 0 0,1-1 1 0 0,0 0 0 0 0,-1 1 0 0 0,1 0-1 0 0,-2 3 1 0 0,4-5 15 0 0,0 0 0 0 0,0 0 1 0 0,0 0-1 0 0,0-1 0 0 0,0 1 0 0 0,1 0 0 0 0,-1 0 0 0 0,0-1 1 0 0,1 1-1 0 0,-1 0 0 0 0,1 0 0 0 0,0-1 0 0 0,0 1 0 0 0,-1-1 1 0 0,1 1-1 0 0,0 0 0 0 0,0-1 0 0 0,1 0 0 0 0,-1 1 0 0 0,0-1 1 0 0,0 0-1 0 0,3 3 0 0 0,31 22 55 0 0,-31-24-64 0 0,0 1-1 0 0,0-1 1 0 0,0 0-1 0 0,1 0 1 0 0,-1-1-1 0 0,1 1 1 0 0,-1-1-1 0 0,1 0 1 0 0,-1 0-1 0 0,1-1 1 0 0,0 1-1 0 0,-1-1 1 0 0,1 0-1 0 0,0-1 0 0 0,-1 1 1 0 0,1-1-1 0 0,0 1 1 0 0,-1-1-1 0 0,1-1 1 0 0,-1 1-1 0 0,1-1 1 0 0,-1 0-1 0 0,0 0 1 0 0,0 0-1 0 0,0 0 1 0 0,0-1-1 0 0,0 1 1 0 0,0-1-1 0 0,-1 0 1 0 0,1 0-1 0 0,-1-1 0 0 0,0 1 1 0 0,0-1-1 0 0,0 1 1 0 0,0-1-1 0 0,-1 0 1 0 0,1 0-1 0 0,2-7 1 0 0,0 1 469 0 0,17-26 1222 0 0,-21 36-1684 0 0,-1 0-1 0 0,0 0 0 0 0,0 0 0 0 0,0 0 0 0 0,0 0 0 0 0,0 0 0 0 0,0 0 0 0 0,0 0 0 0 0,1 0 0 0 0,-1 0 1 0 0,0 0-1 0 0,0 0 0 0 0,0 0 0 0 0,0 0 0 0 0,0 0 0 0 0,0 0 0 0 0,0 0 0 0 0,1 0 0 0 0,-1 0 1 0 0,0 0-1 0 0,0 0 0 0 0,0 0 0 0 0,0 0 0 0 0,0 0 0 0 0,0 0 0 0 0,1 0 0 0 0,-1 0 0 0 0,0 0 1 0 0,0 0-1 0 0,0 1 0 0 0,0-1 0 0 0,0 0 0 0 0,0 0 0 0 0,0 0 0 0 0,0 0 0 0 0,0 0 0 0 0,0 0 1 0 0,1 0-1 0 0,-1 0 0 0 0,0 0 0 0 0,0 1 0 0 0,0-1 0 0 0,0 0 0 0 0,0 0 0 0 0,0 0 0 0 0,0 0 0 0 0,0 0 1 0 0,0 0-1 0 0,0 1 0 0 0,0-1 0 0 0,0 0 0 0 0,0 0 0 0 0,0 0 0 0 0,0 0 0 0 0,0 0 0 0 0,0 0 1 0 0,0 1-1 0 0,0-1 0 0 0,0 0 0 0 0,0 0 0 0 0,0 0 0 0 0,0 0 0 0 0,-1 0 0 0 0,1 0 0 0 0,0 0 1 0 0,0 1-1 0 0,-3 26-163 0 0,-2 2 146 0 0,2-1 0 0 0,1 1 0 0 0,2 0 0 0 0,5 52 0 0 0,29 108 30 0 0,-18-118-42 0 0,6 82 0 0 0,-21-140 16 0 0,0 1 0 0 0,-1-1 0 0 0,-1 1 1 0 0,0 0-1 0 0,-1-1 0 0 0,-1 0 0 0 0,0 1 1 0 0,0-1-1 0 0,-2 0 0 0 0,1 0 0 0 0,-8 12 0 0 0,7-16 12 0 0,0 0 0 0 0,-1-1-1 0 0,0 0 1 0 0,0 0 0 0 0,-1 0-1 0 0,0-1 1 0 0,-1 0-1 0 0,1-1 1 0 0,-1 1 0 0 0,-1-1-1 0 0,1-1 1 0 0,-1 0-1 0 0,0 0 1 0 0,0-1 0 0 0,-13 5-1 0 0,4-3 21 0 0,0-1 0 0 0,0 0-1 0 0,-1-1 1 0 0,-27 1 0 0 0,40-4 2 0 0,1-1 1 0 0,0 1-1 0 0,0-1 0 0 0,0-1 0 0 0,0 1 1 0 0,-1-1-1 0 0,1 0 0 0 0,0 0 1 0 0,0 0-1 0 0,0-1 0 0 0,1 0 1 0 0,-1 0-1 0 0,0 0 0 0 0,0 0 1 0 0,1-1-1 0 0,0 0 0 0 0,-1 0 1 0 0,1 0-1 0 0,0 0 0 0 0,1-1 1 0 0,-5-4-1 0 0,6 5-12 0 0,1-1 0 0 0,-1 0 1 0 0,1 0-1 0 0,-1 1 0 0 0,1-1 0 0 0,0 0 0 0 0,1 0 1 0 0,-1 0-1 0 0,1 0 0 0 0,0 0 0 0 0,-1 0 0 0 0,2 0 1 0 0,-1 0-1 0 0,0 0 0 0 0,1 0 0 0 0,0 0 0 0 0,0 0 1 0 0,0 0-1 0 0,1 0 0 0 0,-1 0 0 0 0,1 1 0 0 0,0-1 1 0 0,0 0-1 0 0,0 1 0 0 0,4-6 0 0 0,3-3-14 0 0,0-1-1 0 0,1 1 1 0 0,1 1 0 0 0,0 0-1 0 0,17-14 1 0 0,-12 12-133 0 0,1 1 0 0 0,1 0 0 0 0,0 1 0 0 0,1 1 1 0 0,0 1-1 0 0,0 1 0 0 0,1 0 0 0 0,0 2 0 0 0,1 0 1 0 0,-1 1-1 0 0,1 1 0 0 0,24-1 0 0 0,-42 5-357 0 0,13 2-1688 0 0</inkml:trace>
-</inkml:ink>
-</file>
-
-<file path=ppt/ink/ink3.xml><?xml version="1.0" encoding="utf-8"?>
+<file path=ppt/ink/ink7.xml><?xml version="1.0" encoding="utf-8"?>
 <inkml:ink xmlns:inkml="http://www.w3.org/2003/InkML">
   <inkml:definitions>
     <inkml:context xml:id="ctx0">
@@ -1058,7 +1298,7 @@
 </inkml:ink>
 </file>
 
-<file path=ppt/ink/ink4.xml><?xml version="1.0" encoding="utf-8"?>
+<file path=ppt/ink/ink8.xml><?xml version="1.0" encoding="utf-8"?>
 <inkml:ink xmlns:inkml="http://www.w3.org/2003/InkML">
   <inkml:definitions>
     <inkml:context xml:id="ctx0">
@@ -1090,7 +1330,7 @@
 </inkml:ink>
 </file>
 
-<file path=ppt/ink/ink5.xml><?xml version="1.0" encoding="utf-8"?>
+<file path=ppt/ink/ink9.xml><?xml version="1.0" encoding="utf-8"?>
 <inkml:ink xmlns:inkml="http://www.w3.org/2003/InkML">
   <inkml:definitions>
     <inkml:context xml:id="ctx0">
@@ -1119,134 +1359,6 @@
     </inkml:brush>
   </inkml:definitions>
   <inkml:trace contextRef="#ctx0" brushRef="#br0">171 42 3608 0 0,'0'0'1402'0'0,"-7"0"-1368"0"0,-23 0-16 0 0,26 1-15 0 0,-1-1 0 0 0,1 1 0 0 0,-1 0 0 0 0,1 0 0 0 0,-1 1 0 0 0,1-1 0 0 0,0 1 0 0 0,-1 0 0 0 0,1 0 0 0 0,0 0 0 0 0,0 1 0 0 0,1-1 0 0 0,-1 1 0 0 0,0 0 0 0 0,-4 6 0 0 0,0-1-21 0 0,0 1 1 0 0,1 0-1 0 0,0 0 1 0 0,-8 15-1 0 0,13-19 12 0 0,-1 0-1 0 0,1 0 1 0 0,0 0-1 0 0,0 0 1 0 0,0 0-1 0 0,1 0 0 0 0,-1 1 1 0 0,2-1-1 0 0,-1 1 1 0 0,0-1-1 0 0,1 0 0 0 0,0 1 1 0 0,0-1-1 0 0,1 1 1 0 0,-1-1-1 0 0,4 11 1 0 0,-1-9 7 0 0,0 0-1 0 0,0 0 1 0 0,0 0 0 0 0,1 0 0 0 0,0-1 0 0 0,1 1 0 0 0,0-1 0 0 0,-1-1 0 0 0,2 1 0 0 0,-1-1 0 0 0,7 6 0 0 0,0-2 18 0 0,1 1-1 0 0,0-2 1 0 0,1 0-1 0 0,0-1 1 0 0,0 0 0 0 0,0-1-1 0 0,1 0 1 0 0,0-1-1 0 0,0-1 1 0 0,1-1 0 0 0,18 3-1 0 0,-27-6 4 0 0,0 0-1 0 0,0 0 1 0 0,1 0-1 0 0,-1-1 1 0 0,0 0 0 0 0,0-1-1 0 0,0 1 1 0 0,0-2-1 0 0,0 1 1 0 0,0-1-1 0 0,0 1 1 0 0,-1-2 0 0 0,0 1-1 0 0,1-1 1 0 0,-1 0-1 0 0,5-5 1 0 0,-7 6-27 0 0,-1-1 0 0 0,0 1 0 0 0,0-1 0 0 0,0 1 1 0 0,0-1-1 0 0,-1 0 0 0 0,1 0 0 0 0,-1 0 0 0 0,0-1 0 0 0,0 1 1 0 0,-1 0-1 0 0,1-1 0 0 0,-1 1 0 0 0,0-1 0 0 0,0 1 0 0 0,-1-1 1 0 0,1 0-1 0 0,-1 1 0 0 0,0-1 0 0 0,0 0 0 0 0,-1 1 0 0 0,1-1 1 0 0,-1 0-1 0 0,0 1 0 0 0,0-1 0 0 0,-2-4 0 0 0,0 3-7 0 0,1 0 0 0 0,-1 0-1 0 0,0 0 1 0 0,-1 0 0 0 0,0 0 0 0 0,0 1-1 0 0,0-1 1 0 0,0 1 0 0 0,-1 0-1 0 0,0 1 1 0 0,0-1 0 0 0,0 1 0 0 0,-1 0-1 0 0,1 0 1 0 0,-1 1 0 0 0,-9-5 0 0 0,-9-3-6 0 0,-1 2 1 0 0,0 1 0 0 0,-26-6-1 0 0,-25-7 122 0 0,69 19-100 0 0,-20-10-219 0 0,66 6 112 0 0,71-1-1 0 0,-70 6 51 0 0,-1-1 0 0 0,49-10 0 0 0,-12 7 680 0 0,-74 4-381 0 0,30-2-156 0 0,-31 7-111 0 0,0 1 0 0 0,0-1 0 0 0,0 1 0 0 0,-1-1-1 0 0,1 1 1 0 0,-1-1 0 0 0,0 1 0 0 0,-1 0 0 0 0,1-1 0 0 0,-3 9 0 0 0,1 29-36 0 0,7-2 39 0 0,3 1 1 0 0,1-1 0 0 0,25 70-1 0 0,-11-37 3729 0 0,-28-82-3703 0 0,0-1-1 0 0,1 0 0 0 0,0 1 0 0 0,1-2 0 0 0,0 1 0 0 0,0 0 0 0 0,1-1 0 0 0,1 1 0 0 0,0-1 0 0 0,0 1 0 0 0,1-1 0 0 0,0 0 0 0 0,1 1 0 0 0,3-16 0 0 0,4-20-307 0 0,3 1 1 0 0,16-44-1 0 0,-21 70 220 0 0,-5 15 31 0 0,0 0-1 0 0,1 0 0 0 0,-1 0 1 0 0,1 1-1 0 0,0-1 1 0 0,1 0-1 0 0,-1 1 1 0 0,0 0-1 0 0,1-1 1 0 0,0 1-1 0 0,0 0 1 0 0,0 1-1 0 0,0-1 0 0 0,0 0 1 0 0,0 1-1 0 0,1 0 1 0 0,0 0-1 0 0,-1 0 1 0 0,1 0-1 0 0,0 0 1 0 0,0 1-1 0 0,0-1 1 0 0,0 1-1 0 0,0 0 0 0 0,0 1 1 0 0,0-1-1 0 0,0 1 1 0 0,5-1-1 0 0,-6 1-6 0 0,1 1 8 0 0,0-1 23 0 0,0 1 1 0 0,0-1 0 0 0,0 1-1 0 0,0 0 1 0 0,0 1 0 0 0,0-1-1 0 0,0 1 1 0 0,0-1 0 0 0,0 1 0 0 0,-1 0-1 0 0,1 1 1 0 0,-1-1 0 0 0,1 1-1 0 0,-1-1 1 0 0,0 1 0 0 0,0 0-1 0 0,0 0 1 0 0,-1 0 0 0 0,1 1 0 0 0,-1-1-1 0 0,1 1 1 0 0,-1-1 0 0 0,0 1-1 0 0,-1 0 1 0 0,1 0 0 0 0,-1 0-1 0 0,1 0 1 0 0,-1 0 0 0 0,0 0-1 0 0,0 8 1 0 0,16 133-212 0 0,-16-136 250 0 0,1 0 0 0 0,1 1 0 0 0,-1-1 1 0 0,2-1-1 0 0,-1 1 0 0 0,1 0 1 0 0,0-1-1 0 0,1 0 0 0 0,0 0 0 0 0,0 0 1 0 0,1 0-1 0 0,0-1 0 0 0,0 0 1 0 0,1 0-1 0 0,0-1 0 0 0,0 0 0 0 0,0 0 1 0 0,1-1-1 0 0,15 9 0 0 0,-10-7-264 0 0,-1-1 1 0 0,1 0-1 0 0,0-1 0 0 0,1-1 0 0 0,-1 0 0 0 0,1-1 0 0 0,0 0 0 0 0,0-1 1 0 0,0 0-1 0 0,0-1 0 0 0,0-1 0 0 0,23-3 0 0 0,-3-3-472 0 0</inkml:trace>
-</inkml:ink>
-</file>
-
-<file path=ppt/ink/ink6.xml><?xml version="1.0" encoding="utf-8"?>
-<inkml:ink xmlns:inkml="http://www.w3.org/2003/InkML">
-  <inkml:definitions>
-    <inkml:context xml:id="ctx0">
-      <inkml:inkSource xml:id="inkSrc0">
-        <inkml:traceFormat>
-          <inkml:channel name="X" type="integer" min="-2.14748E9" max="2.14748E9" units="cm"/>
-          <inkml:channel name="Y" type="integer" min="-2.14748E9" max="2.14748E9" units="cm"/>
-          <inkml:channel name="F" type="integer" max="32767" units="dev"/>
-          <inkml:channel name="OA" type="integer" max="360" units="deg"/>
-          <inkml:channel name="OE" type="integer" max="90" units="deg"/>
-        </inkml:traceFormat>
-        <inkml:channelProperties>
-          <inkml:channelProperty channel="X" name="resolution" value="1000" units="1/cm"/>
-          <inkml:channelProperty channel="Y" name="resolution" value="1000" units="1/cm"/>
-          <inkml:channelProperty channel="F" name="resolution" value="0" units="1/dev"/>
-          <inkml:channelProperty channel="OA" name="resolution" value="1000" units="1/deg"/>
-          <inkml:channelProperty channel="OE" name="resolution" value="1000" units="1/deg"/>
-        </inkml:channelProperties>
-      </inkml:inkSource>
-      <inkml:timestamp xml:id="ts0" timeString="2026-03-20T17:28:47.379"/>
-    </inkml:context>
-    <inkml:brush xml:id="br0">
-      <inkml:brushProperty name="width" value="0.2" units="cm"/>
-      <inkml:brushProperty name="height" value="0.2" units="cm"/>
-      <inkml:brushProperty name="color" value="#FFC114"/>
-    </inkml:brush>
-  </inkml:definitions>
-  <inkml:trace contextRef="#ctx0" brushRef="#br0">19 114 3436 0 0,'-11'-88'2358'0'0,"11"87"-2157"0"0,-2-11 315 0 0,-2-1-576 0 0,2 83-27 0 0,4 0-1 0 0,3 0 0 0 0,21 110 1 0 0,-7-61 67 0 0,-13-73 61 0 0,2-2 0 0 0,14 45-1 0 0,-18-77-34 0 0,0 0-1 0 0,0-1 1 0 0,1 1-1 0 0,1-1 0 0 0,-1 0 1 0 0,2-1-1 0 0,0 0 1 0 0,0 0-1 0 0,1 0 1 0 0,0-1-1 0 0,0 0 0 0 0,17 13 1 0 0,-15-14-53 0 0,1-1-1 0 0,0-1 1 0 0,0 0-1 0 0,1 0 1 0 0,0-1 0 0 0,0-1-1 0 0,0 0 1 0 0,0 0-1 0 0,26 3 1 0 0,-31-7 12 0 0,0 1-1 0 0,-1-2 0 0 0,1 1 1 0 0,0-1-1 0 0,0 0 1 0 0,0 0-1 0 0,-1-1 1 0 0,1 0-1 0 0,-1 0 0 0 0,1 0 1 0 0,-1-1-1 0 0,0 0 1 0 0,0-1-1 0 0,0 1 1 0 0,0-1-1 0 0,-1 0 0 0 0,1 0 1 0 0,-1-1-1 0 0,0 0 1 0 0,5-6-1 0 0,3-5 358 0 0,-1-2 1 0 0,-1 0-1 0 0,-1 0 0 0 0,0-1 0 0 0,-1 0 0 0 0,10-34 0 0 0,-15 42-28 0 0,-3 10-209 0 0,0 0-61 0 0,2-6-11 0 0,-2 5-22 0 0,0 23-318 0 0,-1-18 320 0 0,1 1-1 0 0,-1-1 1 0 0,0 0-1 0 0,1 0 1 0 0,0 1-1 0 0,0-1 1 0 0,0 0-1 0 0,0 0 1 0 0,0 0 0 0 0,0 0-1 0 0,1 0 1 0 0,0 0-1 0 0,-1 0 1 0 0,1-1-1 0 0,0 1 1 0 0,0 0-1 0 0,1-1 1 0 0,-1 0 0 0 0,0 1-1 0 0,1-1 1 0 0,0 0-1 0 0,4 2 1 0 0,5 4-18 0 0,1-1-1 0 0,0-1 1 0 0,22 9 0 0 0,-27-12-4 0 0,10 4-63 0 0,1-1 0 0 0,0-1 1 0 0,0 0-1 0 0,0-1 0 0 0,0-1 1 0 0,1-1-1 0 0,-1-1 0 0 0,37-2 1 0 0,-48 0 62 0 0,0 0-1 0 0,1-1 1 0 0,-1 0 0 0 0,0 0 0 0 0,0-1 0 0 0,0 1 0 0 0,-1-2 0 0 0,1 1-1 0 0,-1-1 1 0 0,0 0 0 0 0,0-1 0 0 0,0 0 0 0 0,0 0 0 0 0,-1 0-1 0 0,0-1 1 0 0,0 0 0 0 0,0 0 0 0 0,-1 0 0 0 0,0-1 0 0 0,0 0-1 0 0,-1 0 1 0 0,7-15 0 0 0,-3 2 224 0 0,-2-1 0 0 0,8-35 0 0 0,-3 7 256 0 0,-11 48-443 0 0,1-6 30 0 0,-2 5-94 0 0,0 6-316 0 0,-7 33 337 0 0,2-1 0 0 0,1 1-1 0 0,2 1 1 0 0,2-1 0 0 0,1 0 0 0 0,6 46 0 0 0,51 225 43 0 0,-50-277 2 0 0,-2-14-12 0 0,-2 1-1 0 0,0-1 0 0 0,-1 1 1 0 0,0-1-1 0 0,-2 1 0 0 0,0 0 1 0 0,-1-1-1 0 0,-6 34 0 0 0</inkml:trace>
-</inkml:ink>
-</file>
-
-<file path=ppt/ink/ink7.xml><?xml version="1.0" encoding="utf-8"?>
-<inkml:ink xmlns:inkml="http://www.w3.org/2003/InkML">
-  <inkml:definitions>
-    <inkml:context xml:id="ctx0">
-      <inkml:inkSource xml:id="inkSrc0">
-        <inkml:traceFormat>
-          <inkml:channel name="X" type="integer" min="-2.14748E9" max="2.14748E9" units="cm"/>
-          <inkml:channel name="Y" type="integer" min="-2.14748E9" max="2.14748E9" units="cm"/>
-          <inkml:channel name="F" type="integer" max="32767" units="dev"/>
-          <inkml:channel name="OA" type="integer" max="360" units="deg"/>
-          <inkml:channel name="OE" type="integer" max="90" units="deg"/>
-        </inkml:traceFormat>
-        <inkml:channelProperties>
-          <inkml:channelProperty channel="X" name="resolution" value="1000" units="1/cm"/>
-          <inkml:channelProperty channel="Y" name="resolution" value="1000" units="1/cm"/>
-          <inkml:channelProperty channel="F" name="resolution" value="0" units="1/dev"/>
-          <inkml:channelProperty channel="OA" name="resolution" value="1000" units="1/deg"/>
-          <inkml:channelProperty channel="OE" name="resolution" value="1000" units="1/deg"/>
-        </inkml:channelProperties>
-      </inkml:inkSource>
-      <inkml:timestamp xml:id="ts0" timeString="2026-03-20T17:28:49.313"/>
-    </inkml:context>
-    <inkml:brush xml:id="br0">
-      <inkml:brushProperty name="width" value="0.2" units="cm"/>
-      <inkml:brushProperty name="height" value="0.2" units="cm"/>
-      <inkml:brushProperty name="color" value="#FFC114"/>
-    </inkml:brush>
-  </inkml:definitions>
-  <inkml:trace contextRef="#ctx0" brushRef="#br0">205 90 3784 0 0,'0'0'-72'0'0,"-7"-21"-26"0"0,4 18 98 0 0,-6-4-9 0 0,-22 6 18 0 0,23 3-17 0 0,0-1 0 0 0,1 1 0 0 0,-1 0 0 0 0,1 1-1 0 0,0 0 1 0 0,0 0 0 0 0,0 0 0 0 0,0 1 0 0 0,0 0-1 0 0,0 1 1 0 0,1-1 0 0 0,0 1 0 0 0,0 0 0 0 0,1 1-1 0 0,-1 0 1 0 0,1-1 0 0 0,0 2 0 0 0,1-1 0 0 0,-1 0-1 0 0,1 1 1 0 0,-6 13 0 0 0,8-14 11 0 0,0 0-1 0 0,0 0 1 0 0,0 0 0 0 0,0 0 0 0 0,1 0-1 0 0,0 1 1 0 0,1-1 0 0 0,-1 0-1 0 0,1 1 1 0 0,0-1 0 0 0,1 1-1 0 0,-1-1 1 0 0,2 0 0 0 0,-1 1 0 0 0,0-1-1 0 0,1 0 1 0 0,0 0 0 0 0,1 0-1 0 0,-1 0 1 0 0,1-1 0 0 0,0 1-1 0 0,1-1 1 0 0,-1 1 0 0 0,1-1 0 0 0,0 0-1 0 0,0 0 1 0 0,9 7 0 0 0,-1-2 21 0 0,1 0 1 0 0,0-1 0 0 0,0 0-1 0 0,1-1 1 0 0,0-1 0 0 0,1 0-1 0 0,-1-1 1 0 0,2 0 0 0 0,-1-1 0 0 0,0-1-1 0 0,1-1 1 0 0,0 0 0 0 0,0-1-1 0 0,29 1 1 0 0,-36-3 1 0 0,1-1 1 0 0,-1 0-1 0 0,1 0 1 0 0,-1-1-1 0 0,0 0 1 0 0,1 0-1 0 0,-1-1 1 0 0,0-1 0 0 0,0 1-1 0 0,-1-2 1 0 0,1 1-1 0 0,-1-1 1 0 0,0 0-1 0 0,0-1 1 0 0,-1 0-1 0 0,1 0 1 0 0,-1 0-1 0 0,-1-1 1 0 0,1 0-1 0 0,-1-1 1 0 0,0 1-1 0 0,-1-1 1 0 0,0 0-1 0 0,0-1 1 0 0,7-16-1 0 0,-11 21-1 0 0,1 0 1 0 0,-1 0-1 0 0,0 0 0 0 0,0 0 1 0 0,0 0-1 0 0,0 0 0 0 0,-1 0 1 0 0,0 0-1 0 0,0 0 0 0 0,0 0 1 0 0,0 0-1 0 0,-1 0 0 0 0,1 0 0 0 0,-1 0 1 0 0,0 0-1 0 0,0 0 0 0 0,-1 0 1 0 0,1 0-1 0 0,-1 0 0 0 0,0 1 1 0 0,0-1-1 0 0,0 1 0 0 0,0-1 1 0 0,-1 1-1 0 0,1 0 0 0 0,-1 0 1 0 0,0 0-1 0 0,0 0 0 0 0,0 1 0 0 0,0-1 1 0 0,-1 1-1 0 0,1-1 0 0 0,-6-2 1 0 0,-14-7 0 0 0,0 2 0 0 0,0 0 1 0 0,-1 1-1 0 0,-35-8 0 0 0,15 3 35 0 0,-9 0-4 0 0,51 13-52 0 0,-17-6 26 0 0,9 2-93 0 0,9 2-264 0 0,195 2 186 0 0,9 0-27 0 0,-50-1 1422 0 0,-149 2-1089 0 0,23 2-117 0 0,-24-2-87 0 0,0 48-349 0 0,-6-19 368 0 0,2 0 1 0 0,1 0 0 0 0,1-1-1 0 0,2 1 1 0 0,1 0 0 0 0,1-1 0 0 0,1 0-1 0 0,1 0 1 0 0,14 32 0 0 0,-13-24 3263 0 0,-15-52-2706 0 0,-2-10-486 0 0,2 0 0 0 0,0-1 0 0 0,2 0 0 0 0,-4-52-1 0 0,8 62-152 0 0,1 1 0 0 0,0 0 0 0 0,1 0 0 0 0,1 0 0 0 0,1 1-1 0 0,0-1 1 0 0,1 0 0 0 0,1 1 0 0 0,10-23 0 0 0,-12 32 40 0 0,1 0 0 0 0,0 0 0 0 0,0 1 1 0 0,1-1-1 0 0,0 1 0 0 0,0 0 0 0 0,0 1 0 0 0,0-1 1 0 0,1 1-1 0 0,-1 0 0 0 0,1 1 0 0 0,0-1 0 0 0,0 1 1 0 0,1 0-1 0 0,-1 1 0 0 0,1-1 0 0 0,-1 1 0 0 0,1 0 1 0 0,0 1-1 0 0,0 0 0 0 0,0 0 0 0 0,0 1 0 0 0,11 0 0 0 0,-7 0 0 0 0,1 0-1 0 0,0 1 0 0 0,0 1 0 0 0,0 0 1 0 0,-1 1-1 0 0,1 0 0 0 0,-1 1 0 0 0,0 0 0 0 0,0 1 1 0 0,0 0-1 0 0,-1 1 0 0 0,1 0 0 0 0,9 8 1 0 0,-5-1 19 0 0,-1 1 1 0 0,-1 0 0 0 0,0 1 0 0 0,-1 1-1 0 0,-1 0 1 0 0,0 0 0 0 0,-1 1-1 0 0,-1 1 1 0 0,0-1 0 0 0,-2 1 0 0 0,0 1-1 0 0,-1 0 1 0 0,0-1 0 0 0,3 33 0 0 0,-2-27-67 0 0</inkml:trace>
-</inkml:ink>
-</file>
-
-<file path=ppt/ink/ink8.xml><?xml version="1.0" encoding="utf-8"?>
-<inkml:ink xmlns:inkml="http://www.w3.org/2003/InkML">
-  <inkml:definitions>
-    <inkml:context xml:id="ctx0">
-      <inkml:inkSource xml:id="inkSrc0">
-        <inkml:traceFormat>
-          <inkml:channel name="X" type="integer" min="-2.14748E9" max="2.14748E9" units="cm"/>
-          <inkml:channel name="Y" type="integer" min="-2.14748E9" max="2.14748E9" units="cm"/>
-          <inkml:channel name="F" type="integer" max="32767" units="dev"/>
-          <inkml:channel name="OA" type="integer" max="360" units="deg"/>
-          <inkml:channel name="OE" type="integer" max="90" units="deg"/>
-        </inkml:traceFormat>
-        <inkml:channelProperties>
-          <inkml:channelProperty channel="X" name="resolution" value="1000" units="1/cm"/>
-          <inkml:channelProperty channel="Y" name="resolution" value="1000" units="1/cm"/>
-          <inkml:channelProperty channel="F" name="resolution" value="0" units="1/dev"/>
-          <inkml:channelProperty channel="OA" name="resolution" value="1000" units="1/deg"/>
-          <inkml:channelProperty channel="OE" name="resolution" value="1000" units="1/deg"/>
-        </inkml:channelProperties>
-      </inkml:inkSource>
-      <inkml:timestamp xml:id="ts0" timeString="2026-03-20T17:28:50.217"/>
-    </inkml:context>
-    <inkml:brush xml:id="br0">
-      <inkml:brushProperty name="width" value="0.2" units="cm"/>
-      <inkml:brushProperty name="height" value="0.2" units="cm"/>
-      <inkml:brushProperty name="color" value="#FFC114"/>
-    </inkml:brush>
-  </inkml:definitions>
-  <inkml:trace contextRef="#ctx0" brushRef="#br0">175 82 4080 0 0,'1'0'1'0'0,"1"-1"-1"0"0,-1 0 0 0 0,0 0 0 0 0,0 0 0 0 0,0 0 0 0 0,0 0 0 0 0,0 0 1 0 0,0 0-1 0 0,-1 0 0 0 0,1 0 0 0 0,0 0 0 0 0,0 0 0 0 0,-1 0 1 0 0,1-1-1 0 0,-1 1 0 0 0,1 0 0 0 0,-1-1 0 0 0,0 1 0 0 0,1 0 0 0 0,-1-1 1 0 0,0 1-1 0 0,0 0 0 0 0,0-1 0 0 0,0 1 0 0 0,0-2 0 0 0,-2 0 24 0 0,0 1-1 0 0,0 0 1 0 0,0 0-1 0 0,0 0 0 0 0,0 0 1 0 0,-1 0-1 0 0,1 0 1 0 0,-1 1-1 0 0,1-1 1 0 0,-1 1-1 0 0,0 0 0 0 0,1 0 1 0 0,-1 0-1 0 0,0 0 1 0 0,0 0-1 0 0,-4 0 0 0 0,4 0-40 0 0,-24 8-34 0 0,18-2 47 0 0,0 2-1 0 0,1-1 0 0 0,0 1 0 0 0,0 1 0 0 0,1-1 1 0 0,-1 1-1 0 0,2 0 0 0 0,-1 1 0 0 0,1 0 0 0 0,1 0 0 0 0,-1 0 1 0 0,1 1-1 0 0,1-1 0 0 0,0 1 0 0 0,1 0 0 0 0,-4 15 1 0 0,5-18 10 0 0,1 0 1 0 0,0 0 0 0 0,1 0 0 0 0,0 0-1 0 0,0 0 1 0 0,0 0 0 0 0,1-1 0 0 0,0 1 0 0 0,0 0-1 0 0,0 0 1 0 0,1-1 0 0 0,0 1 0 0 0,1 0 0 0 0,0-1-1 0 0,-1 0 1 0 0,2 0 0 0 0,-1 0 0 0 0,1 0-1 0 0,0 0 1 0 0,0-1 0 0 0,1 0 0 0 0,-1 0 0 0 0,1 0-1 0 0,1 0 1 0 0,-1-1 0 0 0,11 8 0 0 0,2-2 17 0 0,1-1 0 0 0,0 0 0 0 0,0-2 0 0 0,0 0 0 0 0,1-1 0 0 0,0-1 0 0 0,0 0 0 0 0,1-2 0 0 0,-1 0 1 0 0,23-1-1 0 0,-9-2 9 0 0,0-1 0 0 0,0-2 0 0 0,-1-1 0 0 0,1-1 0 0 0,44-14 0 0 0,-56 12-6 0 0,0-1 0 0 0,-1-1 0 0 0,0 0 0 0 0,0-2 0 0 0,-1-1 0 0 0,-1 0 0 0 0,0-1 0 0 0,0-1 0 0 0,-2-1 0 0 0,0-1 0 0 0,0 0 0 0 0,-2-1-1 0 0,0-1 1 0 0,-1 0 0 0 0,-1-1 0 0 0,0 0 0 0 0,-2-1 0 0 0,13-28 0 0 0,-23 45-9 0 0,0 0-1 0 0,0 1 1 0 0,-1-1-1 0 0,1 0 1 0 0,-1 1 0 0 0,1-1-1 0 0,-1 0 1 0 0,0 0-1 0 0,0 0 1 0 0,0 1 0 0 0,0-1-1 0 0,-1 0 1 0 0,1 0-1 0 0,-1 1 1 0 0,1-1-1 0 0,-1 0 1 0 0,0 1 0 0 0,0-1-1 0 0,0 0 1 0 0,-1 1-1 0 0,1 0 1 0 0,-1-1-1 0 0,-2-3 1 0 0,1 3-15 0 0,0 1 0 0 0,0 0-1 0 0,0 0 1 0 0,0 0 0 0 0,0 0 0 0 0,0 0-1 0 0,-1 0 1 0 0,1 1 0 0 0,-1 0-1 0 0,1 0 1 0 0,-1 0 0 0 0,1 0 0 0 0,-1 0-1 0 0,0 1 1 0 0,1-1 0 0 0,-1 1 0 0 0,0 0-1 0 0,1 0 1 0 0,-7 1 0 0 0,-2 2-22 0 0,0 0 1 0 0,1 1 0 0 0,-1 1-1 0 0,1-1 1 0 0,-1 2-1 0 0,2 0 1 0 0,-1 0-1 0 0,1 1 1 0 0,-1 0 0 0 0,2 1-1 0 0,-1 0 1 0 0,1 0-1 0 0,1 1 1 0 0,-1 0-1 0 0,1 1 1 0 0,1 0-1 0 0,-7 11 1 0 0,10-14 10 0 0,-1 0 0 0 0,1 1 0 0 0,1 0 0 0 0,0 0 0 0 0,0-1 0 0 0,0 2 0 0 0,1-1 1 0 0,0 0-1 0 0,1 0 0 0 0,0 1 0 0 0,0 14 0 0 0,1-17 9 0 0,1 0 0 0 0,0 0 1 0 0,0-1-1 0 0,1 1 1 0 0,-1 0-1 0 0,1-1 0 0 0,1 0 1 0 0,-1 1-1 0 0,1-1 0 0 0,0 0 1 0 0,0 0-1 0 0,0 0 0 0 0,1-1 1 0 0,-1 1-1 0 0,1-1 0 0 0,0 0 1 0 0,1 0-1 0 0,6 5 1 0 0,9 5 14 0 0,0-1 0 0 0,1-1 1 0 0,1-1-1 0 0,0-1 0 0 0,0-1 1 0 0,45 12-1 0 0,-31-12 45 0 0,0-2 0 0 0,1-2 0 0 0,68 2 0 0 0,-85-7 56 0 0,1-1-1 0 0,33-6 1 0 0,-50 7-319 0 0,1-1-1 0 0,0 0 1 0 0,0-1 0 0 0,-1 1 0 0 0,1-1-1 0 0,-1 0 1 0 0,1 0 0 0 0,-1 0-1 0 0,0 0 1 0 0,0-1 0 0 0,0 0-1 0 0,0 0 1 0 0,0 0 0 0 0,-1 0-1 0 0,1-1 1 0 0,-1 1 0 0 0,3-5 0 0 0,-3 0-576 0 0</inkml:trace>
-</inkml:ink>
-</file>
-
-<file path=ppt/ink/ink9.xml><?xml version="1.0" encoding="utf-8"?>
-<inkml:ink xmlns:inkml="http://www.w3.org/2003/InkML">
-  <inkml:definitions>
-    <inkml:context xml:id="ctx0">
-      <inkml:inkSource xml:id="inkSrc0">
-        <inkml:traceFormat>
-          <inkml:channel name="X" type="integer" min="-2.14748E9" max="2.14748E9" units="cm"/>
-          <inkml:channel name="Y" type="integer" min="-2.14748E9" max="2.14748E9" units="cm"/>
-          <inkml:channel name="F" type="integer" max="32767" units="dev"/>
-          <inkml:channel name="OA" type="integer" max="360" units="deg"/>
-          <inkml:channel name="OE" type="integer" max="90" units="deg"/>
-        </inkml:traceFormat>
-        <inkml:channelProperties>
-          <inkml:channelProperty channel="X" name="resolution" value="1000" units="1/cm"/>
-          <inkml:channelProperty channel="Y" name="resolution" value="1000" units="1/cm"/>
-          <inkml:channelProperty channel="F" name="resolution" value="0" units="1/dev"/>
-          <inkml:channelProperty channel="OA" name="resolution" value="1000" units="1/deg"/>
-          <inkml:channelProperty channel="OE" name="resolution" value="1000" units="1/deg"/>
-        </inkml:channelProperties>
-      </inkml:inkSource>
-      <inkml:timestamp xml:id="ts0" timeString="2026-03-20T17:28:50.481"/>
-    </inkml:context>
-    <inkml:brush xml:id="br0">
-      <inkml:brushProperty name="width" value="0.2" units="cm"/>
-      <inkml:brushProperty name="height" value="0.2" units="cm"/>
-      <inkml:brushProperty name="color" value="#FFC114"/>
-    </inkml:brush>
-  </inkml:definitions>
-  <inkml:trace contextRef="#ctx0" brushRef="#br0">1 5 4552 0 0,'0'0'4193'0'0,"13"-5"-2953"0"0</inkml:trace>
 </inkml:ink>
 </file>
 
@@ -1332,7 +1444,7 @@
           <a:p>
             <a:fld id="{CB233BD1-3BA8-448D-9D08-7846095EA517}" type="datetimeFigureOut">
               <a:rPr lang="en-US" smtClean="0"/>
-              <a:t>5/21/2026</a:t>
+              <a:t>6/12/2026</a:t>
             </a:fld>
             <a:endParaRPr lang="en-US"/>
           </a:p>
@@ -1746,7 +1858,7 @@
           <a:p>
             <a:fld id="{6383FAE1-13DE-4511-8C1B-C8AFB720664C}" type="datetimeFigureOut">
               <a:rPr lang="en-US" smtClean="0"/>
-              <a:t>5/21/2026</a:t>
+              <a:t>6/12/2026</a:t>
             </a:fld>
             <a:endParaRPr lang="en-US"/>
           </a:p>
@@ -1944,7 +2056,7 @@
           <a:p>
             <a:fld id="{6383FAE1-13DE-4511-8C1B-C8AFB720664C}" type="datetimeFigureOut">
               <a:rPr lang="en-US" smtClean="0"/>
-              <a:t>5/21/2026</a:t>
+              <a:t>6/12/2026</a:t>
             </a:fld>
             <a:endParaRPr lang="en-US"/>
           </a:p>
@@ -2152,7 +2264,7 @@
           <a:p>
             <a:fld id="{6383FAE1-13DE-4511-8C1B-C8AFB720664C}" type="datetimeFigureOut">
               <a:rPr lang="en-US" smtClean="0"/>
-              <a:t>5/21/2026</a:t>
+              <a:t>6/12/2026</a:t>
             </a:fld>
             <a:endParaRPr lang="en-US"/>
           </a:p>
@@ -2350,7 +2462,7 @@
           <a:p>
             <a:fld id="{6383FAE1-13DE-4511-8C1B-C8AFB720664C}" type="datetimeFigureOut">
               <a:rPr lang="en-US" smtClean="0"/>
-              <a:t>5/21/2026</a:t>
+              <a:t>6/12/2026</a:t>
             </a:fld>
             <a:endParaRPr lang="en-US"/>
           </a:p>
@@ -2625,7 +2737,7 @@
           <a:p>
             <a:fld id="{6383FAE1-13DE-4511-8C1B-C8AFB720664C}" type="datetimeFigureOut">
               <a:rPr lang="en-US" smtClean="0"/>
-              <a:t>5/21/2026</a:t>
+              <a:t>6/12/2026</a:t>
             </a:fld>
             <a:endParaRPr lang="en-US"/>
           </a:p>
@@ -2890,7 +3002,7 @@
           <a:p>
             <a:fld id="{6383FAE1-13DE-4511-8C1B-C8AFB720664C}" type="datetimeFigureOut">
               <a:rPr lang="en-US" smtClean="0"/>
-              <a:t>5/21/2026</a:t>
+              <a:t>6/12/2026</a:t>
             </a:fld>
             <a:endParaRPr lang="en-US"/>
           </a:p>
@@ -3302,7 +3414,7 @@
           <a:p>
             <a:fld id="{6383FAE1-13DE-4511-8C1B-C8AFB720664C}" type="datetimeFigureOut">
               <a:rPr lang="en-US" smtClean="0"/>
-              <a:t>5/21/2026</a:t>
+              <a:t>6/12/2026</a:t>
             </a:fld>
             <a:endParaRPr lang="en-US"/>
           </a:p>
@@ -3443,7 +3555,7 @@
           <a:p>
             <a:fld id="{6383FAE1-13DE-4511-8C1B-C8AFB720664C}" type="datetimeFigureOut">
               <a:rPr lang="en-US" smtClean="0"/>
-              <a:t>5/21/2026</a:t>
+              <a:t>6/12/2026</a:t>
             </a:fld>
             <a:endParaRPr lang="en-US"/>
           </a:p>
@@ -3556,7 +3668,7 @@
           <a:p>
             <a:fld id="{6383FAE1-13DE-4511-8C1B-C8AFB720664C}" type="datetimeFigureOut">
               <a:rPr lang="en-US" smtClean="0"/>
-              <a:t>5/21/2026</a:t>
+              <a:t>6/12/2026</a:t>
             </a:fld>
             <a:endParaRPr lang="en-US"/>
           </a:p>
@@ -3867,7 +3979,7 @@
           <a:p>
             <a:fld id="{6383FAE1-13DE-4511-8C1B-C8AFB720664C}" type="datetimeFigureOut">
               <a:rPr lang="en-US" smtClean="0"/>
-              <a:t>5/21/2026</a:t>
+              <a:t>6/12/2026</a:t>
             </a:fld>
             <a:endParaRPr lang="en-US"/>
           </a:p>
@@ -4158,7 +4270,7 @@
           <a:p>
             <a:fld id="{6383FAE1-13DE-4511-8C1B-C8AFB720664C}" type="datetimeFigureOut">
               <a:rPr lang="en-US" smtClean="0"/>
-              <a:t>5/21/2026</a:t>
+              <a:t>6/12/2026</a:t>
             </a:fld>
             <a:endParaRPr lang="en-US"/>
           </a:p>
@@ -4402,7 +4514,7 @@
           <a:p>
             <a:fld id="{6383FAE1-13DE-4511-8C1B-C8AFB720664C}" type="datetimeFigureOut">
               <a:rPr lang="en-US" smtClean="0"/>
-              <a:t>5/21/2026</a:t>
+              <a:t>6/12/2026</a:t>
             </a:fld>
             <a:endParaRPr lang="en-US"/>
           </a:p>
@@ -4976,7 +5088,7 @@
         <p:spPr>
           <a:xfrm>
             <a:off x="477520" y="628872"/>
-            <a:ext cx="10292080" cy="5262979"/>
+            <a:ext cx="11345672" cy="5632311"/>
           </a:xfrm>
           <a:prstGeom prst="rect">
             <a:avLst/>
@@ -5046,7 +5158,29 @@
                   </a:schemeClr>
                 </a:solidFill>
               </a:rPr>
-              <a:t>So, we convert text → numbers (called </a:t>
+              <a:t>So, we convert </a:t>
+            </a:r>
+            <a:r>
+              <a:rPr lang="en-US" sz="2400" b="1" dirty="0">
+                <a:solidFill>
+                  <a:schemeClr val="accent6">
+                    <a:lumMod val="60000"/>
+                    <a:lumOff val="40000"/>
+                  </a:schemeClr>
+                </a:solidFill>
+              </a:rPr>
+              <a:t>text → numbers </a:t>
+            </a:r>
+            <a:r>
+              <a:rPr lang="en-US" sz="2400" dirty="0">
+                <a:solidFill>
+                  <a:schemeClr val="accent6">
+                    <a:lumMod val="60000"/>
+                    <a:lumOff val="40000"/>
+                  </a:schemeClr>
+                </a:solidFill>
+              </a:rPr>
+              <a:t>(called </a:t>
             </a:r>
             <a:r>
               <a:rPr lang="en-US" sz="2400" b="1" dirty="0">
@@ -5169,7 +5303,20 @@
                   </a:schemeClr>
                 </a:solidFill>
               </a:rPr>
-              <a:t>"Machine learning is powerful“ → [0.21, -0.45, 0.78, 0.11, ...]</a:t>
+              <a:t>"Machine learning is powerful“ → [0.21, -0.45, 0.78, 0.11, ..., -0.45]</a:t>
+            </a:r>
+          </a:p>
+          <a:p>
+            <a:r>
+              <a:rPr lang="en-US" sz="2400" dirty="0">
+                <a:solidFill>
+                  <a:schemeClr val="accent6">
+                    <a:lumMod val="60000"/>
+                    <a:lumOff val="40000"/>
+                  </a:schemeClr>
+                </a:solidFill>
+              </a:rPr>
+              <a:t>“The quick brown fox jumps”    -&gt; [0.023, -0.045, 0.128, -0.011, ..., 0.087, -0.032, 0.114]</a:t>
             </a:r>
           </a:p>
           <a:p>
@@ -5861,7 +6008,7 @@
                         <a:buNone/>
                       </a:pPr>
                       <a:r>
-                        <a:rPr lang="en-US" sz="2400">
+                        <a:rPr lang="en-US" sz="2400" dirty="0">
                           <a:solidFill>
                             <a:schemeClr val="accent6">
                               <a:lumMod val="60000"/>
@@ -6343,8 +6490,8 @@
         </p:nvSpPr>
         <p:spPr>
           <a:xfrm>
-            <a:off x="477520" y="1003776"/>
-            <a:ext cx="10292080" cy="1200329"/>
+            <a:off x="413512" y="436848"/>
+            <a:ext cx="7240016" cy="1569660"/>
           </a:xfrm>
           <a:prstGeom prst="rect">
             <a:avLst/>
@@ -6366,7 +6513,7 @@
                   </a:schemeClr>
                 </a:solidFill>
               </a:rPr>
-              <a:t>Definition OF VD:</a:t>
+              <a:t>Use of Vector DB:</a:t>
             </a:r>
           </a:p>
           <a:p>
@@ -6457,7 +6604,7 @@
         </p:blipFill>
         <p:spPr>
           <a:xfrm>
-            <a:off x="7254015" y="4630528"/>
+            <a:off x="1465863" y="3849624"/>
             <a:ext cx="2278097" cy="2227472"/>
           </a:xfrm>
           <a:prstGeom prst="rect">
@@ -6465,6 +6612,240 @@
           </a:prstGeom>
         </p:spPr>
       </p:pic>
+      <p:pic>
+        <p:nvPicPr>
+          <p:cNvPr id="3" name="Picture 2">
+            <a:extLst>
+              <a:ext uri="{FF2B5EF4-FFF2-40B4-BE49-F238E27FC236}">
+                <a16:creationId xmlns:a16="http://schemas.microsoft.com/office/drawing/2014/main" id="{C60D255A-2629-252B-53E0-895E2DAA3DA1}"/>
+              </a:ext>
+            </a:extLst>
+          </p:cNvPr>
+          <p:cNvPicPr>
+            <a:picLocks noChangeAspect="1"/>
+          </p:cNvPicPr>
+          <p:nvPr/>
+        </p:nvPicPr>
+        <p:blipFill>
+          <a:blip r:embed="rId3"/>
+          <a:stretch>
+            <a:fillRect/>
+          </a:stretch>
+        </p:blipFill>
+        <p:spPr>
+          <a:xfrm>
+            <a:off x="8366761" y="180845"/>
+            <a:ext cx="3825240" cy="6439475"/>
+          </a:xfrm>
+          <a:prstGeom prst="rect">
+            <a:avLst/>
+          </a:prstGeom>
+        </p:spPr>
+      </p:pic>
+      <mc:AlternateContent xmlns:mc="http://schemas.openxmlformats.org/markup-compatibility/2006">
+        <mc:Choice xmlns:p14="http://schemas.microsoft.com/office/powerpoint/2010/main" Requires="p14">
+          <p:contentPart p14:bwMode="auto" r:id="rId4">
+            <p14:nvContentPartPr>
+              <p14:cNvPr id="4" name="Ink 3">
+                <a:extLst>
+                  <a:ext uri="{FF2B5EF4-FFF2-40B4-BE49-F238E27FC236}">
+                    <a16:creationId xmlns:a16="http://schemas.microsoft.com/office/drawing/2014/main" id="{016CD4CA-E9FE-E3D0-699A-A56FBF4152CF}"/>
+                  </a:ext>
+                </a:extLst>
+              </p14:cNvPr>
+              <p14:cNvContentPartPr/>
+              <p14:nvPr/>
+            </p14:nvContentPartPr>
+            <p14:xfrm>
+              <a:off x="9189504" y="304056"/>
+              <a:ext cx="294120" cy="206640"/>
+            </p14:xfrm>
+          </p:contentPart>
+        </mc:Choice>
+        <mc:Fallback>
+          <p:pic>
+            <p:nvPicPr>
+              <p:cNvPr id="4" name="Ink 3">
+                <a:extLst>
+                  <a:ext uri="{FF2B5EF4-FFF2-40B4-BE49-F238E27FC236}">
+                    <a16:creationId xmlns:a16="http://schemas.microsoft.com/office/drawing/2014/main" id="{016CD4CA-E9FE-E3D0-699A-A56FBF4152CF}"/>
+                  </a:ext>
+                </a:extLst>
+              </p:cNvPr>
+              <p:cNvPicPr/>
+              <p:nvPr/>
+            </p:nvPicPr>
+            <p:blipFill>
+              <a:blip r:embed="rId5"/>
+              <a:stretch>
+                <a:fillRect/>
+              </a:stretch>
+            </p:blipFill>
+            <p:spPr>
+              <a:xfrm>
+                <a:off x="9171864" y="286416"/>
+                <a:ext cx="329760" cy="242280"/>
+              </a:xfrm>
+              <a:prstGeom prst="rect">
+                <a:avLst/>
+              </a:prstGeom>
+            </p:spPr>
+          </p:pic>
+        </mc:Fallback>
+      </mc:AlternateContent>
+      <mc:AlternateContent xmlns:mc="http://schemas.openxmlformats.org/markup-compatibility/2006">
+        <mc:Choice xmlns:p14="http://schemas.microsoft.com/office/powerpoint/2010/main" Requires="p14">
+          <p:contentPart p14:bwMode="auto" r:id="rId6">
+            <p14:nvContentPartPr>
+              <p14:cNvPr id="5" name="Ink 4">
+                <a:extLst>
+                  <a:ext uri="{FF2B5EF4-FFF2-40B4-BE49-F238E27FC236}">
+                    <a16:creationId xmlns:a16="http://schemas.microsoft.com/office/drawing/2014/main" id="{2AE7A7B7-74EA-8165-4254-07B354CDC99C}"/>
+                  </a:ext>
+                </a:extLst>
+              </p14:cNvPr>
+              <p14:cNvContentPartPr/>
+              <p14:nvPr/>
+            </p14:nvContentPartPr>
+            <p14:xfrm>
+              <a:off x="11292624" y="602496"/>
+              <a:ext cx="581400" cy="37800"/>
+            </p14:xfrm>
+          </p:contentPart>
+        </mc:Choice>
+        <mc:Fallback>
+          <p:pic>
+            <p:nvPicPr>
+              <p:cNvPr id="5" name="Ink 4">
+                <a:extLst>
+                  <a:ext uri="{FF2B5EF4-FFF2-40B4-BE49-F238E27FC236}">
+                    <a16:creationId xmlns:a16="http://schemas.microsoft.com/office/drawing/2014/main" id="{2AE7A7B7-74EA-8165-4254-07B354CDC99C}"/>
+                  </a:ext>
+                </a:extLst>
+              </p:cNvPr>
+              <p:cNvPicPr/>
+              <p:nvPr/>
+            </p:nvPicPr>
+            <p:blipFill>
+              <a:blip r:embed="rId7"/>
+              <a:stretch>
+                <a:fillRect/>
+              </a:stretch>
+            </p:blipFill>
+            <p:spPr>
+              <a:xfrm>
+                <a:off x="11274984" y="584856"/>
+                <a:ext cx="617040" cy="73440"/>
+              </a:xfrm>
+              <a:prstGeom prst="rect">
+                <a:avLst/>
+              </a:prstGeom>
+            </p:spPr>
+          </p:pic>
+        </mc:Fallback>
+      </mc:AlternateContent>
+      <mc:AlternateContent xmlns:mc="http://schemas.openxmlformats.org/markup-compatibility/2006">
+        <mc:Choice xmlns:p14="http://schemas.microsoft.com/office/powerpoint/2010/main" Requires="p14">
+          <p:contentPart p14:bwMode="auto" r:id="rId8">
+            <p14:nvContentPartPr>
+              <p14:cNvPr id="7" name="Ink 6">
+                <a:extLst>
+                  <a:ext uri="{FF2B5EF4-FFF2-40B4-BE49-F238E27FC236}">
+                    <a16:creationId xmlns:a16="http://schemas.microsoft.com/office/drawing/2014/main" id="{5874A6B1-E784-23E9-5EE9-83A9C77E6E02}"/>
+                  </a:ext>
+                </a:extLst>
+              </p14:cNvPr>
+              <p14:cNvContentPartPr/>
+              <p14:nvPr/>
+            </p14:nvContentPartPr>
+            <p14:xfrm>
+              <a:off x="9729144" y="1051416"/>
+              <a:ext cx="393840" cy="360"/>
+            </p14:xfrm>
+          </p:contentPart>
+        </mc:Choice>
+        <mc:Fallback>
+          <p:pic>
+            <p:nvPicPr>
+              <p:cNvPr id="7" name="Ink 6">
+                <a:extLst>
+                  <a:ext uri="{FF2B5EF4-FFF2-40B4-BE49-F238E27FC236}">
+                    <a16:creationId xmlns:a16="http://schemas.microsoft.com/office/drawing/2014/main" id="{5874A6B1-E784-23E9-5EE9-83A9C77E6E02}"/>
+                  </a:ext>
+                </a:extLst>
+              </p:cNvPr>
+              <p:cNvPicPr/>
+              <p:nvPr/>
+            </p:nvPicPr>
+            <p:blipFill>
+              <a:blip r:embed="rId9"/>
+              <a:stretch>
+                <a:fillRect/>
+              </a:stretch>
+            </p:blipFill>
+            <p:spPr>
+              <a:xfrm>
+                <a:off x="9711504" y="1033776"/>
+                <a:ext cx="429480" cy="36000"/>
+              </a:xfrm>
+              <a:prstGeom prst="rect">
+                <a:avLst/>
+              </a:prstGeom>
+            </p:spPr>
+          </p:pic>
+        </mc:Fallback>
+      </mc:AlternateContent>
+      <mc:AlternateContent xmlns:mc="http://schemas.openxmlformats.org/markup-compatibility/2006">
+        <mc:Choice xmlns:p14="http://schemas.microsoft.com/office/powerpoint/2010/main" Requires="p14">
+          <p:contentPart p14:bwMode="auto" r:id="rId10">
+            <p14:nvContentPartPr>
+              <p14:cNvPr id="8" name="Ink 7">
+                <a:extLst>
+                  <a:ext uri="{FF2B5EF4-FFF2-40B4-BE49-F238E27FC236}">
+                    <a16:creationId xmlns:a16="http://schemas.microsoft.com/office/drawing/2014/main" id="{B1034580-57D1-6619-2567-4084BC3ADDA9}"/>
+                  </a:ext>
+                </a:extLst>
+              </p14:cNvPr>
+              <p14:cNvContentPartPr/>
+              <p14:nvPr/>
+            </p14:nvContentPartPr>
+            <p14:xfrm>
+              <a:off x="8503704" y="1316736"/>
+              <a:ext cx="1287360" cy="360"/>
+            </p14:xfrm>
+          </p:contentPart>
+        </mc:Choice>
+        <mc:Fallback>
+          <p:pic>
+            <p:nvPicPr>
+              <p:cNvPr id="8" name="Ink 7">
+                <a:extLst>
+                  <a:ext uri="{FF2B5EF4-FFF2-40B4-BE49-F238E27FC236}">
+                    <a16:creationId xmlns:a16="http://schemas.microsoft.com/office/drawing/2014/main" id="{B1034580-57D1-6619-2567-4084BC3ADDA9}"/>
+                  </a:ext>
+                </a:extLst>
+              </p:cNvPr>
+              <p:cNvPicPr/>
+              <p:nvPr/>
+            </p:nvPicPr>
+            <p:blipFill>
+              <a:blip r:embed="rId11"/>
+              <a:stretch>
+                <a:fillRect/>
+              </a:stretch>
+            </p:blipFill>
+            <p:spPr>
+              <a:xfrm>
+                <a:off x="8485704" y="1298736"/>
+                <a:ext cx="1323000" cy="36000"/>
+              </a:xfrm>
+              <a:prstGeom prst="rect">
+                <a:avLst/>
+              </a:prstGeom>
+            </p:spPr>
+          </p:pic>
+        </mc:Fallback>
+      </mc:AlternateContent>
     </p:spTree>
     <p:extLst>
       <p:ext uri="{BB962C8B-B14F-4D97-AF65-F5344CB8AC3E}">
@@ -6682,29 +7063,7 @@
                   </a:schemeClr>
                 </a:solidFill>
               </a:rPr>
-              <a:t>Chroma DB, </a:t>
-            </a:r>
-            <a:r>
-              <a:rPr lang="en-US" sz="2400" dirty="0" err="1">
-                <a:solidFill>
-                  <a:schemeClr val="accent6">
-                    <a:lumMod val="60000"/>
-                    <a:lumOff val="40000"/>
-                  </a:schemeClr>
-                </a:solidFill>
-              </a:rPr>
-              <a:t>Weavite</a:t>
-            </a:r>
-            <a:r>
-              <a:rPr lang="en-US" sz="2400" dirty="0">
-                <a:solidFill>
-                  <a:schemeClr val="accent6">
-                    <a:lumMod val="60000"/>
-                    <a:lumOff val="40000"/>
-                  </a:schemeClr>
-                </a:solidFill>
-              </a:rPr>
-              <a:t>, etc.</a:t>
+              <a:t>Chroma DB, Weavite, etc.</a:t>
             </a:r>
           </a:p>
         </p:txBody>
@@ -7301,14 +7660,19 @@
                   </a:schemeClr>
                 </a:solidFill>
               </a:rPr>
-              <a:t>Fast similarity search</a:t>
-            </a:r>
-          </a:p>
-          <a:p>
-            <a:pPr marL="342900" indent="-342900">
-              <a:buFont typeface="Arial" panose="020B0604020202020204" pitchFamily="34" charset="0"/>
-              <a:buChar char="•"/>
-            </a:pPr>
+              <a:t>Fast </a:t>
+            </a:r>
+            <a:r>
+              <a:rPr lang="en-US" sz="2400" b="1" dirty="0">
+                <a:solidFill>
+                  <a:schemeClr val="accent6">
+                    <a:lumMod val="60000"/>
+                    <a:lumOff val="40000"/>
+                  </a:schemeClr>
+                </a:solidFill>
+              </a:rPr>
+              <a:t>similarity</a:t>
+            </a:r>
             <a:r>
               <a:rPr lang="en-US" sz="2400" dirty="0">
                 <a:solidFill>
@@ -7318,7 +7682,46 @@
                   </a:schemeClr>
                 </a:solidFill>
               </a:rPr>
-              <a:t>Works with meaning, not keywords: Cars could automobile, 4 wheelers, transport, etc.</a:t>
+              <a:t> search</a:t>
+            </a:r>
+          </a:p>
+          <a:p>
+            <a:pPr marL="342900" indent="-342900">
+              <a:buFont typeface="Arial" panose="020B0604020202020204" pitchFamily="34" charset="0"/>
+              <a:buChar char="•"/>
+            </a:pPr>
+            <a:r>
+              <a:rPr lang="en-US" sz="2400" dirty="0">
+                <a:solidFill>
+                  <a:schemeClr val="accent6">
+                    <a:lumMod val="60000"/>
+                    <a:lumOff val="40000"/>
+                  </a:schemeClr>
+                </a:solidFill>
+              </a:rPr>
+              <a:t>Works with </a:t>
+            </a:r>
+            <a:r>
+              <a:rPr lang="en-US" sz="2400" b="1" dirty="0">
+                <a:solidFill>
+                  <a:schemeClr val="accent6">
+                    <a:lumMod val="60000"/>
+                    <a:lumOff val="40000"/>
+                  </a:schemeClr>
+                </a:solidFill>
+              </a:rPr>
+              <a:t>meaning</a:t>
+            </a:r>
+            <a:r>
+              <a:rPr lang="en-US" sz="2400" dirty="0">
+                <a:solidFill>
+                  <a:schemeClr val="accent6">
+                    <a:lumMod val="60000"/>
+                    <a:lumOff val="40000"/>
+                  </a:schemeClr>
+                </a:solidFill>
+              </a:rPr>
+              <a:t>, not keywords: Cars could automobile, 4 wheelers, transport, etc.</a:t>
             </a:r>
           </a:p>
           <a:p>
@@ -7514,7 +7917,7 @@
                   </a:schemeClr>
                 </a:solidFill>
               </a:rPr>
-              <a:t>Results would be:</a:t>
+              <a:t>Results would be articles containing:</a:t>
             </a:r>
           </a:p>
           <a:p>
@@ -7845,7 +8248,7 @@
                   </a:schemeClr>
                 </a:solidFill>
               </a:rPr>
-              <a:t>Results:</a:t>
+              <a:t>Results would be :</a:t>
             </a:r>
           </a:p>
           <a:p>
@@ -7988,7 +8391,7 @@
         </p:blipFill>
         <p:spPr>
           <a:xfrm>
-            <a:off x="7531692" y="1797883"/>
+            <a:off x="7599680" y="1450151"/>
             <a:ext cx="3336376" cy="3262233"/>
           </a:xfrm>
           <a:prstGeom prst="rect">
@@ -8201,7 +8604,7 @@
                   </a:schemeClr>
                 </a:solidFill>
               </a:rPr>
-              <a:t>Suppose the query: </a:t>
+              <a:t>Suppose the user query: </a:t>
             </a:r>
           </a:p>
           <a:p>
@@ -9918,7 +10321,7 @@
         <p:spPr>
           <a:xfrm>
             <a:off x="123952" y="259048"/>
-            <a:ext cx="7366000" cy="2308324"/>
+            <a:ext cx="6624320" cy="2308324"/>
           </a:xfrm>
           <a:prstGeom prst="rect">
             <a:avLst/>
@@ -9967,7 +10370,7 @@
                   </a:schemeClr>
                 </a:solidFill>
               </a:rPr>
-              <a:t>Chatbots (like ChatGPT)</a:t>
+              <a:t>Chatbots (like ChatGPT, or amazon)</a:t>
             </a:r>
           </a:p>
           <a:p>
@@ -10025,10 +10428,10 @@
       </p:sp>
       <p:pic>
         <p:nvPicPr>
-          <p:cNvPr id="2" name="Picture 1">
+          <p:cNvPr id="3" name="Picture 2">
             <a:extLst>
               <a:ext uri="{FF2B5EF4-FFF2-40B4-BE49-F238E27FC236}">
-                <a16:creationId xmlns:a16="http://schemas.microsoft.com/office/drawing/2014/main" id="{64ACE229-9138-0F80-4A2B-1DDA16A48390}"/>
+                <a16:creationId xmlns:a16="http://schemas.microsoft.com/office/drawing/2014/main" id="{7E244EAE-2A15-3575-31C3-AD530939072C}"/>
               </a:ext>
             </a:extLst>
           </p:cNvPr>
@@ -10045,8 +10448,8 @@
         </p:blipFill>
         <p:spPr>
           <a:xfrm>
-            <a:off x="3822766" y="1865376"/>
-            <a:ext cx="8387140" cy="4461742"/>
+            <a:off x="6967728" y="49087"/>
+            <a:ext cx="4044697" cy="6808913"/>
           </a:xfrm>
           <a:prstGeom prst="rect">
             <a:avLst/>
